--- a/data/archive/pulse_2026-03-13.pptx
+++ b/data/archive/pulse_2026-03-13.pptx
@@ -4030,11 +4030,11 @@
               </a:defRPr>
             </a:pPr>
             <a:r>
-              <a:t>*Hi &lt;!here&gt;! Our Connect Groups Spring Season is open!* :seedling::celebrate:</a:t>
+              <a:t>_Hi everyone &lt;!channel&gt;_ :wave:</a:t>
             </a:r>
             <a:br/>
             <a:r>
-              <a:t>Co...</a:t>
+              <a:t>_I recorded a short video showing how I built a ...</a:t>
             </a:r>
           </a:p>
         </p:txBody>
@@ -4070,15 +4070,19 @@
               </a:defRPr>
             </a:pPr>
             <a:r>
-              <a:t>"*Hi &lt;!here&gt;! Our Connect Groups Spring Season is open!* :seedling::celebrate:</a:t>
+              <a:t>"_Hi everyone &lt;!channel&gt;_ :wave:</a:t>
             </a:r>
             <a:br/>
             <a:r>
-              <a:t>Connect Groups at Appodeal run in *seasons*, and we’re now officially entering the *Spring Season (March–May)!* :blossom::tulip::seedling:</a:t>
+              <a:t>_I recorded a short video showing how I built a fully automated AI-powered system — from idea to production — using only AI tools and zero coding experience._</a:t>
             </a:r>
             <a:br/>
             <a:r>
-              <a:t>If you’re new: Connect Groups are *&lt;https://appodeal.circle.so/c/welcome/|employee-"</a:t>
+              <a:t>_Slack data → AI curation → auto-deploying a live dashboard on office TVs. All running on autopilot._</a:t>
+            </a:r>
+            <a:br/>
+            <a:r>
+              <a:t>_If I c"</a:t>
             </a:r>
           </a:p>
         </p:txBody>
@@ -4114,7 +4118,7 @@
               </a:defRPr>
             </a:pPr>
             <a:r>
-              <a:t>— Katarzyna Raniszewska</a:t>
+              <a:t>— Liliya Garifullina</a:t>
             </a:r>
           </a:p>
         </p:txBody>

--- a/data/archive/pulse_2026-03-13.pptx
+++ b/data/archive/pulse_2026-03-13.pptx
@@ -17,6 +17,19 @@
     <p:sldId id="265" r:id="rId16"/>
     <p:sldId id="266" r:id="rId17"/>
     <p:sldId id="267" r:id="rId18"/>
+    <p:sldId id="268" r:id="rId19"/>
+    <p:sldId id="269" r:id="rId20"/>
+    <p:sldId id="270" r:id="rId21"/>
+    <p:sldId id="271" r:id="rId22"/>
+    <p:sldId id="272" r:id="rId23"/>
+    <p:sldId id="273" r:id="rId24"/>
+    <p:sldId id="274" r:id="rId25"/>
+    <p:sldId id="275" r:id="rId26"/>
+    <p:sldId id="276" r:id="rId27"/>
+    <p:sldId id="277" r:id="rId28"/>
+    <p:sldId id="278" r:id="rId29"/>
+    <p:sldId id="279" r:id="rId30"/>
+    <p:sldId id="280" r:id="rId31"/>
   </p:sldIdLst>
   <p:sldSz cx="12191695" cy="6858000" type="screen4x3"/>
   <p:notesSz cx="6858000" cy="9144000"/>
@@ -3299,7 +3312,7 @@
             <a:avLst/>
           </a:prstGeom>
           <a:solidFill>
-            <a:srgbClr val="00FFD1"/>
+            <a:srgbClr val="FFB72B"/>
           </a:solidFill>
           <a:ln>
             <a:noFill/>
@@ -3352,13 +3365,13 @@
             <a:pPr algn="l">
               <a:defRPr sz="1000" b="1">
                 <a:solidFill>
-                  <a:srgbClr val="00FFD1"/>
-                </a:solidFill>
-                <a:latin typeface="Calibri"/>
-              </a:defRPr>
-            </a:pPr>
-            <a:r>
-              <a:t>📢  OFFICE LIFE</a:t>
+                  <a:srgbClr val="FFB72B"/>
+                </a:solidFill>
+                <a:latin typeface="Calibri"/>
+              </a:defRPr>
+            </a:pPr>
+            <a:r>
+              <a:t>🎂  CELEBRATION</a:t>
             </a:r>
           </a:p>
         </p:txBody>
@@ -3388,13 +3401,13 @@
             <a:pPr algn="l">
               <a:defRPr sz="3200" b="1" i="0">
                 <a:solidFill>
-                  <a:srgbClr val="00FFD1"/>
-                </a:solidFill>
-                <a:latin typeface="Calibri"/>
-              </a:defRPr>
-            </a:pPr>
-            <a:r>
-              <a:t>From #general</a:t>
+                  <a:srgbClr val="FFB72B"/>
+                </a:solidFill>
+                <a:latin typeface="Calibri"/>
+              </a:defRPr>
+            </a:pPr>
+            <a:r>
+              <a:t>Happy Birthday!</a:t>
             </a:r>
           </a:p>
         </p:txBody>
@@ -3408,6 +3421,114 @@
         <p:spPr>
           <a:xfrm>
             <a:off x="1097280" y="2103120"/>
+            <a:ext cx="9966960" cy="640080"/>
+          </a:xfrm>
+          <a:prstGeom prst="rect">
+            <a:avLst/>
+          </a:prstGeom>
+          <a:noFill/>
+        </p:spPr>
+        <p:txBody>
+          <a:bodyPr wrap="square">
+            <a:spAutoFit/>
+          </a:bodyPr>
+          <a:lstStyle/>
+          <a:p>
+            <a:pPr algn="l">
+              <a:defRPr sz="2800" b="1" i="0">
+                <a:solidFill>
+                  <a:srgbClr val="FFFFFF"/>
+                </a:solidFill>
+                <a:latin typeface="Calibri"/>
+              </a:defRPr>
+            </a:pPr>
+            <a:r>
+              <a:t>Anna Timoshenko</a:t>
+            </a:r>
+          </a:p>
+        </p:txBody>
+      </p:sp>
+      <p:sp>
+        <p:nvSpPr>
+          <p:cNvPr id="6" name="TextBox 5"/>
+          <p:cNvSpPr txBox="1"/>
+          <p:nvPr/>
+        </p:nvSpPr>
+        <p:spPr>
+          <a:xfrm>
+            <a:off x="1097280" y="2743200"/>
+            <a:ext cx="9966960" cy="365760"/>
+          </a:xfrm>
+          <a:prstGeom prst="rect">
+            <a:avLst/>
+          </a:prstGeom>
+          <a:noFill/>
+        </p:spPr>
+        <p:txBody>
+          <a:bodyPr wrap="square">
+            <a:spAutoFit/>
+          </a:bodyPr>
+          <a:lstStyle/>
+          <a:p>
+            <a:pPr algn="l">
+              <a:defRPr sz="1400" b="0" i="0">
+                <a:solidFill>
+                  <a:srgbClr val="8F95A3"/>
+                </a:solidFill>
+                <a:latin typeface="Calibri"/>
+              </a:defRPr>
+            </a:pPr>
+            <a:r>
+              <a:t>March 13</a:t>
+            </a:r>
+          </a:p>
+        </p:txBody>
+      </p:sp>
+      <p:sp>
+        <p:nvSpPr>
+          <p:cNvPr id="7" name="TextBox 6"/>
+          <p:cNvSpPr txBox="1"/>
+          <p:nvPr/>
+        </p:nvSpPr>
+        <p:spPr>
+          <a:xfrm>
+            <a:off x="1097280" y="3291840"/>
+            <a:ext cx="9966960" cy="914400"/>
+          </a:xfrm>
+          <a:prstGeom prst="rect">
+            <a:avLst/>
+          </a:prstGeom>
+          <a:noFill/>
+        </p:spPr>
+        <p:txBody>
+          <a:bodyPr wrap="square">
+            <a:spAutoFit/>
+          </a:bodyPr>
+          <a:lstStyle/>
+          <a:p>
+            <a:pPr algn="l">
+              <a:defRPr sz="1600" b="0" i="0">
+                <a:solidFill>
+                  <a:srgbClr val="E2E2EA"/>
+                </a:solidFill>
+                <a:latin typeface="Calibri"/>
+              </a:defRPr>
+            </a:pPr>
+            <a:r>
+              <a:t>Wishing you an amazing day filled with joy and celebration!</a:t>
+            </a:r>
+          </a:p>
+        </p:txBody>
+      </p:sp>
+      <p:sp>
+        <p:nvSpPr>
+          <p:cNvPr id="8" name="TextBox 7"/>
+          <p:cNvSpPr txBox="1"/>
+          <p:nvPr/>
+        </p:nvSpPr>
+        <p:spPr>
+          <a:xfrm>
+            <a:off x="1097280" y="4572000"/>
             <a:ext cx="9966960" cy="457200"/>
           </a:xfrm>
           <a:prstGeom prst="rect">
@@ -3422,141 +3543,15 @@
           <a:lstStyle/>
           <a:p>
             <a:pPr algn="l">
-              <a:defRPr sz="1800" b="1" i="0">
-                <a:solidFill>
-                  <a:srgbClr val="FFFFFF"/>
-                </a:solidFill>
-                <a:latin typeface="Calibri"/>
-              </a:defRPr>
-            </a:pPr>
-            <a:r>
-              <a:t>:wave: Hello everyone &lt;!channel&gt;!</a:t>
-            </a:r>
-            <a:br/>
-            <a:br/>
-            <a:r>
-              <a:t>I’d like to share a cool thing our DevOps tea...</a:t>
-            </a:r>
-          </a:p>
-        </p:txBody>
-      </p:sp>
-      <p:sp>
-        <p:nvSpPr>
-          <p:cNvPr id="6" name="TextBox 5"/>
-          <p:cNvSpPr txBox="1"/>
-          <p:nvPr/>
-        </p:nvSpPr>
-        <p:spPr>
-          <a:xfrm>
-            <a:off x="1371600" y="2743200"/>
-            <a:ext cx="9692640" cy="1828800"/>
-          </a:xfrm>
-          <a:prstGeom prst="rect">
-            <a:avLst/>
-          </a:prstGeom>
-          <a:noFill/>
-        </p:spPr>
-        <p:txBody>
-          <a:bodyPr wrap="square">
-            <a:spAutoFit/>
-          </a:bodyPr>
-          <a:lstStyle/>
-          <a:p>
-            <a:pPr algn="l">
-              <a:defRPr sz="1500" b="0" i="1">
-                <a:solidFill>
-                  <a:srgbClr val="E2E2EA"/>
-                </a:solidFill>
-                <a:latin typeface="Calibri"/>
-              </a:defRPr>
-            </a:pPr>
-            <a:r>
-              <a:t>":wave: Hello everyone &lt;!channel&gt;!</a:t>
-            </a:r>
-            <a:br/>
-            <a:br/>
-            <a:r>
-              <a:t>I’d like to share a cool thing our DevOps team has set up for all of us.</a:t>
-            </a:r>
-            <a:br/>
-            <a:r>
-              <a:t>Introducing *&lt;https://coolify.appodeal.com|Coolify&gt;* - a service that allows you to deploy your applications in just a few clicks.</a:t>
-            </a:r>
-            <a:br/>
-            <a:r>
-              <a:t>:memo: I’ve written a short guide on how to use it &lt;https://a"</a:t>
-            </a:r>
-          </a:p>
-        </p:txBody>
-      </p:sp>
-      <p:sp>
-        <p:nvSpPr>
-          <p:cNvPr id="7" name="TextBox 6"/>
-          <p:cNvSpPr txBox="1"/>
-          <p:nvPr/>
-        </p:nvSpPr>
-        <p:spPr>
-          <a:xfrm>
-            <a:off x="1097280" y="4754880"/>
-            <a:ext cx="9966960" cy="365760"/>
-          </a:xfrm>
-          <a:prstGeom prst="rect">
-            <a:avLst/>
-          </a:prstGeom>
-          <a:noFill/>
-        </p:spPr>
-        <p:txBody>
-          <a:bodyPr wrap="square">
-            <a:spAutoFit/>
-          </a:bodyPr>
-          <a:lstStyle/>
-          <a:p>
-            <a:pPr algn="l">
-              <a:defRPr sz="1400" b="0" i="0">
-                <a:solidFill>
-                  <a:srgbClr val="8F95A3"/>
-                </a:solidFill>
-                <a:latin typeface="Calibri"/>
-              </a:defRPr>
-            </a:pPr>
-            <a:r>
-              <a:t>— Gleb Krahotkin</a:t>
-            </a:r>
-          </a:p>
-        </p:txBody>
-      </p:sp>
-      <p:sp>
-        <p:nvSpPr>
-          <p:cNvPr id="8" name="TextBox 7"/>
-          <p:cNvSpPr txBox="1"/>
-          <p:nvPr/>
-        </p:nvSpPr>
-        <p:spPr>
-          <a:xfrm>
-            <a:off x="1097280" y="5760720"/>
-            <a:ext cx="9966960" cy="274320"/>
-          </a:xfrm>
-          <a:prstGeom prst="rect">
-            <a:avLst/>
-          </a:prstGeom>
-          <a:noFill/>
-        </p:spPr>
-        <p:txBody>
-          <a:bodyPr wrap="square">
-            <a:spAutoFit/>
-          </a:bodyPr>
-          <a:lstStyle/>
-          <a:p>
-            <a:pPr algn="l">
-              <a:defRPr sz="1100" b="0" i="0">
-                <a:solidFill>
-                  <a:srgbClr val="5C6270"/>
-                </a:solidFill>
-                <a:latin typeface="Calibri"/>
-              </a:defRPr>
-            </a:pPr>
-            <a:r>
-              <a:t>#general</a:t>
+              <a:defRPr sz="1400" b="0" i="1">
+                <a:solidFill>
+                  <a:srgbClr val="FFB72B"/>
+                </a:solidFill>
+                <a:latin typeface="Calibri"/>
+              </a:defRPr>
+            </a:pPr>
+            <a:r>
+              <a:t>With love, Your Appodeal Team 💜</a:t>
             </a:r>
           </a:p>
         </p:txBody>
@@ -3602,7 +3597,7 @@
             <a:avLst/>
           </a:prstGeom>
           <a:solidFill>
-            <a:srgbClr val="00FFD1"/>
+            <a:srgbClr val="FFB72B"/>
           </a:solidFill>
           <a:ln>
             <a:noFill/>
@@ -3655,13 +3650,13 @@
             <a:pPr algn="l">
               <a:defRPr sz="1000" b="1">
                 <a:solidFill>
-                  <a:srgbClr val="00FFD1"/>
-                </a:solidFill>
-                <a:latin typeface="Calibri"/>
-              </a:defRPr>
-            </a:pPr>
-            <a:r>
-              <a:t>📢  OFFICE LIFE</a:t>
+                  <a:srgbClr val="FFB72B"/>
+                </a:solidFill>
+                <a:latin typeface="Calibri"/>
+              </a:defRPr>
+            </a:pPr>
+            <a:r>
+              <a:t>🎂  CELEBRATION</a:t>
             </a:r>
           </a:p>
         </p:txBody>
@@ -3691,13 +3686,13 @@
             <a:pPr algn="l">
               <a:defRPr sz="3200" b="1" i="0">
                 <a:solidFill>
-                  <a:srgbClr val="00FFD1"/>
-                </a:solidFill>
-                <a:latin typeface="Calibri"/>
-              </a:defRPr>
-            </a:pPr>
-            <a:r>
-              <a:t>From #general</a:t>
+                  <a:srgbClr val="FFB72B"/>
+                </a:solidFill>
+                <a:latin typeface="Calibri"/>
+              </a:defRPr>
+            </a:pPr>
+            <a:r>
+              <a:t>Happy Birthday!</a:t>
             </a:r>
           </a:p>
         </p:txBody>
@@ -3711,6 +3706,114 @@
         <p:spPr>
           <a:xfrm>
             <a:off x="1097280" y="2103120"/>
+            <a:ext cx="9966960" cy="640080"/>
+          </a:xfrm>
+          <a:prstGeom prst="rect">
+            <a:avLst/>
+          </a:prstGeom>
+          <a:noFill/>
+        </p:spPr>
+        <p:txBody>
+          <a:bodyPr wrap="square">
+            <a:spAutoFit/>
+          </a:bodyPr>
+          <a:lstStyle/>
+          <a:p>
+            <a:pPr algn="l">
+              <a:defRPr sz="2800" b="1" i="0">
+                <a:solidFill>
+                  <a:srgbClr val="FFFFFF"/>
+                </a:solidFill>
+                <a:latin typeface="Calibri"/>
+              </a:defRPr>
+            </a:pPr>
+            <a:r>
+              <a:t>Samat Kurmanov</a:t>
+            </a:r>
+          </a:p>
+        </p:txBody>
+      </p:sp>
+      <p:sp>
+        <p:nvSpPr>
+          <p:cNvPr id="6" name="TextBox 5"/>
+          <p:cNvSpPr txBox="1"/>
+          <p:nvPr/>
+        </p:nvSpPr>
+        <p:spPr>
+          <a:xfrm>
+            <a:off x="1097280" y="2743200"/>
+            <a:ext cx="9966960" cy="365760"/>
+          </a:xfrm>
+          <a:prstGeom prst="rect">
+            <a:avLst/>
+          </a:prstGeom>
+          <a:noFill/>
+        </p:spPr>
+        <p:txBody>
+          <a:bodyPr wrap="square">
+            <a:spAutoFit/>
+          </a:bodyPr>
+          <a:lstStyle/>
+          <a:p>
+            <a:pPr algn="l">
+              <a:defRPr sz="1400" b="0" i="0">
+                <a:solidFill>
+                  <a:srgbClr val="8F95A3"/>
+                </a:solidFill>
+                <a:latin typeface="Calibri"/>
+              </a:defRPr>
+            </a:pPr>
+            <a:r>
+              <a:t>March 13</a:t>
+            </a:r>
+          </a:p>
+        </p:txBody>
+      </p:sp>
+      <p:sp>
+        <p:nvSpPr>
+          <p:cNvPr id="7" name="TextBox 6"/>
+          <p:cNvSpPr txBox="1"/>
+          <p:nvPr/>
+        </p:nvSpPr>
+        <p:spPr>
+          <a:xfrm>
+            <a:off x="1097280" y="3291840"/>
+            <a:ext cx="9966960" cy="914400"/>
+          </a:xfrm>
+          <a:prstGeom prst="rect">
+            <a:avLst/>
+          </a:prstGeom>
+          <a:noFill/>
+        </p:spPr>
+        <p:txBody>
+          <a:bodyPr wrap="square">
+            <a:spAutoFit/>
+          </a:bodyPr>
+          <a:lstStyle/>
+          <a:p>
+            <a:pPr algn="l">
+              <a:defRPr sz="1600" b="0" i="0">
+                <a:solidFill>
+                  <a:srgbClr val="E2E2EA"/>
+                </a:solidFill>
+                <a:latin typeface="Calibri"/>
+              </a:defRPr>
+            </a:pPr>
+            <a:r>
+              <a:t>Wishing you an amazing day filled with joy and celebration!</a:t>
+            </a:r>
+          </a:p>
+        </p:txBody>
+      </p:sp>
+      <p:sp>
+        <p:nvSpPr>
+          <p:cNvPr id="8" name="TextBox 7"/>
+          <p:cNvSpPr txBox="1"/>
+          <p:nvPr/>
+        </p:nvSpPr>
+        <p:spPr>
+          <a:xfrm>
+            <a:off x="1097280" y="4572000"/>
             <a:ext cx="9966960" cy="457200"/>
           </a:xfrm>
           <a:prstGeom prst="rect">
@@ -3725,135 +3828,15 @@
           <a:lstStyle/>
           <a:p>
             <a:pPr algn="l">
-              <a:defRPr sz="1800" b="1" i="0">
-                <a:solidFill>
-                  <a:srgbClr val="FFFFFF"/>
-                </a:solidFill>
-                <a:latin typeface="Calibri"/>
-              </a:defRPr>
-            </a:pPr>
-            <a:r>
-              <a:t>Hi &lt;!here&gt;! :woman-raising-hand: Thank you for joining our *11th Lunch &amp; Learn s...</a:t>
-            </a:r>
-          </a:p>
-        </p:txBody>
-      </p:sp>
-      <p:sp>
-        <p:nvSpPr>
-          <p:cNvPr id="6" name="TextBox 5"/>
-          <p:cNvSpPr txBox="1"/>
-          <p:nvPr/>
-        </p:nvSpPr>
-        <p:spPr>
-          <a:xfrm>
-            <a:off x="1371600" y="2743200"/>
-            <a:ext cx="9692640" cy="1828800"/>
-          </a:xfrm>
-          <a:prstGeom prst="rect">
-            <a:avLst/>
-          </a:prstGeom>
-          <a:noFill/>
-        </p:spPr>
-        <p:txBody>
-          <a:bodyPr wrap="square">
-            <a:spAutoFit/>
-          </a:bodyPr>
-          <a:lstStyle/>
-          <a:p>
-            <a:pPr algn="l">
-              <a:defRPr sz="1500" b="0" i="1">
-                <a:solidFill>
-                  <a:srgbClr val="E2E2EA"/>
-                </a:solidFill>
-                <a:latin typeface="Calibri"/>
-              </a:defRPr>
-            </a:pPr>
-            <a:r>
-              <a:t>"Hi &lt;!here&gt;! :woman-raising-hand: Thank you for joining our *11th Lunch &amp; Learn session!* :fire:</a:t>
-            </a:r>
-            <a:br/>
-            <a:r>
-              <a:t>A big thank-you to &lt;@U23FJLW5S&gt; for a very interesting presentation :heart:</a:t>
-            </a:r>
-            <a:br/>
-            <a:r>
-              <a:t>Below you can find:</a:t>
-            </a:r>
-            <a:br/>
-            <a:r>
-              <a:t>• :movie_camera: &lt;https://app.fireflies.ai/view/Lunch-and-Learn-How-we-detect-fraud-traffic-by-Timofey-Levan"</a:t>
-            </a:r>
-          </a:p>
-        </p:txBody>
-      </p:sp>
-      <p:sp>
-        <p:nvSpPr>
-          <p:cNvPr id="7" name="TextBox 6"/>
-          <p:cNvSpPr txBox="1"/>
-          <p:nvPr/>
-        </p:nvSpPr>
-        <p:spPr>
-          <a:xfrm>
-            <a:off x="1097280" y="4754880"/>
-            <a:ext cx="9966960" cy="365760"/>
-          </a:xfrm>
-          <a:prstGeom prst="rect">
-            <a:avLst/>
-          </a:prstGeom>
-          <a:noFill/>
-        </p:spPr>
-        <p:txBody>
-          <a:bodyPr wrap="square">
-            <a:spAutoFit/>
-          </a:bodyPr>
-          <a:lstStyle/>
-          <a:p>
-            <a:pPr algn="l">
-              <a:defRPr sz="1400" b="0" i="0">
-                <a:solidFill>
-                  <a:srgbClr val="8F95A3"/>
-                </a:solidFill>
-                <a:latin typeface="Calibri"/>
-              </a:defRPr>
-            </a:pPr>
-            <a:r>
-              <a:t>— Katarzyna Raniszewska</a:t>
-            </a:r>
-          </a:p>
-        </p:txBody>
-      </p:sp>
-      <p:sp>
-        <p:nvSpPr>
-          <p:cNvPr id="8" name="TextBox 7"/>
-          <p:cNvSpPr txBox="1"/>
-          <p:nvPr/>
-        </p:nvSpPr>
-        <p:spPr>
-          <a:xfrm>
-            <a:off x="1097280" y="5760720"/>
-            <a:ext cx="9966960" cy="274320"/>
-          </a:xfrm>
-          <a:prstGeom prst="rect">
-            <a:avLst/>
-          </a:prstGeom>
-          <a:noFill/>
-        </p:spPr>
-        <p:txBody>
-          <a:bodyPr wrap="square">
-            <a:spAutoFit/>
-          </a:bodyPr>
-          <a:lstStyle/>
-          <a:p>
-            <a:pPr algn="l">
-              <a:defRPr sz="1100" b="0" i="0">
-                <a:solidFill>
-                  <a:srgbClr val="5C6270"/>
-                </a:solidFill>
-                <a:latin typeface="Calibri"/>
-              </a:defRPr>
-            </a:pPr>
-            <a:r>
-              <a:t>#general</a:t>
+              <a:defRPr sz="1400" b="0" i="1">
+                <a:solidFill>
+                  <a:srgbClr val="FFB72B"/>
+                </a:solidFill>
+                <a:latin typeface="Calibri"/>
+              </a:defRPr>
+            </a:pPr>
+            <a:r>
+              <a:t>With love, Your Appodeal Team 💜</a:t>
             </a:r>
           </a:p>
         </p:txBody>
@@ -3899,7 +3882,7 @@
             <a:avLst/>
           </a:prstGeom>
           <a:solidFill>
-            <a:srgbClr val="00FFD1"/>
+            <a:srgbClr val="FFB72B"/>
           </a:solidFill>
           <a:ln>
             <a:noFill/>
@@ -3952,13 +3935,13 @@
             <a:pPr algn="l">
               <a:defRPr sz="1000" b="1">
                 <a:solidFill>
-                  <a:srgbClr val="00FFD1"/>
-                </a:solidFill>
-                <a:latin typeface="Calibri"/>
-              </a:defRPr>
-            </a:pPr>
-            <a:r>
-              <a:t>📢  OFFICE LIFE</a:t>
+                  <a:srgbClr val="FFB72B"/>
+                </a:solidFill>
+                <a:latin typeface="Calibri"/>
+              </a:defRPr>
+            </a:pPr>
+            <a:r>
+              <a:t>🎂  CELEBRATION</a:t>
             </a:r>
           </a:p>
         </p:txBody>
@@ -3988,13 +3971,13 @@
             <a:pPr algn="l">
               <a:defRPr sz="3200" b="1" i="0">
                 <a:solidFill>
-                  <a:srgbClr val="00FFD1"/>
-                </a:solidFill>
-                <a:latin typeface="Calibri"/>
-              </a:defRPr>
-            </a:pPr>
-            <a:r>
-              <a:t>From #general</a:t>
+                  <a:srgbClr val="FFB72B"/>
+                </a:solidFill>
+                <a:latin typeface="Calibri"/>
+              </a:defRPr>
+            </a:pPr>
+            <a:r>
+              <a:t>Happy Birthday!</a:t>
             </a:r>
           </a:p>
         </p:txBody>
@@ -4008,6 +3991,114 @@
         <p:spPr>
           <a:xfrm>
             <a:off x="1097280" y="2103120"/>
+            <a:ext cx="9966960" cy="640080"/>
+          </a:xfrm>
+          <a:prstGeom prst="rect">
+            <a:avLst/>
+          </a:prstGeom>
+          <a:noFill/>
+        </p:spPr>
+        <p:txBody>
+          <a:bodyPr wrap="square">
+            <a:spAutoFit/>
+          </a:bodyPr>
+          <a:lstStyle/>
+          <a:p>
+            <a:pPr algn="l">
+              <a:defRPr sz="2800" b="1" i="0">
+                <a:solidFill>
+                  <a:srgbClr val="FFFFFF"/>
+                </a:solidFill>
+                <a:latin typeface="Calibri"/>
+              </a:defRPr>
+            </a:pPr>
+            <a:r>
+              <a:t>Yanina Lozben</a:t>
+            </a:r>
+          </a:p>
+        </p:txBody>
+      </p:sp>
+      <p:sp>
+        <p:nvSpPr>
+          <p:cNvPr id="6" name="TextBox 5"/>
+          <p:cNvSpPr txBox="1"/>
+          <p:nvPr/>
+        </p:nvSpPr>
+        <p:spPr>
+          <a:xfrm>
+            <a:off x="1097280" y="2743200"/>
+            <a:ext cx="9966960" cy="365760"/>
+          </a:xfrm>
+          <a:prstGeom prst="rect">
+            <a:avLst/>
+          </a:prstGeom>
+          <a:noFill/>
+        </p:spPr>
+        <p:txBody>
+          <a:bodyPr wrap="square">
+            <a:spAutoFit/>
+          </a:bodyPr>
+          <a:lstStyle/>
+          <a:p>
+            <a:pPr algn="l">
+              <a:defRPr sz="1400" b="0" i="0">
+                <a:solidFill>
+                  <a:srgbClr val="8F95A3"/>
+                </a:solidFill>
+                <a:latin typeface="Calibri"/>
+              </a:defRPr>
+            </a:pPr>
+            <a:r>
+              <a:t>March 13</a:t>
+            </a:r>
+          </a:p>
+        </p:txBody>
+      </p:sp>
+      <p:sp>
+        <p:nvSpPr>
+          <p:cNvPr id="7" name="TextBox 6"/>
+          <p:cNvSpPr txBox="1"/>
+          <p:nvPr/>
+        </p:nvSpPr>
+        <p:spPr>
+          <a:xfrm>
+            <a:off x="1097280" y="3291840"/>
+            <a:ext cx="9966960" cy="914400"/>
+          </a:xfrm>
+          <a:prstGeom prst="rect">
+            <a:avLst/>
+          </a:prstGeom>
+          <a:noFill/>
+        </p:spPr>
+        <p:txBody>
+          <a:bodyPr wrap="square">
+            <a:spAutoFit/>
+          </a:bodyPr>
+          <a:lstStyle/>
+          <a:p>
+            <a:pPr algn="l">
+              <a:defRPr sz="1600" b="0" i="0">
+                <a:solidFill>
+                  <a:srgbClr val="E2E2EA"/>
+                </a:solidFill>
+                <a:latin typeface="Calibri"/>
+              </a:defRPr>
+            </a:pPr>
+            <a:r>
+              <a:t>Wishing you an amazing day filled with joy and celebration!</a:t>
+            </a:r>
+          </a:p>
+        </p:txBody>
+      </p:sp>
+      <p:sp>
+        <p:nvSpPr>
+          <p:cNvPr id="8" name="TextBox 7"/>
+          <p:cNvSpPr txBox="1"/>
+          <p:nvPr/>
+        </p:nvSpPr>
+        <p:spPr>
+          <a:xfrm>
+            <a:off x="1097280" y="4572000"/>
             <a:ext cx="9966960" cy="457200"/>
           </a:xfrm>
           <a:prstGeom prst="rect">
@@ -4022,7 +4113,184 @@
           <a:lstStyle/>
           <a:p>
             <a:pPr algn="l">
-              <a:defRPr sz="1800" b="1" i="0">
+              <a:defRPr sz="1400" b="0" i="1">
+                <a:solidFill>
+                  <a:srgbClr val="FFB72B"/>
+                </a:solidFill>
+                <a:latin typeface="Calibri"/>
+              </a:defRPr>
+            </a:pPr>
+            <a:r>
+              <a:t>With love, Your Appodeal Team 💜</a:t>
+            </a:r>
+          </a:p>
+        </p:txBody>
+      </p:sp>
+    </p:spTree>
+  </p:cSld>
+  <p:clrMapOvr>
+    <a:masterClrMapping/>
+  </p:clrMapOvr>
+</p:sld>
+</file>
+
+<file path=ppt/slides/slide13.xml><?xml version="1.0" encoding="utf-8"?>
+<p:sld xmlns:a="http://schemas.openxmlformats.org/drawingml/2006/main" xmlns:p="http://schemas.openxmlformats.org/presentationml/2006/main" xmlns:r="http://schemas.openxmlformats.org/officeDocument/2006/relationships">
+  <p:cSld>
+    <p:bg>
+      <p:bgPr>
+        <a:solidFill>
+          <a:srgbClr val="08080C"/>
+        </a:solidFill>
+        <a:effectLst/>
+      </p:bgPr>
+    </p:bg>
+    <p:spTree>
+      <p:nvGrpSpPr>
+        <p:cNvPr id="1" name=""/>
+        <p:cNvGrpSpPr/>
+        <p:nvPr/>
+      </p:nvGrpSpPr>
+      <p:grpSpPr/>
+      <p:sp>
+        <p:nvSpPr>
+          <p:cNvPr id="2" name="Rectangle 1"/>
+          <p:cNvSpPr/>
+          <p:nvPr/>
+        </p:nvSpPr>
+        <p:spPr>
+          <a:xfrm>
+            <a:off x="0" y="365760"/>
+            <a:ext cx="12191695" cy="54864"/>
+          </a:xfrm>
+          <a:prstGeom prst="rect">
+            <a:avLst/>
+          </a:prstGeom>
+          <a:solidFill>
+            <a:srgbClr val="FFB72B"/>
+          </a:solidFill>
+          <a:ln>
+            <a:noFill/>
+          </a:ln>
+        </p:spPr>
+        <p:style>
+          <a:lnRef idx="1">
+            <a:schemeClr val="accent1"/>
+          </a:lnRef>
+          <a:fillRef idx="3">
+            <a:schemeClr val="accent1"/>
+          </a:fillRef>
+          <a:effectRef idx="2">
+            <a:schemeClr val="accent1"/>
+          </a:effectRef>
+          <a:fontRef idx="minor">
+            <a:schemeClr val="lt1"/>
+          </a:fontRef>
+        </p:style>
+        <p:txBody>
+          <a:bodyPr rtlCol="0" anchor="ctr"/>
+          <a:lstStyle/>
+          <a:p>
+            <a:pPr algn="ctr"/>
+          </a:p>
+        </p:txBody>
+      </p:sp>
+      <p:sp>
+        <p:nvSpPr>
+          <p:cNvPr id="3" name="TextBox 2"/>
+          <p:cNvSpPr txBox="1"/>
+          <p:nvPr/>
+        </p:nvSpPr>
+        <p:spPr>
+          <a:xfrm>
+            <a:off x="1097280" y="731520"/>
+            <a:ext cx="3657600" cy="365760"/>
+          </a:xfrm>
+          <a:prstGeom prst="rect">
+            <a:avLst/>
+          </a:prstGeom>
+          <a:noFill/>
+        </p:spPr>
+        <p:txBody>
+          <a:bodyPr wrap="none">
+            <a:spAutoFit/>
+          </a:bodyPr>
+          <a:lstStyle/>
+          <a:p>
+            <a:pPr algn="l">
+              <a:defRPr sz="1000" b="1">
+                <a:solidFill>
+                  <a:srgbClr val="FFB72B"/>
+                </a:solidFill>
+                <a:latin typeface="Calibri"/>
+              </a:defRPr>
+            </a:pPr>
+            <a:r>
+              <a:t>🎂  CELEBRATION</a:t>
+            </a:r>
+          </a:p>
+        </p:txBody>
+      </p:sp>
+      <p:sp>
+        <p:nvSpPr>
+          <p:cNvPr id="4" name="TextBox 3"/>
+          <p:cNvSpPr txBox="1"/>
+          <p:nvPr/>
+        </p:nvSpPr>
+        <p:spPr>
+          <a:xfrm>
+            <a:off x="1097280" y="1188720"/>
+            <a:ext cx="9966960" cy="731520"/>
+          </a:xfrm>
+          <a:prstGeom prst="rect">
+            <a:avLst/>
+          </a:prstGeom>
+          <a:noFill/>
+        </p:spPr>
+        <p:txBody>
+          <a:bodyPr wrap="square">
+            <a:spAutoFit/>
+          </a:bodyPr>
+          <a:lstStyle/>
+          <a:p>
+            <a:pPr algn="l">
+              <a:defRPr sz="3200" b="1" i="0">
+                <a:solidFill>
+                  <a:srgbClr val="FFB72B"/>
+                </a:solidFill>
+                <a:latin typeface="Calibri"/>
+              </a:defRPr>
+            </a:pPr>
+            <a:r>
+              <a:t>Happy Birthday!</a:t>
+            </a:r>
+          </a:p>
+        </p:txBody>
+      </p:sp>
+      <p:sp>
+        <p:nvSpPr>
+          <p:cNvPr id="5" name="TextBox 4"/>
+          <p:cNvSpPr txBox="1"/>
+          <p:nvPr/>
+        </p:nvSpPr>
+        <p:spPr>
+          <a:xfrm>
+            <a:off x="1097280" y="2103120"/>
+            <a:ext cx="9966960" cy="640080"/>
+          </a:xfrm>
+          <a:prstGeom prst="rect">
+            <a:avLst/>
+          </a:prstGeom>
+          <a:noFill/>
+        </p:spPr>
+        <p:txBody>
+          <a:bodyPr wrap="square">
+            <a:spAutoFit/>
+          </a:bodyPr>
+          <a:lstStyle/>
+          <a:p>
+            <a:pPr algn="l">
+              <a:defRPr sz="2800" b="1" i="0">
                 <a:solidFill>
                   <a:srgbClr val="FFFFFF"/>
                 </a:solidFill>
@@ -4030,11 +4298,7 @@
               </a:defRPr>
             </a:pPr>
             <a:r>
-              <a:t>_Hi everyone &lt;!channel&gt;_ :wave:</a:t>
-            </a:r>
-            <a:br/>
-            <a:r>
-              <a:t>_I recorded a short video showing how I built a ...</a:t>
+              <a:t>Francesco Cerigioni</a:t>
             </a:r>
           </a:p>
         </p:txBody>
@@ -4047,22 +4311,58 @@
         </p:nvSpPr>
         <p:spPr>
           <a:xfrm>
-            <a:off x="1371600" y="2743200"/>
-            <a:ext cx="9692640" cy="1828800"/>
-          </a:xfrm>
-          <a:prstGeom prst="rect">
-            <a:avLst/>
-          </a:prstGeom>
-          <a:noFill/>
-        </p:spPr>
-        <p:txBody>
-          <a:bodyPr wrap="square">
-            <a:spAutoFit/>
-          </a:bodyPr>
-          <a:lstStyle/>
-          <a:p>
-            <a:pPr algn="l">
-              <a:defRPr sz="1500" b="0" i="1">
+            <a:off x="1097280" y="2743200"/>
+            <a:ext cx="9966960" cy="365760"/>
+          </a:xfrm>
+          <a:prstGeom prst="rect">
+            <a:avLst/>
+          </a:prstGeom>
+          <a:noFill/>
+        </p:spPr>
+        <p:txBody>
+          <a:bodyPr wrap="square">
+            <a:spAutoFit/>
+          </a:bodyPr>
+          <a:lstStyle/>
+          <a:p>
+            <a:pPr algn="l">
+              <a:defRPr sz="1400" b="0" i="0">
+                <a:solidFill>
+                  <a:srgbClr val="8F95A3"/>
+                </a:solidFill>
+                <a:latin typeface="Calibri"/>
+              </a:defRPr>
+            </a:pPr>
+            <a:r>
+              <a:t>March 13</a:t>
+            </a:r>
+          </a:p>
+        </p:txBody>
+      </p:sp>
+      <p:sp>
+        <p:nvSpPr>
+          <p:cNvPr id="7" name="TextBox 6"/>
+          <p:cNvSpPr txBox="1"/>
+          <p:nvPr/>
+        </p:nvSpPr>
+        <p:spPr>
+          <a:xfrm>
+            <a:off x="1097280" y="3291840"/>
+            <a:ext cx="9966960" cy="914400"/>
+          </a:xfrm>
+          <a:prstGeom prst="rect">
+            <a:avLst/>
+          </a:prstGeom>
+          <a:noFill/>
+        </p:spPr>
+        <p:txBody>
+          <a:bodyPr wrap="square">
+            <a:spAutoFit/>
+          </a:bodyPr>
+          <a:lstStyle/>
+          <a:p>
+            <a:pPr algn="l">
+              <a:defRPr sz="1600" b="0" i="0">
                 <a:solidFill>
                   <a:srgbClr val="E2E2EA"/>
                 </a:solidFill>
@@ -4070,19 +4370,256 @@
               </a:defRPr>
             </a:pPr>
             <a:r>
-              <a:t>"_Hi everyone &lt;!channel&gt;_ :wave:</a:t>
-            </a:r>
-            <a:br/>
-            <a:r>
-              <a:t>_I recorded a short video showing how I built a fully automated AI-powered system — from idea to production — using only AI tools and zero coding experience._</a:t>
-            </a:r>
-            <a:br/>
-            <a:r>
-              <a:t>_Slack data → AI curation → auto-deploying a live dashboard on office TVs. All running on autopilot._</a:t>
-            </a:r>
-            <a:br/>
-            <a:r>
-              <a:t>_If I c"</a:t>
+              <a:t>Wishing you an amazing day filled with joy and celebration!</a:t>
+            </a:r>
+          </a:p>
+        </p:txBody>
+      </p:sp>
+      <p:sp>
+        <p:nvSpPr>
+          <p:cNvPr id="8" name="TextBox 7"/>
+          <p:cNvSpPr txBox="1"/>
+          <p:nvPr/>
+        </p:nvSpPr>
+        <p:spPr>
+          <a:xfrm>
+            <a:off x="1097280" y="4572000"/>
+            <a:ext cx="9966960" cy="457200"/>
+          </a:xfrm>
+          <a:prstGeom prst="rect">
+            <a:avLst/>
+          </a:prstGeom>
+          <a:noFill/>
+        </p:spPr>
+        <p:txBody>
+          <a:bodyPr wrap="square">
+            <a:spAutoFit/>
+          </a:bodyPr>
+          <a:lstStyle/>
+          <a:p>
+            <a:pPr algn="l">
+              <a:defRPr sz="1400" b="0" i="1">
+                <a:solidFill>
+                  <a:srgbClr val="FFB72B"/>
+                </a:solidFill>
+                <a:latin typeface="Calibri"/>
+              </a:defRPr>
+            </a:pPr>
+            <a:r>
+              <a:t>With love, Your Appodeal Team 💜</a:t>
+            </a:r>
+          </a:p>
+        </p:txBody>
+      </p:sp>
+    </p:spTree>
+  </p:cSld>
+  <p:clrMapOvr>
+    <a:masterClrMapping/>
+  </p:clrMapOvr>
+</p:sld>
+</file>
+
+<file path=ppt/slides/slide14.xml><?xml version="1.0" encoding="utf-8"?>
+<p:sld xmlns:a="http://schemas.openxmlformats.org/drawingml/2006/main" xmlns:p="http://schemas.openxmlformats.org/presentationml/2006/main" xmlns:r="http://schemas.openxmlformats.org/officeDocument/2006/relationships">
+  <p:cSld>
+    <p:bg>
+      <p:bgPr>
+        <a:solidFill>
+          <a:srgbClr val="08080C"/>
+        </a:solidFill>
+        <a:effectLst/>
+      </p:bgPr>
+    </p:bg>
+    <p:spTree>
+      <p:nvGrpSpPr>
+        <p:cNvPr id="1" name=""/>
+        <p:cNvGrpSpPr/>
+        <p:nvPr/>
+      </p:nvGrpSpPr>
+      <p:grpSpPr/>
+      <p:sp>
+        <p:nvSpPr>
+          <p:cNvPr id="2" name="Rectangle 1"/>
+          <p:cNvSpPr/>
+          <p:nvPr/>
+        </p:nvSpPr>
+        <p:spPr>
+          <a:xfrm>
+            <a:off x="0" y="365760"/>
+            <a:ext cx="12191695" cy="54864"/>
+          </a:xfrm>
+          <a:prstGeom prst="rect">
+            <a:avLst/>
+          </a:prstGeom>
+          <a:solidFill>
+            <a:srgbClr val="FFB72B"/>
+          </a:solidFill>
+          <a:ln>
+            <a:noFill/>
+          </a:ln>
+        </p:spPr>
+        <p:style>
+          <a:lnRef idx="1">
+            <a:schemeClr val="accent1"/>
+          </a:lnRef>
+          <a:fillRef idx="3">
+            <a:schemeClr val="accent1"/>
+          </a:fillRef>
+          <a:effectRef idx="2">
+            <a:schemeClr val="accent1"/>
+          </a:effectRef>
+          <a:fontRef idx="minor">
+            <a:schemeClr val="lt1"/>
+          </a:fontRef>
+        </p:style>
+        <p:txBody>
+          <a:bodyPr rtlCol="0" anchor="ctr"/>
+          <a:lstStyle/>
+          <a:p>
+            <a:pPr algn="ctr"/>
+          </a:p>
+        </p:txBody>
+      </p:sp>
+      <p:sp>
+        <p:nvSpPr>
+          <p:cNvPr id="3" name="TextBox 2"/>
+          <p:cNvSpPr txBox="1"/>
+          <p:nvPr/>
+        </p:nvSpPr>
+        <p:spPr>
+          <a:xfrm>
+            <a:off x="1097280" y="731520"/>
+            <a:ext cx="3657600" cy="365760"/>
+          </a:xfrm>
+          <a:prstGeom prst="rect">
+            <a:avLst/>
+          </a:prstGeom>
+          <a:noFill/>
+        </p:spPr>
+        <p:txBody>
+          <a:bodyPr wrap="none">
+            <a:spAutoFit/>
+          </a:bodyPr>
+          <a:lstStyle/>
+          <a:p>
+            <a:pPr algn="l">
+              <a:defRPr sz="1000" b="1">
+                <a:solidFill>
+                  <a:srgbClr val="FFB72B"/>
+                </a:solidFill>
+                <a:latin typeface="Calibri"/>
+              </a:defRPr>
+            </a:pPr>
+            <a:r>
+              <a:t>🎂  CELEBRATION</a:t>
+            </a:r>
+          </a:p>
+        </p:txBody>
+      </p:sp>
+      <p:sp>
+        <p:nvSpPr>
+          <p:cNvPr id="4" name="TextBox 3"/>
+          <p:cNvSpPr txBox="1"/>
+          <p:nvPr/>
+        </p:nvSpPr>
+        <p:spPr>
+          <a:xfrm>
+            <a:off x="1097280" y="1188720"/>
+            <a:ext cx="9966960" cy="731520"/>
+          </a:xfrm>
+          <a:prstGeom prst="rect">
+            <a:avLst/>
+          </a:prstGeom>
+          <a:noFill/>
+        </p:spPr>
+        <p:txBody>
+          <a:bodyPr wrap="square">
+            <a:spAutoFit/>
+          </a:bodyPr>
+          <a:lstStyle/>
+          <a:p>
+            <a:pPr algn="l">
+              <a:defRPr sz="3200" b="1" i="0">
+                <a:solidFill>
+                  <a:srgbClr val="FFB72B"/>
+                </a:solidFill>
+                <a:latin typeface="Calibri"/>
+              </a:defRPr>
+            </a:pPr>
+            <a:r>
+              <a:t>Happy Birthday!</a:t>
+            </a:r>
+          </a:p>
+        </p:txBody>
+      </p:sp>
+      <p:sp>
+        <p:nvSpPr>
+          <p:cNvPr id="5" name="TextBox 4"/>
+          <p:cNvSpPr txBox="1"/>
+          <p:nvPr/>
+        </p:nvSpPr>
+        <p:spPr>
+          <a:xfrm>
+            <a:off x="1097280" y="2103120"/>
+            <a:ext cx="9966960" cy="640080"/>
+          </a:xfrm>
+          <a:prstGeom prst="rect">
+            <a:avLst/>
+          </a:prstGeom>
+          <a:noFill/>
+        </p:spPr>
+        <p:txBody>
+          <a:bodyPr wrap="square">
+            <a:spAutoFit/>
+          </a:bodyPr>
+          <a:lstStyle/>
+          <a:p>
+            <a:pPr algn="l">
+              <a:defRPr sz="2800" b="1" i="0">
+                <a:solidFill>
+                  <a:srgbClr val="FFFFFF"/>
+                </a:solidFill>
+                <a:latin typeface="Calibri"/>
+              </a:defRPr>
+            </a:pPr>
+            <a:r>
+              <a:t>Aleksandr Chigaleichik</a:t>
+            </a:r>
+          </a:p>
+        </p:txBody>
+      </p:sp>
+      <p:sp>
+        <p:nvSpPr>
+          <p:cNvPr id="6" name="TextBox 5"/>
+          <p:cNvSpPr txBox="1"/>
+          <p:nvPr/>
+        </p:nvSpPr>
+        <p:spPr>
+          <a:xfrm>
+            <a:off x="1097280" y="2743200"/>
+            <a:ext cx="9966960" cy="365760"/>
+          </a:xfrm>
+          <a:prstGeom prst="rect">
+            <a:avLst/>
+          </a:prstGeom>
+          <a:noFill/>
+        </p:spPr>
+        <p:txBody>
+          <a:bodyPr wrap="square">
+            <a:spAutoFit/>
+          </a:bodyPr>
+          <a:lstStyle/>
+          <a:p>
+            <a:pPr algn="l">
+              <a:defRPr sz="1400" b="0" i="0">
+                <a:solidFill>
+                  <a:srgbClr val="8F95A3"/>
+                </a:solidFill>
+                <a:latin typeface="Calibri"/>
+              </a:defRPr>
+            </a:pPr>
+            <a:r>
+              <a:t>March 13</a:t>
             </a:r>
           </a:p>
         </p:txBody>
@@ -4095,7 +4632,256 @@
         </p:nvSpPr>
         <p:spPr>
           <a:xfrm>
-            <a:off x="1097280" y="4754880"/>
+            <a:off x="1097280" y="3291840"/>
+            <a:ext cx="9966960" cy="914400"/>
+          </a:xfrm>
+          <a:prstGeom prst="rect">
+            <a:avLst/>
+          </a:prstGeom>
+          <a:noFill/>
+        </p:spPr>
+        <p:txBody>
+          <a:bodyPr wrap="square">
+            <a:spAutoFit/>
+          </a:bodyPr>
+          <a:lstStyle/>
+          <a:p>
+            <a:pPr algn="l">
+              <a:defRPr sz="1600" b="0" i="0">
+                <a:solidFill>
+                  <a:srgbClr val="E2E2EA"/>
+                </a:solidFill>
+                <a:latin typeface="Calibri"/>
+              </a:defRPr>
+            </a:pPr>
+            <a:r>
+              <a:t>Wishing you an amazing day filled with joy and celebration!</a:t>
+            </a:r>
+          </a:p>
+        </p:txBody>
+      </p:sp>
+      <p:sp>
+        <p:nvSpPr>
+          <p:cNvPr id="8" name="TextBox 7"/>
+          <p:cNvSpPr txBox="1"/>
+          <p:nvPr/>
+        </p:nvSpPr>
+        <p:spPr>
+          <a:xfrm>
+            <a:off x="1097280" y="4572000"/>
+            <a:ext cx="9966960" cy="457200"/>
+          </a:xfrm>
+          <a:prstGeom prst="rect">
+            <a:avLst/>
+          </a:prstGeom>
+          <a:noFill/>
+        </p:spPr>
+        <p:txBody>
+          <a:bodyPr wrap="square">
+            <a:spAutoFit/>
+          </a:bodyPr>
+          <a:lstStyle/>
+          <a:p>
+            <a:pPr algn="l">
+              <a:defRPr sz="1400" b="0" i="1">
+                <a:solidFill>
+                  <a:srgbClr val="FFB72B"/>
+                </a:solidFill>
+                <a:latin typeface="Calibri"/>
+              </a:defRPr>
+            </a:pPr>
+            <a:r>
+              <a:t>With love, Your Appodeal Team 💜</a:t>
+            </a:r>
+          </a:p>
+        </p:txBody>
+      </p:sp>
+    </p:spTree>
+  </p:cSld>
+  <p:clrMapOvr>
+    <a:masterClrMapping/>
+  </p:clrMapOvr>
+</p:sld>
+</file>
+
+<file path=ppt/slides/slide15.xml><?xml version="1.0" encoding="utf-8"?>
+<p:sld xmlns:a="http://schemas.openxmlformats.org/drawingml/2006/main" xmlns:p="http://schemas.openxmlformats.org/presentationml/2006/main" xmlns:r="http://schemas.openxmlformats.org/officeDocument/2006/relationships">
+  <p:cSld>
+    <p:bg>
+      <p:bgPr>
+        <a:solidFill>
+          <a:srgbClr val="08080C"/>
+        </a:solidFill>
+        <a:effectLst/>
+      </p:bgPr>
+    </p:bg>
+    <p:spTree>
+      <p:nvGrpSpPr>
+        <p:cNvPr id="1" name=""/>
+        <p:cNvGrpSpPr/>
+        <p:nvPr/>
+      </p:nvGrpSpPr>
+      <p:grpSpPr/>
+      <p:sp>
+        <p:nvSpPr>
+          <p:cNvPr id="2" name="Rectangle 1"/>
+          <p:cNvSpPr/>
+          <p:nvPr/>
+        </p:nvSpPr>
+        <p:spPr>
+          <a:xfrm>
+            <a:off x="0" y="365760"/>
+            <a:ext cx="12191695" cy="54864"/>
+          </a:xfrm>
+          <a:prstGeom prst="rect">
+            <a:avLst/>
+          </a:prstGeom>
+          <a:solidFill>
+            <a:srgbClr val="FFB72B"/>
+          </a:solidFill>
+          <a:ln>
+            <a:noFill/>
+          </a:ln>
+        </p:spPr>
+        <p:style>
+          <a:lnRef idx="1">
+            <a:schemeClr val="accent1"/>
+          </a:lnRef>
+          <a:fillRef idx="3">
+            <a:schemeClr val="accent1"/>
+          </a:fillRef>
+          <a:effectRef idx="2">
+            <a:schemeClr val="accent1"/>
+          </a:effectRef>
+          <a:fontRef idx="minor">
+            <a:schemeClr val="lt1"/>
+          </a:fontRef>
+        </p:style>
+        <p:txBody>
+          <a:bodyPr rtlCol="0" anchor="ctr"/>
+          <a:lstStyle/>
+          <a:p>
+            <a:pPr algn="ctr"/>
+          </a:p>
+        </p:txBody>
+      </p:sp>
+      <p:sp>
+        <p:nvSpPr>
+          <p:cNvPr id="3" name="TextBox 2"/>
+          <p:cNvSpPr txBox="1"/>
+          <p:nvPr/>
+        </p:nvSpPr>
+        <p:spPr>
+          <a:xfrm>
+            <a:off x="1097280" y="731520"/>
+            <a:ext cx="3657600" cy="365760"/>
+          </a:xfrm>
+          <a:prstGeom prst="rect">
+            <a:avLst/>
+          </a:prstGeom>
+          <a:noFill/>
+        </p:spPr>
+        <p:txBody>
+          <a:bodyPr wrap="none">
+            <a:spAutoFit/>
+          </a:bodyPr>
+          <a:lstStyle/>
+          <a:p>
+            <a:pPr algn="l">
+              <a:defRPr sz="1000" b="1">
+                <a:solidFill>
+                  <a:srgbClr val="FFB72B"/>
+                </a:solidFill>
+                <a:latin typeface="Calibri"/>
+              </a:defRPr>
+            </a:pPr>
+            <a:r>
+              <a:t>🎂  CELEBRATION</a:t>
+            </a:r>
+          </a:p>
+        </p:txBody>
+      </p:sp>
+      <p:sp>
+        <p:nvSpPr>
+          <p:cNvPr id="4" name="TextBox 3"/>
+          <p:cNvSpPr txBox="1"/>
+          <p:nvPr/>
+        </p:nvSpPr>
+        <p:spPr>
+          <a:xfrm>
+            <a:off x="1097280" y="1188720"/>
+            <a:ext cx="9966960" cy="731520"/>
+          </a:xfrm>
+          <a:prstGeom prst="rect">
+            <a:avLst/>
+          </a:prstGeom>
+          <a:noFill/>
+        </p:spPr>
+        <p:txBody>
+          <a:bodyPr wrap="square">
+            <a:spAutoFit/>
+          </a:bodyPr>
+          <a:lstStyle/>
+          <a:p>
+            <a:pPr algn="l">
+              <a:defRPr sz="3200" b="1" i="0">
+                <a:solidFill>
+                  <a:srgbClr val="FFB72B"/>
+                </a:solidFill>
+                <a:latin typeface="Calibri"/>
+              </a:defRPr>
+            </a:pPr>
+            <a:r>
+              <a:t>Happy Birthday!</a:t>
+            </a:r>
+          </a:p>
+        </p:txBody>
+      </p:sp>
+      <p:sp>
+        <p:nvSpPr>
+          <p:cNvPr id="5" name="TextBox 4"/>
+          <p:cNvSpPr txBox="1"/>
+          <p:nvPr/>
+        </p:nvSpPr>
+        <p:spPr>
+          <a:xfrm>
+            <a:off x="1097280" y="2103120"/>
+            <a:ext cx="9966960" cy="640080"/>
+          </a:xfrm>
+          <a:prstGeom prst="rect">
+            <a:avLst/>
+          </a:prstGeom>
+          <a:noFill/>
+        </p:spPr>
+        <p:txBody>
+          <a:bodyPr wrap="square">
+            <a:spAutoFit/>
+          </a:bodyPr>
+          <a:lstStyle/>
+          <a:p>
+            <a:pPr algn="l">
+              <a:defRPr sz="2800" b="1" i="0">
+                <a:solidFill>
+                  <a:srgbClr val="FFFFFF"/>
+                </a:solidFill>
+                <a:latin typeface="Calibri"/>
+              </a:defRPr>
+            </a:pPr>
+            <a:r>
+              <a:t>Iryna Peretiatko</a:t>
+            </a:r>
+          </a:p>
+        </p:txBody>
+      </p:sp>
+      <p:sp>
+        <p:nvSpPr>
+          <p:cNvPr id="6" name="TextBox 5"/>
+          <p:cNvSpPr txBox="1"/>
+          <p:nvPr/>
+        </p:nvSpPr>
+        <p:spPr>
+          <a:xfrm>
+            <a:off x="1097280" y="2743200"/>
             <a:ext cx="9966960" cy="365760"/>
           </a:xfrm>
           <a:prstGeom prst="rect">
@@ -4118,7 +4904,43 @@
               </a:defRPr>
             </a:pPr>
             <a:r>
-              <a:t>— Liliya Garifullina</a:t>
+              <a:t>March 13</a:t>
+            </a:r>
+          </a:p>
+        </p:txBody>
+      </p:sp>
+      <p:sp>
+        <p:nvSpPr>
+          <p:cNvPr id="7" name="TextBox 6"/>
+          <p:cNvSpPr txBox="1"/>
+          <p:nvPr/>
+        </p:nvSpPr>
+        <p:spPr>
+          <a:xfrm>
+            <a:off x="1097280" y="3291840"/>
+            <a:ext cx="9966960" cy="914400"/>
+          </a:xfrm>
+          <a:prstGeom prst="rect">
+            <a:avLst/>
+          </a:prstGeom>
+          <a:noFill/>
+        </p:spPr>
+        <p:txBody>
+          <a:bodyPr wrap="square">
+            <a:spAutoFit/>
+          </a:bodyPr>
+          <a:lstStyle/>
+          <a:p>
+            <a:pPr algn="l">
+              <a:defRPr sz="1600" b="0" i="0">
+                <a:solidFill>
+                  <a:srgbClr val="E2E2EA"/>
+                </a:solidFill>
+                <a:latin typeface="Calibri"/>
+              </a:defRPr>
+            </a:pPr>
+            <a:r>
+              <a:t>Wishing you an amazing day filled with joy and celebration!</a:t>
             </a:r>
           </a:p>
         </p:txBody>
@@ -4131,30 +4953,1170 @@
         </p:nvSpPr>
         <p:spPr>
           <a:xfrm>
-            <a:off x="1097280" y="5760720"/>
-            <a:ext cx="9966960" cy="274320"/>
-          </a:xfrm>
-          <a:prstGeom prst="rect">
-            <a:avLst/>
-          </a:prstGeom>
-          <a:noFill/>
-        </p:spPr>
-        <p:txBody>
-          <a:bodyPr wrap="square">
-            <a:spAutoFit/>
-          </a:bodyPr>
-          <a:lstStyle/>
-          <a:p>
-            <a:pPr algn="l">
-              <a:defRPr sz="1100" b="0" i="0">
-                <a:solidFill>
-                  <a:srgbClr val="5C6270"/>
-                </a:solidFill>
-                <a:latin typeface="Calibri"/>
-              </a:defRPr>
-            </a:pPr>
-            <a:r>
-              <a:t>#general</a:t>
+            <a:off x="1097280" y="4572000"/>
+            <a:ext cx="9966960" cy="457200"/>
+          </a:xfrm>
+          <a:prstGeom prst="rect">
+            <a:avLst/>
+          </a:prstGeom>
+          <a:noFill/>
+        </p:spPr>
+        <p:txBody>
+          <a:bodyPr wrap="square">
+            <a:spAutoFit/>
+          </a:bodyPr>
+          <a:lstStyle/>
+          <a:p>
+            <a:pPr algn="l">
+              <a:defRPr sz="1400" b="0" i="1">
+                <a:solidFill>
+                  <a:srgbClr val="FFB72B"/>
+                </a:solidFill>
+                <a:latin typeface="Calibri"/>
+              </a:defRPr>
+            </a:pPr>
+            <a:r>
+              <a:t>With love, Your Appodeal Team 💜</a:t>
+            </a:r>
+          </a:p>
+        </p:txBody>
+      </p:sp>
+    </p:spTree>
+  </p:cSld>
+  <p:clrMapOvr>
+    <a:masterClrMapping/>
+  </p:clrMapOvr>
+</p:sld>
+</file>
+
+<file path=ppt/slides/slide16.xml><?xml version="1.0" encoding="utf-8"?>
+<p:sld xmlns:a="http://schemas.openxmlformats.org/drawingml/2006/main" xmlns:p="http://schemas.openxmlformats.org/presentationml/2006/main" xmlns:r="http://schemas.openxmlformats.org/officeDocument/2006/relationships">
+  <p:cSld>
+    <p:bg>
+      <p:bgPr>
+        <a:solidFill>
+          <a:srgbClr val="08080C"/>
+        </a:solidFill>
+        <a:effectLst/>
+      </p:bgPr>
+    </p:bg>
+    <p:spTree>
+      <p:nvGrpSpPr>
+        <p:cNvPr id="1" name=""/>
+        <p:cNvGrpSpPr/>
+        <p:nvPr/>
+      </p:nvGrpSpPr>
+      <p:grpSpPr/>
+      <p:sp>
+        <p:nvSpPr>
+          <p:cNvPr id="2" name="Rectangle 1"/>
+          <p:cNvSpPr/>
+          <p:nvPr/>
+        </p:nvSpPr>
+        <p:spPr>
+          <a:xfrm>
+            <a:off x="0" y="365760"/>
+            <a:ext cx="12191695" cy="54864"/>
+          </a:xfrm>
+          <a:prstGeom prst="rect">
+            <a:avLst/>
+          </a:prstGeom>
+          <a:solidFill>
+            <a:srgbClr val="FFB72B"/>
+          </a:solidFill>
+          <a:ln>
+            <a:noFill/>
+          </a:ln>
+        </p:spPr>
+        <p:style>
+          <a:lnRef idx="1">
+            <a:schemeClr val="accent1"/>
+          </a:lnRef>
+          <a:fillRef idx="3">
+            <a:schemeClr val="accent1"/>
+          </a:fillRef>
+          <a:effectRef idx="2">
+            <a:schemeClr val="accent1"/>
+          </a:effectRef>
+          <a:fontRef idx="minor">
+            <a:schemeClr val="lt1"/>
+          </a:fontRef>
+        </p:style>
+        <p:txBody>
+          <a:bodyPr rtlCol="0" anchor="ctr"/>
+          <a:lstStyle/>
+          <a:p>
+            <a:pPr algn="ctr"/>
+          </a:p>
+        </p:txBody>
+      </p:sp>
+      <p:sp>
+        <p:nvSpPr>
+          <p:cNvPr id="3" name="TextBox 2"/>
+          <p:cNvSpPr txBox="1"/>
+          <p:nvPr/>
+        </p:nvSpPr>
+        <p:spPr>
+          <a:xfrm>
+            <a:off x="1097280" y="731520"/>
+            <a:ext cx="3657600" cy="365760"/>
+          </a:xfrm>
+          <a:prstGeom prst="rect">
+            <a:avLst/>
+          </a:prstGeom>
+          <a:noFill/>
+        </p:spPr>
+        <p:txBody>
+          <a:bodyPr wrap="none">
+            <a:spAutoFit/>
+          </a:bodyPr>
+          <a:lstStyle/>
+          <a:p>
+            <a:pPr algn="l">
+              <a:defRPr sz="1000" b="1">
+                <a:solidFill>
+                  <a:srgbClr val="FFB72B"/>
+                </a:solidFill>
+                <a:latin typeface="Calibri"/>
+              </a:defRPr>
+            </a:pPr>
+            <a:r>
+              <a:t>🎂  CELEBRATION</a:t>
+            </a:r>
+          </a:p>
+        </p:txBody>
+      </p:sp>
+      <p:sp>
+        <p:nvSpPr>
+          <p:cNvPr id="4" name="TextBox 3"/>
+          <p:cNvSpPr txBox="1"/>
+          <p:nvPr/>
+        </p:nvSpPr>
+        <p:spPr>
+          <a:xfrm>
+            <a:off x="1097280" y="1188720"/>
+            <a:ext cx="9966960" cy="731520"/>
+          </a:xfrm>
+          <a:prstGeom prst="rect">
+            <a:avLst/>
+          </a:prstGeom>
+          <a:noFill/>
+        </p:spPr>
+        <p:txBody>
+          <a:bodyPr wrap="square">
+            <a:spAutoFit/>
+          </a:bodyPr>
+          <a:lstStyle/>
+          <a:p>
+            <a:pPr algn="l">
+              <a:defRPr sz="3200" b="1" i="0">
+                <a:solidFill>
+                  <a:srgbClr val="FFB72B"/>
+                </a:solidFill>
+                <a:latin typeface="Calibri"/>
+              </a:defRPr>
+            </a:pPr>
+            <a:r>
+              <a:t>Happy Birthday!</a:t>
+            </a:r>
+          </a:p>
+        </p:txBody>
+      </p:sp>
+      <p:sp>
+        <p:nvSpPr>
+          <p:cNvPr id="5" name="TextBox 4"/>
+          <p:cNvSpPr txBox="1"/>
+          <p:nvPr/>
+        </p:nvSpPr>
+        <p:spPr>
+          <a:xfrm>
+            <a:off x="1097280" y="2103120"/>
+            <a:ext cx="9966960" cy="640080"/>
+          </a:xfrm>
+          <a:prstGeom prst="rect">
+            <a:avLst/>
+          </a:prstGeom>
+          <a:noFill/>
+        </p:spPr>
+        <p:txBody>
+          <a:bodyPr wrap="square">
+            <a:spAutoFit/>
+          </a:bodyPr>
+          <a:lstStyle/>
+          <a:p>
+            <a:pPr algn="l">
+              <a:defRPr sz="2800" b="1" i="0">
+                <a:solidFill>
+                  <a:srgbClr val="FFFFFF"/>
+                </a:solidFill>
+                <a:latin typeface="Calibri"/>
+              </a:defRPr>
+            </a:pPr>
+            <a:r>
+              <a:t>Francesco Cerigioni</a:t>
+            </a:r>
+          </a:p>
+        </p:txBody>
+      </p:sp>
+      <p:sp>
+        <p:nvSpPr>
+          <p:cNvPr id="6" name="TextBox 5"/>
+          <p:cNvSpPr txBox="1"/>
+          <p:nvPr/>
+        </p:nvSpPr>
+        <p:spPr>
+          <a:xfrm>
+            <a:off x="1097280" y="2743200"/>
+            <a:ext cx="9966960" cy="365760"/>
+          </a:xfrm>
+          <a:prstGeom prst="rect">
+            <a:avLst/>
+          </a:prstGeom>
+          <a:noFill/>
+        </p:spPr>
+        <p:txBody>
+          <a:bodyPr wrap="square">
+            <a:spAutoFit/>
+          </a:bodyPr>
+          <a:lstStyle/>
+          <a:p>
+            <a:pPr algn="l">
+              <a:defRPr sz="1400" b="0" i="0">
+                <a:solidFill>
+                  <a:srgbClr val="8F95A3"/>
+                </a:solidFill>
+                <a:latin typeface="Calibri"/>
+              </a:defRPr>
+            </a:pPr>
+            <a:r>
+              <a:t>March 13</a:t>
+            </a:r>
+          </a:p>
+        </p:txBody>
+      </p:sp>
+      <p:sp>
+        <p:nvSpPr>
+          <p:cNvPr id="7" name="TextBox 6"/>
+          <p:cNvSpPr txBox="1"/>
+          <p:nvPr/>
+        </p:nvSpPr>
+        <p:spPr>
+          <a:xfrm>
+            <a:off x="1097280" y="3291840"/>
+            <a:ext cx="9966960" cy="914400"/>
+          </a:xfrm>
+          <a:prstGeom prst="rect">
+            <a:avLst/>
+          </a:prstGeom>
+          <a:noFill/>
+        </p:spPr>
+        <p:txBody>
+          <a:bodyPr wrap="square">
+            <a:spAutoFit/>
+          </a:bodyPr>
+          <a:lstStyle/>
+          <a:p>
+            <a:pPr algn="l">
+              <a:defRPr sz="1600" b="0" i="0">
+                <a:solidFill>
+                  <a:srgbClr val="E2E2EA"/>
+                </a:solidFill>
+                <a:latin typeface="Calibri"/>
+              </a:defRPr>
+            </a:pPr>
+            <a:r>
+              <a:t>Wishing you an amazing day filled with joy and celebration!</a:t>
+            </a:r>
+          </a:p>
+        </p:txBody>
+      </p:sp>
+      <p:sp>
+        <p:nvSpPr>
+          <p:cNvPr id="8" name="TextBox 7"/>
+          <p:cNvSpPr txBox="1"/>
+          <p:nvPr/>
+        </p:nvSpPr>
+        <p:spPr>
+          <a:xfrm>
+            <a:off x="1097280" y="4572000"/>
+            <a:ext cx="9966960" cy="457200"/>
+          </a:xfrm>
+          <a:prstGeom prst="rect">
+            <a:avLst/>
+          </a:prstGeom>
+          <a:noFill/>
+        </p:spPr>
+        <p:txBody>
+          <a:bodyPr wrap="square">
+            <a:spAutoFit/>
+          </a:bodyPr>
+          <a:lstStyle/>
+          <a:p>
+            <a:pPr algn="l">
+              <a:defRPr sz="1400" b="0" i="1">
+                <a:solidFill>
+                  <a:srgbClr val="FFB72B"/>
+                </a:solidFill>
+                <a:latin typeface="Calibri"/>
+              </a:defRPr>
+            </a:pPr>
+            <a:r>
+              <a:t>With love, Your Appodeal Team 💜</a:t>
+            </a:r>
+          </a:p>
+        </p:txBody>
+      </p:sp>
+    </p:spTree>
+  </p:cSld>
+  <p:clrMapOvr>
+    <a:masterClrMapping/>
+  </p:clrMapOvr>
+</p:sld>
+</file>
+
+<file path=ppt/slides/slide17.xml><?xml version="1.0" encoding="utf-8"?>
+<p:sld xmlns:a="http://schemas.openxmlformats.org/drawingml/2006/main" xmlns:p="http://schemas.openxmlformats.org/presentationml/2006/main" xmlns:r="http://schemas.openxmlformats.org/officeDocument/2006/relationships">
+  <p:cSld>
+    <p:bg>
+      <p:bgPr>
+        <a:solidFill>
+          <a:srgbClr val="08080C"/>
+        </a:solidFill>
+        <a:effectLst/>
+      </p:bgPr>
+    </p:bg>
+    <p:spTree>
+      <p:nvGrpSpPr>
+        <p:cNvPr id="1" name=""/>
+        <p:cNvGrpSpPr/>
+        <p:nvPr/>
+      </p:nvGrpSpPr>
+      <p:grpSpPr/>
+      <p:sp>
+        <p:nvSpPr>
+          <p:cNvPr id="2" name="Rectangle 1"/>
+          <p:cNvSpPr/>
+          <p:nvPr/>
+        </p:nvSpPr>
+        <p:spPr>
+          <a:xfrm>
+            <a:off x="0" y="365760"/>
+            <a:ext cx="12191695" cy="54864"/>
+          </a:xfrm>
+          <a:prstGeom prst="rect">
+            <a:avLst/>
+          </a:prstGeom>
+          <a:solidFill>
+            <a:srgbClr val="FFB72B"/>
+          </a:solidFill>
+          <a:ln>
+            <a:noFill/>
+          </a:ln>
+        </p:spPr>
+        <p:style>
+          <a:lnRef idx="1">
+            <a:schemeClr val="accent1"/>
+          </a:lnRef>
+          <a:fillRef idx="3">
+            <a:schemeClr val="accent1"/>
+          </a:fillRef>
+          <a:effectRef idx="2">
+            <a:schemeClr val="accent1"/>
+          </a:effectRef>
+          <a:fontRef idx="minor">
+            <a:schemeClr val="lt1"/>
+          </a:fontRef>
+        </p:style>
+        <p:txBody>
+          <a:bodyPr rtlCol="0" anchor="ctr"/>
+          <a:lstStyle/>
+          <a:p>
+            <a:pPr algn="ctr"/>
+          </a:p>
+        </p:txBody>
+      </p:sp>
+      <p:sp>
+        <p:nvSpPr>
+          <p:cNvPr id="3" name="TextBox 2"/>
+          <p:cNvSpPr txBox="1"/>
+          <p:nvPr/>
+        </p:nvSpPr>
+        <p:spPr>
+          <a:xfrm>
+            <a:off x="1097280" y="731520"/>
+            <a:ext cx="3657600" cy="365760"/>
+          </a:xfrm>
+          <a:prstGeom prst="rect">
+            <a:avLst/>
+          </a:prstGeom>
+          <a:noFill/>
+        </p:spPr>
+        <p:txBody>
+          <a:bodyPr wrap="none">
+            <a:spAutoFit/>
+          </a:bodyPr>
+          <a:lstStyle/>
+          <a:p>
+            <a:pPr algn="l">
+              <a:defRPr sz="1000" b="1">
+                <a:solidFill>
+                  <a:srgbClr val="FFB72B"/>
+                </a:solidFill>
+                <a:latin typeface="Calibri"/>
+              </a:defRPr>
+            </a:pPr>
+            <a:r>
+              <a:t>🎂  CELEBRATION</a:t>
+            </a:r>
+          </a:p>
+        </p:txBody>
+      </p:sp>
+      <p:sp>
+        <p:nvSpPr>
+          <p:cNvPr id="4" name="TextBox 3"/>
+          <p:cNvSpPr txBox="1"/>
+          <p:nvPr/>
+        </p:nvSpPr>
+        <p:spPr>
+          <a:xfrm>
+            <a:off x="1097280" y="1188720"/>
+            <a:ext cx="9966960" cy="731520"/>
+          </a:xfrm>
+          <a:prstGeom prst="rect">
+            <a:avLst/>
+          </a:prstGeom>
+          <a:noFill/>
+        </p:spPr>
+        <p:txBody>
+          <a:bodyPr wrap="square">
+            <a:spAutoFit/>
+          </a:bodyPr>
+          <a:lstStyle/>
+          <a:p>
+            <a:pPr algn="l">
+              <a:defRPr sz="3200" b="1" i="0">
+                <a:solidFill>
+                  <a:srgbClr val="FFB72B"/>
+                </a:solidFill>
+                <a:latin typeface="Calibri"/>
+              </a:defRPr>
+            </a:pPr>
+            <a:r>
+              <a:t>Happy Birthday!</a:t>
+            </a:r>
+          </a:p>
+        </p:txBody>
+      </p:sp>
+      <p:sp>
+        <p:nvSpPr>
+          <p:cNvPr id="5" name="TextBox 4"/>
+          <p:cNvSpPr txBox="1"/>
+          <p:nvPr/>
+        </p:nvSpPr>
+        <p:spPr>
+          <a:xfrm>
+            <a:off x="1097280" y="2103120"/>
+            <a:ext cx="9966960" cy="640080"/>
+          </a:xfrm>
+          <a:prstGeom prst="rect">
+            <a:avLst/>
+          </a:prstGeom>
+          <a:noFill/>
+        </p:spPr>
+        <p:txBody>
+          <a:bodyPr wrap="square">
+            <a:spAutoFit/>
+          </a:bodyPr>
+          <a:lstStyle/>
+          <a:p>
+            <a:pPr algn="l">
+              <a:defRPr sz="2800" b="1" i="0">
+                <a:solidFill>
+                  <a:srgbClr val="FFFFFF"/>
+                </a:solidFill>
+                <a:latin typeface="Calibri"/>
+              </a:defRPr>
+            </a:pPr>
+            <a:r>
+              <a:t>Giulia Galvani</a:t>
+            </a:r>
+          </a:p>
+        </p:txBody>
+      </p:sp>
+      <p:sp>
+        <p:nvSpPr>
+          <p:cNvPr id="6" name="TextBox 5"/>
+          <p:cNvSpPr txBox="1"/>
+          <p:nvPr/>
+        </p:nvSpPr>
+        <p:spPr>
+          <a:xfrm>
+            <a:off x="1097280" y="2743200"/>
+            <a:ext cx="9966960" cy="365760"/>
+          </a:xfrm>
+          <a:prstGeom prst="rect">
+            <a:avLst/>
+          </a:prstGeom>
+          <a:noFill/>
+        </p:spPr>
+        <p:txBody>
+          <a:bodyPr wrap="square">
+            <a:spAutoFit/>
+          </a:bodyPr>
+          <a:lstStyle/>
+          <a:p>
+            <a:pPr algn="l">
+              <a:defRPr sz="1400" b="0" i="0">
+                <a:solidFill>
+                  <a:srgbClr val="8F95A3"/>
+                </a:solidFill>
+                <a:latin typeface="Calibri"/>
+              </a:defRPr>
+            </a:pPr>
+            <a:r>
+              <a:t>March 13</a:t>
+            </a:r>
+          </a:p>
+        </p:txBody>
+      </p:sp>
+      <p:sp>
+        <p:nvSpPr>
+          <p:cNvPr id="7" name="TextBox 6"/>
+          <p:cNvSpPr txBox="1"/>
+          <p:nvPr/>
+        </p:nvSpPr>
+        <p:spPr>
+          <a:xfrm>
+            <a:off x="1097280" y="3291840"/>
+            <a:ext cx="9966960" cy="914400"/>
+          </a:xfrm>
+          <a:prstGeom prst="rect">
+            <a:avLst/>
+          </a:prstGeom>
+          <a:noFill/>
+        </p:spPr>
+        <p:txBody>
+          <a:bodyPr wrap="square">
+            <a:spAutoFit/>
+          </a:bodyPr>
+          <a:lstStyle/>
+          <a:p>
+            <a:pPr algn="l">
+              <a:defRPr sz="1600" b="0" i="0">
+                <a:solidFill>
+                  <a:srgbClr val="E2E2EA"/>
+                </a:solidFill>
+                <a:latin typeface="Calibri"/>
+              </a:defRPr>
+            </a:pPr>
+            <a:r>
+              <a:t>Wishing you an amazing day filled with joy and celebration!</a:t>
+            </a:r>
+          </a:p>
+        </p:txBody>
+      </p:sp>
+      <p:sp>
+        <p:nvSpPr>
+          <p:cNvPr id="8" name="TextBox 7"/>
+          <p:cNvSpPr txBox="1"/>
+          <p:nvPr/>
+        </p:nvSpPr>
+        <p:spPr>
+          <a:xfrm>
+            <a:off x="1097280" y="4572000"/>
+            <a:ext cx="9966960" cy="457200"/>
+          </a:xfrm>
+          <a:prstGeom prst="rect">
+            <a:avLst/>
+          </a:prstGeom>
+          <a:noFill/>
+        </p:spPr>
+        <p:txBody>
+          <a:bodyPr wrap="square">
+            <a:spAutoFit/>
+          </a:bodyPr>
+          <a:lstStyle/>
+          <a:p>
+            <a:pPr algn="l">
+              <a:defRPr sz="1400" b="0" i="1">
+                <a:solidFill>
+                  <a:srgbClr val="FFB72B"/>
+                </a:solidFill>
+                <a:latin typeface="Calibri"/>
+              </a:defRPr>
+            </a:pPr>
+            <a:r>
+              <a:t>With love, Your Appodeal Team 💜</a:t>
+            </a:r>
+          </a:p>
+        </p:txBody>
+      </p:sp>
+    </p:spTree>
+  </p:cSld>
+  <p:clrMapOvr>
+    <a:masterClrMapping/>
+  </p:clrMapOvr>
+</p:sld>
+</file>
+
+<file path=ppt/slides/slide18.xml><?xml version="1.0" encoding="utf-8"?>
+<p:sld xmlns:a="http://schemas.openxmlformats.org/drawingml/2006/main" xmlns:p="http://schemas.openxmlformats.org/presentationml/2006/main" xmlns:r="http://schemas.openxmlformats.org/officeDocument/2006/relationships">
+  <p:cSld>
+    <p:bg>
+      <p:bgPr>
+        <a:solidFill>
+          <a:srgbClr val="08080C"/>
+        </a:solidFill>
+        <a:effectLst/>
+      </p:bgPr>
+    </p:bg>
+    <p:spTree>
+      <p:nvGrpSpPr>
+        <p:cNvPr id="1" name=""/>
+        <p:cNvGrpSpPr/>
+        <p:nvPr/>
+      </p:nvGrpSpPr>
+      <p:grpSpPr/>
+      <p:sp>
+        <p:nvSpPr>
+          <p:cNvPr id="2" name="Rectangle 1"/>
+          <p:cNvSpPr/>
+          <p:nvPr/>
+        </p:nvSpPr>
+        <p:spPr>
+          <a:xfrm>
+            <a:off x="0" y="365760"/>
+            <a:ext cx="12191695" cy="54864"/>
+          </a:xfrm>
+          <a:prstGeom prst="rect">
+            <a:avLst/>
+          </a:prstGeom>
+          <a:solidFill>
+            <a:srgbClr val="FFB72B"/>
+          </a:solidFill>
+          <a:ln>
+            <a:noFill/>
+          </a:ln>
+        </p:spPr>
+        <p:style>
+          <a:lnRef idx="1">
+            <a:schemeClr val="accent1"/>
+          </a:lnRef>
+          <a:fillRef idx="3">
+            <a:schemeClr val="accent1"/>
+          </a:fillRef>
+          <a:effectRef idx="2">
+            <a:schemeClr val="accent1"/>
+          </a:effectRef>
+          <a:fontRef idx="minor">
+            <a:schemeClr val="lt1"/>
+          </a:fontRef>
+        </p:style>
+        <p:txBody>
+          <a:bodyPr rtlCol="0" anchor="ctr"/>
+          <a:lstStyle/>
+          <a:p>
+            <a:pPr algn="ctr"/>
+          </a:p>
+        </p:txBody>
+      </p:sp>
+      <p:sp>
+        <p:nvSpPr>
+          <p:cNvPr id="3" name="TextBox 2"/>
+          <p:cNvSpPr txBox="1"/>
+          <p:nvPr/>
+        </p:nvSpPr>
+        <p:spPr>
+          <a:xfrm>
+            <a:off x="1097280" y="731520"/>
+            <a:ext cx="3657600" cy="365760"/>
+          </a:xfrm>
+          <a:prstGeom prst="rect">
+            <a:avLst/>
+          </a:prstGeom>
+          <a:noFill/>
+        </p:spPr>
+        <p:txBody>
+          <a:bodyPr wrap="none">
+            <a:spAutoFit/>
+          </a:bodyPr>
+          <a:lstStyle/>
+          <a:p>
+            <a:pPr algn="l">
+              <a:defRPr sz="1000" b="1">
+                <a:solidFill>
+                  <a:srgbClr val="FFB72B"/>
+                </a:solidFill>
+                <a:latin typeface="Calibri"/>
+              </a:defRPr>
+            </a:pPr>
+            <a:r>
+              <a:t>🎂  CELEBRATION</a:t>
+            </a:r>
+          </a:p>
+        </p:txBody>
+      </p:sp>
+      <p:sp>
+        <p:nvSpPr>
+          <p:cNvPr id="4" name="TextBox 3"/>
+          <p:cNvSpPr txBox="1"/>
+          <p:nvPr/>
+        </p:nvSpPr>
+        <p:spPr>
+          <a:xfrm>
+            <a:off x="1097280" y="1188720"/>
+            <a:ext cx="9966960" cy="731520"/>
+          </a:xfrm>
+          <a:prstGeom prst="rect">
+            <a:avLst/>
+          </a:prstGeom>
+          <a:noFill/>
+        </p:spPr>
+        <p:txBody>
+          <a:bodyPr wrap="square">
+            <a:spAutoFit/>
+          </a:bodyPr>
+          <a:lstStyle/>
+          <a:p>
+            <a:pPr algn="l">
+              <a:defRPr sz="3200" b="1" i="0">
+                <a:solidFill>
+                  <a:srgbClr val="FFB72B"/>
+                </a:solidFill>
+                <a:latin typeface="Calibri"/>
+              </a:defRPr>
+            </a:pPr>
+            <a:r>
+              <a:t>Happy Birthday!</a:t>
+            </a:r>
+          </a:p>
+        </p:txBody>
+      </p:sp>
+      <p:sp>
+        <p:nvSpPr>
+          <p:cNvPr id="5" name="TextBox 4"/>
+          <p:cNvSpPr txBox="1"/>
+          <p:nvPr/>
+        </p:nvSpPr>
+        <p:spPr>
+          <a:xfrm>
+            <a:off x="1097280" y="2103120"/>
+            <a:ext cx="9966960" cy="640080"/>
+          </a:xfrm>
+          <a:prstGeom prst="rect">
+            <a:avLst/>
+          </a:prstGeom>
+          <a:noFill/>
+        </p:spPr>
+        <p:txBody>
+          <a:bodyPr wrap="square">
+            <a:spAutoFit/>
+          </a:bodyPr>
+          <a:lstStyle/>
+          <a:p>
+            <a:pPr algn="l">
+              <a:defRPr sz="2800" b="1" i="0">
+                <a:solidFill>
+                  <a:srgbClr val="FFFFFF"/>
+                </a:solidFill>
+                <a:latin typeface="Calibri"/>
+              </a:defRPr>
+            </a:pPr>
+            <a:r>
+              <a:t>Yanina Lozben</a:t>
+            </a:r>
+          </a:p>
+        </p:txBody>
+      </p:sp>
+      <p:sp>
+        <p:nvSpPr>
+          <p:cNvPr id="6" name="TextBox 5"/>
+          <p:cNvSpPr txBox="1"/>
+          <p:nvPr/>
+        </p:nvSpPr>
+        <p:spPr>
+          <a:xfrm>
+            <a:off x="1097280" y="2743200"/>
+            <a:ext cx="9966960" cy="365760"/>
+          </a:xfrm>
+          <a:prstGeom prst="rect">
+            <a:avLst/>
+          </a:prstGeom>
+          <a:noFill/>
+        </p:spPr>
+        <p:txBody>
+          <a:bodyPr wrap="square">
+            <a:spAutoFit/>
+          </a:bodyPr>
+          <a:lstStyle/>
+          <a:p>
+            <a:pPr algn="l">
+              <a:defRPr sz="1400" b="0" i="0">
+                <a:solidFill>
+                  <a:srgbClr val="8F95A3"/>
+                </a:solidFill>
+                <a:latin typeface="Calibri"/>
+              </a:defRPr>
+            </a:pPr>
+            <a:r>
+              <a:t>March 13</a:t>
+            </a:r>
+          </a:p>
+        </p:txBody>
+      </p:sp>
+      <p:sp>
+        <p:nvSpPr>
+          <p:cNvPr id="7" name="TextBox 6"/>
+          <p:cNvSpPr txBox="1"/>
+          <p:nvPr/>
+        </p:nvSpPr>
+        <p:spPr>
+          <a:xfrm>
+            <a:off x="1097280" y="3291840"/>
+            <a:ext cx="9966960" cy="914400"/>
+          </a:xfrm>
+          <a:prstGeom prst="rect">
+            <a:avLst/>
+          </a:prstGeom>
+          <a:noFill/>
+        </p:spPr>
+        <p:txBody>
+          <a:bodyPr wrap="square">
+            <a:spAutoFit/>
+          </a:bodyPr>
+          <a:lstStyle/>
+          <a:p>
+            <a:pPr algn="l">
+              <a:defRPr sz="1600" b="0" i="0">
+                <a:solidFill>
+                  <a:srgbClr val="E2E2EA"/>
+                </a:solidFill>
+                <a:latin typeface="Calibri"/>
+              </a:defRPr>
+            </a:pPr>
+            <a:r>
+              <a:t>Wishing you an amazing day filled with joy and celebration!</a:t>
+            </a:r>
+          </a:p>
+        </p:txBody>
+      </p:sp>
+      <p:sp>
+        <p:nvSpPr>
+          <p:cNvPr id="8" name="TextBox 7"/>
+          <p:cNvSpPr txBox="1"/>
+          <p:nvPr/>
+        </p:nvSpPr>
+        <p:spPr>
+          <a:xfrm>
+            <a:off x="1097280" y="4572000"/>
+            <a:ext cx="9966960" cy="457200"/>
+          </a:xfrm>
+          <a:prstGeom prst="rect">
+            <a:avLst/>
+          </a:prstGeom>
+          <a:noFill/>
+        </p:spPr>
+        <p:txBody>
+          <a:bodyPr wrap="square">
+            <a:spAutoFit/>
+          </a:bodyPr>
+          <a:lstStyle/>
+          <a:p>
+            <a:pPr algn="l">
+              <a:defRPr sz="1400" b="0" i="1">
+                <a:solidFill>
+                  <a:srgbClr val="FFB72B"/>
+                </a:solidFill>
+                <a:latin typeface="Calibri"/>
+              </a:defRPr>
+            </a:pPr>
+            <a:r>
+              <a:t>With love, Your Appodeal Team 💜</a:t>
+            </a:r>
+          </a:p>
+        </p:txBody>
+      </p:sp>
+    </p:spTree>
+  </p:cSld>
+  <p:clrMapOvr>
+    <a:masterClrMapping/>
+  </p:clrMapOvr>
+</p:sld>
+</file>
+
+<file path=ppt/slides/slide19.xml><?xml version="1.0" encoding="utf-8"?>
+<p:sld xmlns:a="http://schemas.openxmlformats.org/drawingml/2006/main" xmlns:p="http://schemas.openxmlformats.org/presentationml/2006/main" xmlns:r="http://schemas.openxmlformats.org/officeDocument/2006/relationships">
+  <p:cSld>
+    <p:bg>
+      <p:bgPr>
+        <a:solidFill>
+          <a:srgbClr val="08080C"/>
+        </a:solidFill>
+        <a:effectLst/>
+      </p:bgPr>
+    </p:bg>
+    <p:spTree>
+      <p:nvGrpSpPr>
+        <p:cNvPr id="1" name=""/>
+        <p:cNvGrpSpPr/>
+        <p:nvPr/>
+      </p:nvGrpSpPr>
+      <p:grpSpPr/>
+      <p:sp>
+        <p:nvSpPr>
+          <p:cNvPr id="2" name="Rectangle 1"/>
+          <p:cNvSpPr/>
+          <p:nvPr/>
+        </p:nvSpPr>
+        <p:spPr>
+          <a:xfrm>
+            <a:off x="0" y="365760"/>
+            <a:ext cx="12191695" cy="54864"/>
+          </a:xfrm>
+          <a:prstGeom prst="rect">
+            <a:avLst/>
+          </a:prstGeom>
+          <a:solidFill>
+            <a:srgbClr val="FFB72B"/>
+          </a:solidFill>
+          <a:ln>
+            <a:noFill/>
+          </a:ln>
+        </p:spPr>
+        <p:style>
+          <a:lnRef idx="1">
+            <a:schemeClr val="accent1"/>
+          </a:lnRef>
+          <a:fillRef idx="3">
+            <a:schemeClr val="accent1"/>
+          </a:fillRef>
+          <a:effectRef idx="2">
+            <a:schemeClr val="accent1"/>
+          </a:effectRef>
+          <a:fontRef idx="minor">
+            <a:schemeClr val="lt1"/>
+          </a:fontRef>
+        </p:style>
+        <p:txBody>
+          <a:bodyPr rtlCol="0" anchor="ctr"/>
+          <a:lstStyle/>
+          <a:p>
+            <a:pPr algn="ctr"/>
+          </a:p>
+        </p:txBody>
+      </p:sp>
+      <p:sp>
+        <p:nvSpPr>
+          <p:cNvPr id="3" name="TextBox 2"/>
+          <p:cNvSpPr txBox="1"/>
+          <p:nvPr/>
+        </p:nvSpPr>
+        <p:spPr>
+          <a:xfrm>
+            <a:off x="1097280" y="731520"/>
+            <a:ext cx="3657600" cy="365760"/>
+          </a:xfrm>
+          <a:prstGeom prst="rect">
+            <a:avLst/>
+          </a:prstGeom>
+          <a:noFill/>
+        </p:spPr>
+        <p:txBody>
+          <a:bodyPr wrap="none">
+            <a:spAutoFit/>
+          </a:bodyPr>
+          <a:lstStyle/>
+          <a:p>
+            <a:pPr algn="l">
+              <a:defRPr sz="1000" b="1">
+                <a:solidFill>
+                  <a:srgbClr val="FFB72B"/>
+                </a:solidFill>
+                <a:latin typeface="Calibri"/>
+              </a:defRPr>
+            </a:pPr>
+            <a:r>
+              <a:t>🎂  CELEBRATION</a:t>
+            </a:r>
+          </a:p>
+        </p:txBody>
+      </p:sp>
+      <p:sp>
+        <p:nvSpPr>
+          <p:cNvPr id="4" name="TextBox 3"/>
+          <p:cNvSpPr txBox="1"/>
+          <p:nvPr/>
+        </p:nvSpPr>
+        <p:spPr>
+          <a:xfrm>
+            <a:off x="1097280" y="1188720"/>
+            <a:ext cx="9966960" cy="731520"/>
+          </a:xfrm>
+          <a:prstGeom prst="rect">
+            <a:avLst/>
+          </a:prstGeom>
+          <a:noFill/>
+        </p:spPr>
+        <p:txBody>
+          <a:bodyPr wrap="square">
+            <a:spAutoFit/>
+          </a:bodyPr>
+          <a:lstStyle/>
+          <a:p>
+            <a:pPr algn="l">
+              <a:defRPr sz="3200" b="1" i="0">
+                <a:solidFill>
+                  <a:srgbClr val="FFB72B"/>
+                </a:solidFill>
+                <a:latin typeface="Calibri"/>
+              </a:defRPr>
+            </a:pPr>
+            <a:r>
+              <a:t>Happy Birthday!</a:t>
+            </a:r>
+          </a:p>
+        </p:txBody>
+      </p:sp>
+      <p:sp>
+        <p:nvSpPr>
+          <p:cNvPr id="5" name="TextBox 4"/>
+          <p:cNvSpPr txBox="1"/>
+          <p:nvPr/>
+        </p:nvSpPr>
+        <p:spPr>
+          <a:xfrm>
+            <a:off x="1097280" y="2103120"/>
+            <a:ext cx="9966960" cy="640080"/>
+          </a:xfrm>
+          <a:prstGeom prst="rect">
+            <a:avLst/>
+          </a:prstGeom>
+          <a:noFill/>
+        </p:spPr>
+        <p:txBody>
+          <a:bodyPr wrap="square">
+            <a:spAutoFit/>
+          </a:bodyPr>
+          <a:lstStyle/>
+          <a:p>
+            <a:pPr algn="l">
+              <a:defRPr sz="2800" b="1" i="0">
+                <a:solidFill>
+                  <a:srgbClr val="FFFFFF"/>
+                </a:solidFill>
+                <a:latin typeface="Calibri"/>
+              </a:defRPr>
+            </a:pPr>
+            <a:r>
+              <a:t>Daryna Rudavka</a:t>
+            </a:r>
+          </a:p>
+        </p:txBody>
+      </p:sp>
+      <p:sp>
+        <p:nvSpPr>
+          <p:cNvPr id="6" name="TextBox 5"/>
+          <p:cNvSpPr txBox="1"/>
+          <p:nvPr/>
+        </p:nvSpPr>
+        <p:spPr>
+          <a:xfrm>
+            <a:off x="1097280" y="2743200"/>
+            <a:ext cx="9966960" cy="365760"/>
+          </a:xfrm>
+          <a:prstGeom prst="rect">
+            <a:avLst/>
+          </a:prstGeom>
+          <a:noFill/>
+        </p:spPr>
+        <p:txBody>
+          <a:bodyPr wrap="square">
+            <a:spAutoFit/>
+          </a:bodyPr>
+          <a:lstStyle/>
+          <a:p>
+            <a:pPr algn="l">
+              <a:defRPr sz="1400" b="0" i="0">
+                <a:solidFill>
+                  <a:srgbClr val="8F95A3"/>
+                </a:solidFill>
+                <a:latin typeface="Calibri"/>
+              </a:defRPr>
+            </a:pPr>
+            <a:r>
+              <a:t>March 13</a:t>
+            </a:r>
+          </a:p>
+        </p:txBody>
+      </p:sp>
+      <p:sp>
+        <p:nvSpPr>
+          <p:cNvPr id="7" name="TextBox 6"/>
+          <p:cNvSpPr txBox="1"/>
+          <p:nvPr/>
+        </p:nvSpPr>
+        <p:spPr>
+          <a:xfrm>
+            <a:off x="1097280" y="3291840"/>
+            <a:ext cx="9966960" cy="914400"/>
+          </a:xfrm>
+          <a:prstGeom prst="rect">
+            <a:avLst/>
+          </a:prstGeom>
+          <a:noFill/>
+        </p:spPr>
+        <p:txBody>
+          <a:bodyPr wrap="square">
+            <a:spAutoFit/>
+          </a:bodyPr>
+          <a:lstStyle/>
+          <a:p>
+            <a:pPr algn="l">
+              <a:defRPr sz="1600" b="0" i="0">
+                <a:solidFill>
+                  <a:srgbClr val="E2E2EA"/>
+                </a:solidFill>
+                <a:latin typeface="Calibri"/>
+              </a:defRPr>
+            </a:pPr>
+            <a:r>
+              <a:t>Wishing you an amazing day filled with joy and celebration!</a:t>
+            </a:r>
+          </a:p>
+        </p:txBody>
+      </p:sp>
+      <p:sp>
+        <p:nvSpPr>
+          <p:cNvPr id="8" name="TextBox 7"/>
+          <p:cNvSpPr txBox="1"/>
+          <p:nvPr/>
+        </p:nvSpPr>
+        <p:spPr>
+          <a:xfrm>
+            <a:off x="1097280" y="4572000"/>
+            <a:ext cx="9966960" cy="457200"/>
+          </a:xfrm>
+          <a:prstGeom prst="rect">
+            <a:avLst/>
+          </a:prstGeom>
+          <a:noFill/>
+        </p:spPr>
+        <p:txBody>
+          <a:bodyPr wrap="square">
+            <a:spAutoFit/>
+          </a:bodyPr>
+          <a:lstStyle/>
+          <a:p>
+            <a:pPr algn="l">
+              <a:defRPr sz="1400" b="0" i="1">
+                <a:solidFill>
+                  <a:srgbClr val="FFB72B"/>
+                </a:solidFill>
+                <a:latin typeface="Calibri"/>
+              </a:defRPr>
+            </a:pPr>
+            <a:r>
+              <a:t>With love, Your Appodeal Team 💜</a:t>
             </a:r>
           </a:p>
         </p:txBody>
@@ -4331,7 +6293,7 @@
               </a:defRPr>
             </a:pPr>
             <a:r>
-              <a:t>Francesco Cerigioni</a:t>
+              <a:t>Emil Sharafiev</a:t>
             </a:r>
           </a:p>
         </p:txBody>
@@ -4440,6 +6402,1773 @@
             </a:pPr>
             <a:r>
               <a:t>With love, Your Appodeal Team 💜</a:t>
+            </a:r>
+          </a:p>
+        </p:txBody>
+      </p:sp>
+    </p:spTree>
+  </p:cSld>
+  <p:clrMapOvr>
+    <a:masterClrMapping/>
+  </p:clrMapOvr>
+</p:sld>
+</file>
+
+<file path=ppt/slides/slide20.xml><?xml version="1.0" encoding="utf-8"?>
+<p:sld xmlns:a="http://schemas.openxmlformats.org/drawingml/2006/main" xmlns:p="http://schemas.openxmlformats.org/presentationml/2006/main" xmlns:r="http://schemas.openxmlformats.org/officeDocument/2006/relationships">
+  <p:cSld>
+    <p:bg>
+      <p:bgPr>
+        <a:solidFill>
+          <a:srgbClr val="08080C"/>
+        </a:solidFill>
+        <a:effectLst/>
+      </p:bgPr>
+    </p:bg>
+    <p:spTree>
+      <p:nvGrpSpPr>
+        <p:cNvPr id="1" name=""/>
+        <p:cNvGrpSpPr/>
+        <p:nvPr/>
+      </p:nvGrpSpPr>
+      <p:grpSpPr/>
+      <p:sp>
+        <p:nvSpPr>
+          <p:cNvPr id="2" name="Rectangle 1"/>
+          <p:cNvSpPr/>
+          <p:nvPr/>
+        </p:nvSpPr>
+        <p:spPr>
+          <a:xfrm>
+            <a:off x="0" y="365760"/>
+            <a:ext cx="12191695" cy="54864"/>
+          </a:xfrm>
+          <a:prstGeom prst="rect">
+            <a:avLst/>
+          </a:prstGeom>
+          <a:solidFill>
+            <a:srgbClr val="FFB72B"/>
+          </a:solidFill>
+          <a:ln>
+            <a:noFill/>
+          </a:ln>
+        </p:spPr>
+        <p:style>
+          <a:lnRef idx="1">
+            <a:schemeClr val="accent1"/>
+          </a:lnRef>
+          <a:fillRef idx="3">
+            <a:schemeClr val="accent1"/>
+          </a:fillRef>
+          <a:effectRef idx="2">
+            <a:schemeClr val="accent1"/>
+          </a:effectRef>
+          <a:fontRef idx="minor">
+            <a:schemeClr val="lt1"/>
+          </a:fontRef>
+        </p:style>
+        <p:txBody>
+          <a:bodyPr rtlCol="0" anchor="ctr"/>
+          <a:lstStyle/>
+          <a:p>
+            <a:pPr algn="ctr"/>
+          </a:p>
+        </p:txBody>
+      </p:sp>
+      <p:sp>
+        <p:nvSpPr>
+          <p:cNvPr id="3" name="TextBox 2"/>
+          <p:cNvSpPr txBox="1"/>
+          <p:nvPr/>
+        </p:nvSpPr>
+        <p:spPr>
+          <a:xfrm>
+            <a:off x="1097280" y="731520"/>
+            <a:ext cx="3657600" cy="365760"/>
+          </a:xfrm>
+          <a:prstGeom prst="rect">
+            <a:avLst/>
+          </a:prstGeom>
+          <a:noFill/>
+        </p:spPr>
+        <p:txBody>
+          <a:bodyPr wrap="none">
+            <a:spAutoFit/>
+          </a:bodyPr>
+          <a:lstStyle/>
+          <a:p>
+            <a:pPr algn="l">
+              <a:defRPr sz="1000" b="1">
+                <a:solidFill>
+                  <a:srgbClr val="FFB72B"/>
+                </a:solidFill>
+                <a:latin typeface="Calibri"/>
+              </a:defRPr>
+            </a:pPr>
+            <a:r>
+              <a:t>🎂  CELEBRATION</a:t>
+            </a:r>
+          </a:p>
+        </p:txBody>
+      </p:sp>
+      <p:sp>
+        <p:nvSpPr>
+          <p:cNvPr id="4" name="TextBox 3"/>
+          <p:cNvSpPr txBox="1"/>
+          <p:nvPr/>
+        </p:nvSpPr>
+        <p:spPr>
+          <a:xfrm>
+            <a:off x="1097280" y="1188720"/>
+            <a:ext cx="9966960" cy="731520"/>
+          </a:xfrm>
+          <a:prstGeom prst="rect">
+            <a:avLst/>
+          </a:prstGeom>
+          <a:noFill/>
+        </p:spPr>
+        <p:txBody>
+          <a:bodyPr wrap="square">
+            <a:spAutoFit/>
+          </a:bodyPr>
+          <a:lstStyle/>
+          <a:p>
+            <a:pPr algn="l">
+              <a:defRPr sz="3200" b="1" i="0">
+                <a:solidFill>
+                  <a:srgbClr val="FFB72B"/>
+                </a:solidFill>
+                <a:latin typeface="Calibri"/>
+              </a:defRPr>
+            </a:pPr>
+            <a:r>
+              <a:t>Happy Birthday!</a:t>
+            </a:r>
+          </a:p>
+        </p:txBody>
+      </p:sp>
+      <p:sp>
+        <p:nvSpPr>
+          <p:cNvPr id="5" name="TextBox 4"/>
+          <p:cNvSpPr txBox="1"/>
+          <p:nvPr/>
+        </p:nvSpPr>
+        <p:spPr>
+          <a:xfrm>
+            <a:off x="1097280" y="2103120"/>
+            <a:ext cx="9966960" cy="640080"/>
+          </a:xfrm>
+          <a:prstGeom prst="rect">
+            <a:avLst/>
+          </a:prstGeom>
+          <a:noFill/>
+        </p:spPr>
+        <p:txBody>
+          <a:bodyPr wrap="square">
+            <a:spAutoFit/>
+          </a:bodyPr>
+          <a:lstStyle/>
+          <a:p>
+            <a:pPr algn="l">
+              <a:defRPr sz="2800" b="1" i="0">
+                <a:solidFill>
+                  <a:srgbClr val="FFFFFF"/>
+                </a:solidFill>
+                <a:latin typeface="Calibri"/>
+              </a:defRPr>
+            </a:pPr>
+            <a:r>
+              <a:t>Vladimir Khrolovich</a:t>
+            </a:r>
+          </a:p>
+        </p:txBody>
+      </p:sp>
+      <p:sp>
+        <p:nvSpPr>
+          <p:cNvPr id="6" name="TextBox 5"/>
+          <p:cNvSpPr txBox="1"/>
+          <p:nvPr/>
+        </p:nvSpPr>
+        <p:spPr>
+          <a:xfrm>
+            <a:off x="1097280" y="2743200"/>
+            <a:ext cx="9966960" cy="365760"/>
+          </a:xfrm>
+          <a:prstGeom prst="rect">
+            <a:avLst/>
+          </a:prstGeom>
+          <a:noFill/>
+        </p:spPr>
+        <p:txBody>
+          <a:bodyPr wrap="square">
+            <a:spAutoFit/>
+          </a:bodyPr>
+          <a:lstStyle/>
+          <a:p>
+            <a:pPr algn="l">
+              <a:defRPr sz="1400" b="0" i="0">
+                <a:solidFill>
+                  <a:srgbClr val="8F95A3"/>
+                </a:solidFill>
+                <a:latin typeface="Calibri"/>
+              </a:defRPr>
+            </a:pPr>
+            <a:r>
+              <a:t>March 13</a:t>
+            </a:r>
+          </a:p>
+        </p:txBody>
+      </p:sp>
+      <p:sp>
+        <p:nvSpPr>
+          <p:cNvPr id="7" name="TextBox 6"/>
+          <p:cNvSpPr txBox="1"/>
+          <p:nvPr/>
+        </p:nvSpPr>
+        <p:spPr>
+          <a:xfrm>
+            <a:off x="1097280" y="3291840"/>
+            <a:ext cx="9966960" cy="914400"/>
+          </a:xfrm>
+          <a:prstGeom prst="rect">
+            <a:avLst/>
+          </a:prstGeom>
+          <a:noFill/>
+        </p:spPr>
+        <p:txBody>
+          <a:bodyPr wrap="square">
+            <a:spAutoFit/>
+          </a:bodyPr>
+          <a:lstStyle/>
+          <a:p>
+            <a:pPr algn="l">
+              <a:defRPr sz="1600" b="0" i="0">
+                <a:solidFill>
+                  <a:srgbClr val="E2E2EA"/>
+                </a:solidFill>
+                <a:latin typeface="Calibri"/>
+              </a:defRPr>
+            </a:pPr>
+            <a:r>
+              <a:t>Wishing you an amazing day filled with joy and celebration!</a:t>
+            </a:r>
+          </a:p>
+        </p:txBody>
+      </p:sp>
+      <p:sp>
+        <p:nvSpPr>
+          <p:cNvPr id="8" name="TextBox 7"/>
+          <p:cNvSpPr txBox="1"/>
+          <p:nvPr/>
+        </p:nvSpPr>
+        <p:spPr>
+          <a:xfrm>
+            <a:off x="1097280" y="4572000"/>
+            <a:ext cx="9966960" cy="457200"/>
+          </a:xfrm>
+          <a:prstGeom prst="rect">
+            <a:avLst/>
+          </a:prstGeom>
+          <a:noFill/>
+        </p:spPr>
+        <p:txBody>
+          <a:bodyPr wrap="square">
+            <a:spAutoFit/>
+          </a:bodyPr>
+          <a:lstStyle/>
+          <a:p>
+            <a:pPr algn="l">
+              <a:defRPr sz="1400" b="0" i="1">
+                <a:solidFill>
+                  <a:srgbClr val="FFB72B"/>
+                </a:solidFill>
+                <a:latin typeface="Calibri"/>
+              </a:defRPr>
+            </a:pPr>
+            <a:r>
+              <a:t>With love, Your Appodeal Team 💜</a:t>
+            </a:r>
+          </a:p>
+        </p:txBody>
+      </p:sp>
+    </p:spTree>
+  </p:cSld>
+  <p:clrMapOvr>
+    <a:masterClrMapping/>
+  </p:clrMapOvr>
+</p:sld>
+</file>
+
+<file path=ppt/slides/slide21.xml><?xml version="1.0" encoding="utf-8"?>
+<p:sld xmlns:a="http://schemas.openxmlformats.org/drawingml/2006/main" xmlns:p="http://schemas.openxmlformats.org/presentationml/2006/main" xmlns:r="http://schemas.openxmlformats.org/officeDocument/2006/relationships">
+  <p:cSld>
+    <p:bg>
+      <p:bgPr>
+        <a:solidFill>
+          <a:srgbClr val="08080C"/>
+        </a:solidFill>
+        <a:effectLst/>
+      </p:bgPr>
+    </p:bg>
+    <p:spTree>
+      <p:nvGrpSpPr>
+        <p:cNvPr id="1" name=""/>
+        <p:cNvGrpSpPr/>
+        <p:nvPr/>
+      </p:nvGrpSpPr>
+      <p:grpSpPr/>
+      <p:sp>
+        <p:nvSpPr>
+          <p:cNvPr id="2" name="Rectangle 1"/>
+          <p:cNvSpPr/>
+          <p:nvPr/>
+        </p:nvSpPr>
+        <p:spPr>
+          <a:xfrm>
+            <a:off x="0" y="365760"/>
+            <a:ext cx="12191695" cy="54864"/>
+          </a:xfrm>
+          <a:prstGeom prst="rect">
+            <a:avLst/>
+          </a:prstGeom>
+          <a:solidFill>
+            <a:srgbClr val="FFB72B"/>
+          </a:solidFill>
+          <a:ln>
+            <a:noFill/>
+          </a:ln>
+        </p:spPr>
+        <p:style>
+          <a:lnRef idx="1">
+            <a:schemeClr val="accent1"/>
+          </a:lnRef>
+          <a:fillRef idx="3">
+            <a:schemeClr val="accent1"/>
+          </a:fillRef>
+          <a:effectRef idx="2">
+            <a:schemeClr val="accent1"/>
+          </a:effectRef>
+          <a:fontRef idx="minor">
+            <a:schemeClr val="lt1"/>
+          </a:fontRef>
+        </p:style>
+        <p:txBody>
+          <a:bodyPr rtlCol="0" anchor="ctr"/>
+          <a:lstStyle/>
+          <a:p>
+            <a:pPr algn="ctr"/>
+          </a:p>
+        </p:txBody>
+      </p:sp>
+      <p:sp>
+        <p:nvSpPr>
+          <p:cNvPr id="3" name="TextBox 2"/>
+          <p:cNvSpPr txBox="1"/>
+          <p:nvPr/>
+        </p:nvSpPr>
+        <p:spPr>
+          <a:xfrm>
+            <a:off x="1097280" y="731520"/>
+            <a:ext cx="3657600" cy="365760"/>
+          </a:xfrm>
+          <a:prstGeom prst="rect">
+            <a:avLst/>
+          </a:prstGeom>
+          <a:noFill/>
+        </p:spPr>
+        <p:txBody>
+          <a:bodyPr wrap="none">
+            <a:spAutoFit/>
+          </a:bodyPr>
+          <a:lstStyle/>
+          <a:p>
+            <a:pPr algn="l">
+              <a:defRPr sz="1000" b="1">
+                <a:solidFill>
+                  <a:srgbClr val="FFB72B"/>
+                </a:solidFill>
+                <a:latin typeface="Calibri"/>
+              </a:defRPr>
+            </a:pPr>
+            <a:r>
+              <a:t>🎂  CELEBRATION</a:t>
+            </a:r>
+          </a:p>
+        </p:txBody>
+      </p:sp>
+      <p:sp>
+        <p:nvSpPr>
+          <p:cNvPr id="4" name="TextBox 3"/>
+          <p:cNvSpPr txBox="1"/>
+          <p:nvPr/>
+        </p:nvSpPr>
+        <p:spPr>
+          <a:xfrm>
+            <a:off x="1097280" y="1188720"/>
+            <a:ext cx="9966960" cy="731520"/>
+          </a:xfrm>
+          <a:prstGeom prst="rect">
+            <a:avLst/>
+          </a:prstGeom>
+          <a:noFill/>
+        </p:spPr>
+        <p:txBody>
+          <a:bodyPr wrap="square">
+            <a:spAutoFit/>
+          </a:bodyPr>
+          <a:lstStyle/>
+          <a:p>
+            <a:pPr algn="l">
+              <a:defRPr sz="3200" b="1" i="0">
+                <a:solidFill>
+                  <a:srgbClr val="FFB72B"/>
+                </a:solidFill>
+                <a:latin typeface="Calibri"/>
+              </a:defRPr>
+            </a:pPr>
+            <a:r>
+              <a:t>Happy Birthday!</a:t>
+            </a:r>
+          </a:p>
+        </p:txBody>
+      </p:sp>
+      <p:sp>
+        <p:nvSpPr>
+          <p:cNvPr id="5" name="TextBox 4"/>
+          <p:cNvSpPr txBox="1"/>
+          <p:nvPr/>
+        </p:nvSpPr>
+        <p:spPr>
+          <a:xfrm>
+            <a:off x="1097280" y="2103120"/>
+            <a:ext cx="9966960" cy="640080"/>
+          </a:xfrm>
+          <a:prstGeom prst="rect">
+            <a:avLst/>
+          </a:prstGeom>
+          <a:noFill/>
+        </p:spPr>
+        <p:txBody>
+          <a:bodyPr wrap="square">
+            <a:spAutoFit/>
+          </a:bodyPr>
+          <a:lstStyle/>
+          <a:p>
+            <a:pPr algn="l">
+              <a:defRPr sz="2800" b="1" i="0">
+                <a:solidFill>
+                  <a:srgbClr val="FFFFFF"/>
+                </a:solidFill>
+                <a:latin typeface="Calibri"/>
+              </a:defRPr>
+            </a:pPr>
+            <a:r>
+              <a:t>Denis Glavatskikh</a:t>
+            </a:r>
+          </a:p>
+        </p:txBody>
+      </p:sp>
+      <p:sp>
+        <p:nvSpPr>
+          <p:cNvPr id="6" name="TextBox 5"/>
+          <p:cNvSpPr txBox="1"/>
+          <p:nvPr/>
+        </p:nvSpPr>
+        <p:spPr>
+          <a:xfrm>
+            <a:off x="1097280" y="2743200"/>
+            <a:ext cx="9966960" cy="365760"/>
+          </a:xfrm>
+          <a:prstGeom prst="rect">
+            <a:avLst/>
+          </a:prstGeom>
+          <a:noFill/>
+        </p:spPr>
+        <p:txBody>
+          <a:bodyPr wrap="square">
+            <a:spAutoFit/>
+          </a:bodyPr>
+          <a:lstStyle/>
+          <a:p>
+            <a:pPr algn="l">
+              <a:defRPr sz="1400" b="0" i="0">
+                <a:solidFill>
+                  <a:srgbClr val="8F95A3"/>
+                </a:solidFill>
+                <a:latin typeface="Calibri"/>
+              </a:defRPr>
+            </a:pPr>
+            <a:r>
+              <a:t>March 13</a:t>
+            </a:r>
+          </a:p>
+        </p:txBody>
+      </p:sp>
+      <p:sp>
+        <p:nvSpPr>
+          <p:cNvPr id="7" name="TextBox 6"/>
+          <p:cNvSpPr txBox="1"/>
+          <p:nvPr/>
+        </p:nvSpPr>
+        <p:spPr>
+          <a:xfrm>
+            <a:off x="1097280" y="3291840"/>
+            <a:ext cx="9966960" cy="914400"/>
+          </a:xfrm>
+          <a:prstGeom prst="rect">
+            <a:avLst/>
+          </a:prstGeom>
+          <a:noFill/>
+        </p:spPr>
+        <p:txBody>
+          <a:bodyPr wrap="square">
+            <a:spAutoFit/>
+          </a:bodyPr>
+          <a:lstStyle/>
+          <a:p>
+            <a:pPr algn="l">
+              <a:defRPr sz="1600" b="0" i="0">
+                <a:solidFill>
+                  <a:srgbClr val="E2E2EA"/>
+                </a:solidFill>
+                <a:latin typeface="Calibri"/>
+              </a:defRPr>
+            </a:pPr>
+            <a:r>
+              <a:t>Wishing you an amazing day filled with joy and celebration!</a:t>
+            </a:r>
+          </a:p>
+        </p:txBody>
+      </p:sp>
+      <p:sp>
+        <p:nvSpPr>
+          <p:cNvPr id="8" name="TextBox 7"/>
+          <p:cNvSpPr txBox="1"/>
+          <p:nvPr/>
+        </p:nvSpPr>
+        <p:spPr>
+          <a:xfrm>
+            <a:off x="1097280" y="4572000"/>
+            <a:ext cx="9966960" cy="457200"/>
+          </a:xfrm>
+          <a:prstGeom prst="rect">
+            <a:avLst/>
+          </a:prstGeom>
+          <a:noFill/>
+        </p:spPr>
+        <p:txBody>
+          <a:bodyPr wrap="square">
+            <a:spAutoFit/>
+          </a:bodyPr>
+          <a:lstStyle/>
+          <a:p>
+            <a:pPr algn="l">
+              <a:defRPr sz="1400" b="0" i="1">
+                <a:solidFill>
+                  <a:srgbClr val="FFB72B"/>
+                </a:solidFill>
+                <a:latin typeface="Calibri"/>
+              </a:defRPr>
+            </a:pPr>
+            <a:r>
+              <a:t>With love, Your Appodeal Team 💜</a:t>
+            </a:r>
+          </a:p>
+        </p:txBody>
+      </p:sp>
+    </p:spTree>
+  </p:cSld>
+  <p:clrMapOvr>
+    <a:masterClrMapping/>
+  </p:clrMapOvr>
+</p:sld>
+</file>
+
+<file path=ppt/slides/slide22.xml><?xml version="1.0" encoding="utf-8"?>
+<p:sld xmlns:a="http://schemas.openxmlformats.org/drawingml/2006/main" xmlns:p="http://schemas.openxmlformats.org/presentationml/2006/main" xmlns:r="http://schemas.openxmlformats.org/officeDocument/2006/relationships">
+  <p:cSld>
+    <p:bg>
+      <p:bgPr>
+        <a:solidFill>
+          <a:srgbClr val="08080C"/>
+        </a:solidFill>
+        <a:effectLst/>
+      </p:bgPr>
+    </p:bg>
+    <p:spTree>
+      <p:nvGrpSpPr>
+        <p:cNvPr id="1" name=""/>
+        <p:cNvGrpSpPr/>
+        <p:nvPr/>
+      </p:nvGrpSpPr>
+      <p:grpSpPr/>
+      <p:sp>
+        <p:nvSpPr>
+          <p:cNvPr id="2" name="Rectangle 1"/>
+          <p:cNvSpPr/>
+          <p:nvPr/>
+        </p:nvSpPr>
+        <p:spPr>
+          <a:xfrm>
+            <a:off x="0" y="365760"/>
+            <a:ext cx="12191695" cy="54864"/>
+          </a:xfrm>
+          <a:prstGeom prst="rect">
+            <a:avLst/>
+          </a:prstGeom>
+          <a:solidFill>
+            <a:srgbClr val="FFB72B"/>
+          </a:solidFill>
+          <a:ln>
+            <a:noFill/>
+          </a:ln>
+        </p:spPr>
+        <p:style>
+          <a:lnRef idx="1">
+            <a:schemeClr val="accent1"/>
+          </a:lnRef>
+          <a:fillRef idx="3">
+            <a:schemeClr val="accent1"/>
+          </a:fillRef>
+          <a:effectRef idx="2">
+            <a:schemeClr val="accent1"/>
+          </a:effectRef>
+          <a:fontRef idx="minor">
+            <a:schemeClr val="lt1"/>
+          </a:fontRef>
+        </p:style>
+        <p:txBody>
+          <a:bodyPr rtlCol="0" anchor="ctr"/>
+          <a:lstStyle/>
+          <a:p>
+            <a:pPr algn="ctr"/>
+          </a:p>
+        </p:txBody>
+      </p:sp>
+      <p:sp>
+        <p:nvSpPr>
+          <p:cNvPr id="3" name="TextBox 2"/>
+          <p:cNvSpPr txBox="1"/>
+          <p:nvPr/>
+        </p:nvSpPr>
+        <p:spPr>
+          <a:xfrm>
+            <a:off x="1097280" y="731520"/>
+            <a:ext cx="3657600" cy="365760"/>
+          </a:xfrm>
+          <a:prstGeom prst="rect">
+            <a:avLst/>
+          </a:prstGeom>
+          <a:noFill/>
+        </p:spPr>
+        <p:txBody>
+          <a:bodyPr wrap="none">
+            <a:spAutoFit/>
+          </a:bodyPr>
+          <a:lstStyle/>
+          <a:p>
+            <a:pPr algn="l">
+              <a:defRPr sz="1000" b="1">
+                <a:solidFill>
+                  <a:srgbClr val="FFB72B"/>
+                </a:solidFill>
+                <a:latin typeface="Calibri"/>
+              </a:defRPr>
+            </a:pPr>
+            <a:r>
+              <a:t>🎂  CELEBRATION</a:t>
+            </a:r>
+          </a:p>
+        </p:txBody>
+      </p:sp>
+      <p:sp>
+        <p:nvSpPr>
+          <p:cNvPr id="4" name="TextBox 3"/>
+          <p:cNvSpPr txBox="1"/>
+          <p:nvPr/>
+        </p:nvSpPr>
+        <p:spPr>
+          <a:xfrm>
+            <a:off x="1097280" y="1188720"/>
+            <a:ext cx="9966960" cy="731520"/>
+          </a:xfrm>
+          <a:prstGeom prst="rect">
+            <a:avLst/>
+          </a:prstGeom>
+          <a:noFill/>
+        </p:spPr>
+        <p:txBody>
+          <a:bodyPr wrap="square">
+            <a:spAutoFit/>
+          </a:bodyPr>
+          <a:lstStyle/>
+          <a:p>
+            <a:pPr algn="l">
+              <a:defRPr sz="3200" b="1" i="0">
+                <a:solidFill>
+                  <a:srgbClr val="FFB72B"/>
+                </a:solidFill>
+                <a:latin typeface="Calibri"/>
+              </a:defRPr>
+            </a:pPr>
+            <a:r>
+              <a:t>Happy Birthday!</a:t>
+            </a:r>
+          </a:p>
+        </p:txBody>
+      </p:sp>
+      <p:sp>
+        <p:nvSpPr>
+          <p:cNvPr id="5" name="TextBox 4"/>
+          <p:cNvSpPr txBox="1"/>
+          <p:nvPr/>
+        </p:nvSpPr>
+        <p:spPr>
+          <a:xfrm>
+            <a:off x="1097280" y="2103120"/>
+            <a:ext cx="9966960" cy="640080"/>
+          </a:xfrm>
+          <a:prstGeom prst="rect">
+            <a:avLst/>
+          </a:prstGeom>
+          <a:noFill/>
+        </p:spPr>
+        <p:txBody>
+          <a:bodyPr wrap="square">
+            <a:spAutoFit/>
+          </a:bodyPr>
+          <a:lstStyle/>
+          <a:p>
+            <a:pPr algn="l">
+              <a:defRPr sz="2800" b="1" i="0">
+                <a:solidFill>
+                  <a:srgbClr val="FFFFFF"/>
+                </a:solidFill>
+                <a:latin typeface="Calibri"/>
+              </a:defRPr>
+            </a:pPr>
+            <a:r>
+              <a:t>Irina Koval</a:t>
+            </a:r>
+          </a:p>
+        </p:txBody>
+      </p:sp>
+      <p:sp>
+        <p:nvSpPr>
+          <p:cNvPr id="6" name="TextBox 5"/>
+          <p:cNvSpPr txBox="1"/>
+          <p:nvPr/>
+        </p:nvSpPr>
+        <p:spPr>
+          <a:xfrm>
+            <a:off x="1097280" y="2743200"/>
+            <a:ext cx="9966960" cy="365760"/>
+          </a:xfrm>
+          <a:prstGeom prst="rect">
+            <a:avLst/>
+          </a:prstGeom>
+          <a:noFill/>
+        </p:spPr>
+        <p:txBody>
+          <a:bodyPr wrap="square">
+            <a:spAutoFit/>
+          </a:bodyPr>
+          <a:lstStyle/>
+          <a:p>
+            <a:pPr algn="l">
+              <a:defRPr sz="1400" b="0" i="0">
+                <a:solidFill>
+                  <a:srgbClr val="8F95A3"/>
+                </a:solidFill>
+                <a:latin typeface="Calibri"/>
+              </a:defRPr>
+            </a:pPr>
+            <a:r>
+              <a:t>March 13</a:t>
+            </a:r>
+          </a:p>
+        </p:txBody>
+      </p:sp>
+      <p:sp>
+        <p:nvSpPr>
+          <p:cNvPr id="7" name="TextBox 6"/>
+          <p:cNvSpPr txBox="1"/>
+          <p:nvPr/>
+        </p:nvSpPr>
+        <p:spPr>
+          <a:xfrm>
+            <a:off x="1097280" y="3291840"/>
+            <a:ext cx="9966960" cy="914400"/>
+          </a:xfrm>
+          <a:prstGeom prst="rect">
+            <a:avLst/>
+          </a:prstGeom>
+          <a:noFill/>
+        </p:spPr>
+        <p:txBody>
+          <a:bodyPr wrap="square">
+            <a:spAutoFit/>
+          </a:bodyPr>
+          <a:lstStyle/>
+          <a:p>
+            <a:pPr algn="l">
+              <a:defRPr sz="1600" b="0" i="0">
+                <a:solidFill>
+                  <a:srgbClr val="E2E2EA"/>
+                </a:solidFill>
+                <a:latin typeface="Calibri"/>
+              </a:defRPr>
+            </a:pPr>
+            <a:r>
+              <a:t>Wishing you an amazing day filled with joy and celebration!</a:t>
+            </a:r>
+          </a:p>
+        </p:txBody>
+      </p:sp>
+      <p:sp>
+        <p:nvSpPr>
+          <p:cNvPr id="8" name="TextBox 7"/>
+          <p:cNvSpPr txBox="1"/>
+          <p:nvPr/>
+        </p:nvSpPr>
+        <p:spPr>
+          <a:xfrm>
+            <a:off x="1097280" y="4572000"/>
+            <a:ext cx="9966960" cy="457200"/>
+          </a:xfrm>
+          <a:prstGeom prst="rect">
+            <a:avLst/>
+          </a:prstGeom>
+          <a:noFill/>
+        </p:spPr>
+        <p:txBody>
+          <a:bodyPr wrap="square">
+            <a:spAutoFit/>
+          </a:bodyPr>
+          <a:lstStyle/>
+          <a:p>
+            <a:pPr algn="l">
+              <a:defRPr sz="1400" b="0" i="1">
+                <a:solidFill>
+                  <a:srgbClr val="FFB72B"/>
+                </a:solidFill>
+                <a:latin typeface="Calibri"/>
+              </a:defRPr>
+            </a:pPr>
+            <a:r>
+              <a:t>With love, Your Appodeal Team 💜</a:t>
+            </a:r>
+          </a:p>
+        </p:txBody>
+      </p:sp>
+    </p:spTree>
+  </p:cSld>
+  <p:clrMapOvr>
+    <a:masterClrMapping/>
+  </p:clrMapOvr>
+</p:sld>
+</file>
+
+<file path=ppt/slides/slide23.xml><?xml version="1.0" encoding="utf-8"?>
+<p:sld xmlns:a="http://schemas.openxmlformats.org/drawingml/2006/main" xmlns:p="http://schemas.openxmlformats.org/presentationml/2006/main" xmlns:r="http://schemas.openxmlformats.org/officeDocument/2006/relationships">
+  <p:cSld>
+    <p:bg>
+      <p:bgPr>
+        <a:solidFill>
+          <a:srgbClr val="08080C"/>
+        </a:solidFill>
+        <a:effectLst/>
+      </p:bgPr>
+    </p:bg>
+    <p:spTree>
+      <p:nvGrpSpPr>
+        <p:cNvPr id="1" name=""/>
+        <p:cNvGrpSpPr/>
+        <p:nvPr/>
+      </p:nvGrpSpPr>
+      <p:grpSpPr/>
+      <p:sp>
+        <p:nvSpPr>
+          <p:cNvPr id="2" name="Rectangle 1"/>
+          <p:cNvSpPr/>
+          <p:nvPr/>
+        </p:nvSpPr>
+        <p:spPr>
+          <a:xfrm>
+            <a:off x="0" y="365760"/>
+            <a:ext cx="12191695" cy="54864"/>
+          </a:xfrm>
+          <a:prstGeom prst="rect">
+            <a:avLst/>
+          </a:prstGeom>
+          <a:solidFill>
+            <a:srgbClr val="00FFD1"/>
+          </a:solidFill>
+          <a:ln>
+            <a:noFill/>
+          </a:ln>
+        </p:spPr>
+        <p:style>
+          <a:lnRef idx="1">
+            <a:schemeClr val="accent1"/>
+          </a:lnRef>
+          <a:fillRef idx="3">
+            <a:schemeClr val="accent1"/>
+          </a:fillRef>
+          <a:effectRef idx="2">
+            <a:schemeClr val="accent1"/>
+          </a:effectRef>
+          <a:fontRef idx="minor">
+            <a:schemeClr val="lt1"/>
+          </a:fontRef>
+        </p:style>
+        <p:txBody>
+          <a:bodyPr rtlCol="0" anchor="ctr"/>
+          <a:lstStyle/>
+          <a:p>
+            <a:pPr algn="ctr"/>
+          </a:p>
+        </p:txBody>
+      </p:sp>
+      <p:sp>
+        <p:nvSpPr>
+          <p:cNvPr id="3" name="TextBox 2"/>
+          <p:cNvSpPr txBox="1"/>
+          <p:nvPr/>
+        </p:nvSpPr>
+        <p:spPr>
+          <a:xfrm>
+            <a:off x="1097280" y="731520"/>
+            <a:ext cx="3657600" cy="365760"/>
+          </a:xfrm>
+          <a:prstGeom prst="rect">
+            <a:avLst/>
+          </a:prstGeom>
+          <a:noFill/>
+        </p:spPr>
+        <p:txBody>
+          <a:bodyPr wrap="none">
+            <a:spAutoFit/>
+          </a:bodyPr>
+          <a:lstStyle/>
+          <a:p>
+            <a:pPr algn="l">
+              <a:defRPr sz="1000" b="1">
+                <a:solidFill>
+                  <a:srgbClr val="00FFD1"/>
+                </a:solidFill>
+                <a:latin typeface="Calibri"/>
+              </a:defRPr>
+            </a:pPr>
+            <a:r>
+              <a:t>📢  OFFICE LIFE</a:t>
+            </a:r>
+          </a:p>
+        </p:txBody>
+      </p:sp>
+      <p:sp>
+        <p:nvSpPr>
+          <p:cNvPr id="4" name="TextBox 3"/>
+          <p:cNvSpPr txBox="1"/>
+          <p:nvPr/>
+        </p:nvSpPr>
+        <p:spPr>
+          <a:xfrm>
+            <a:off x="1097280" y="1188720"/>
+            <a:ext cx="9966960" cy="731520"/>
+          </a:xfrm>
+          <a:prstGeom prst="rect">
+            <a:avLst/>
+          </a:prstGeom>
+          <a:noFill/>
+        </p:spPr>
+        <p:txBody>
+          <a:bodyPr wrap="square">
+            <a:spAutoFit/>
+          </a:bodyPr>
+          <a:lstStyle/>
+          <a:p>
+            <a:pPr algn="l">
+              <a:defRPr sz="3200" b="1" i="0">
+                <a:solidFill>
+                  <a:srgbClr val="00FFD1"/>
+                </a:solidFill>
+                <a:latin typeface="Calibri"/>
+              </a:defRPr>
+            </a:pPr>
+            <a:r>
+              <a:t>From #general</a:t>
+            </a:r>
+          </a:p>
+        </p:txBody>
+      </p:sp>
+      <p:sp>
+        <p:nvSpPr>
+          <p:cNvPr id="5" name="TextBox 4"/>
+          <p:cNvSpPr txBox="1"/>
+          <p:nvPr/>
+        </p:nvSpPr>
+        <p:spPr>
+          <a:xfrm>
+            <a:off x="1097280" y="2103120"/>
+            <a:ext cx="9966960" cy="457200"/>
+          </a:xfrm>
+          <a:prstGeom prst="rect">
+            <a:avLst/>
+          </a:prstGeom>
+          <a:noFill/>
+        </p:spPr>
+        <p:txBody>
+          <a:bodyPr wrap="square">
+            <a:spAutoFit/>
+          </a:bodyPr>
+          <a:lstStyle/>
+          <a:p>
+            <a:pPr algn="l">
+              <a:defRPr sz="1800" b="1" i="0">
+                <a:solidFill>
+                  <a:srgbClr val="FFFFFF"/>
+                </a:solidFill>
+                <a:latin typeface="Calibri"/>
+              </a:defRPr>
+            </a:pPr>
+            <a:r>
+              <a:t>:wave: Hello everyone &lt;!channel&gt;!</a:t>
+            </a:r>
+            <a:br/>
+            <a:br/>
+            <a:r>
+              <a:t>I’d like to share a cool thing our DevOps tea...</a:t>
+            </a:r>
+          </a:p>
+        </p:txBody>
+      </p:sp>
+      <p:sp>
+        <p:nvSpPr>
+          <p:cNvPr id="6" name="TextBox 5"/>
+          <p:cNvSpPr txBox="1"/>
+          <p:nvPr/>
+        </p:nvSpPr>
+        <p:spPr>
+          <a:xfrm>
+            <a:off x="1371600" y="2743200"/>
+            <a:ext cx="9692640" cy="1828800"/>
+          </a:xfrm>
+          <a:prstGeom prst="rect">
+            <a:avLst/>
+          </a:prstGeom>
+          <a:noFill/>
+        </p:spPr>
+        <p:txBody>
+          <a:bodyPr wrap="square">
+            <a:spAutoFit/>
+          </a:bodyPr>
+          <a:lstStyle/>
+          <a:p>
+            <a:pPr algn="l">
+              <a:defRPr sz="1500" b="0" i="1">
+                <a:solidFill>
+                  <a:srgbClr val="E2E2EA"/>
+                </a:solidFill>
+                <a:latin typeface="Calibri"/>
+              </a:defRPr>
+            </a:pPr>
+            <a:r>
+              <a:t>":wave: Hello everyone &lt;!channel&gt;!</a:t>
+            </a:r>
+            <a:br/>
+            <a:br/>
+            <a:r>
+              <a:t>I’d like to share a cool thing our DevOps team has set up for all of us.</a:t>
+            </a:r>
+            <a:br/>
+            <a:r>
+              <a:t>Introducing *&lt;https://coolify.appodeal.com|Coolify&gt;* - a service that allows you to deploy your applications in just a few clicks.</a:t>
+            </a:r>
+            <a:br/>
+            <a:r>
+              <a:t>:memo: I’ve written a short guide on how to use it &lt;https://a"</a:t>
+            </a:r>
+          </a:p>
+        </p:txBody>
+      </p:sp>
+      <p:sp>
+        <p:nvSpPr>
+          <p:cNvPr id="7" name="TextBox 6"/>
+          <p:cNvSpPr txBox="1"/>
+          <p:nvPr/>
+        </p:nvSpPr>
+        <p:spPr>
+          <a:xfrm>
+            <a:off x="1097280" y="4754880"/>
+            <a:ext cx="9966960" cy="365760"/>
+          </a:xfrm>
+          <a:prstGeom prst="rect">
+            <a:avLst/>
+          </a:prstGeom>
+          <a:noFill/>
+        </p:spPr>
+        <p:txBody>
+          <a:bodyPr wrap="square">
+            <a:spAutoFit/>
+          </a:bodyPr>
+          <a:lstStyle/>
+          <a:p>
+            <a:pPr algn="l">
+              <a:defRPr sz="1400" b="0" i="0">
+                <a:solidFill>
+                  <a:srgbClr val="8F95A3"/>
+                </a:solidFill>
+                <a:latin typeface="Calibri"/>
+              </a:defRPr>
+            </a:pPr>
+            <a:r>
+              <a:t>— Gleb Krahotkin</a:t>
+            </a:r>
+          </a:p>
+        </p:txBody>
+      </p:sp>
+      <p:sp>
+        <p:nvSpPr>
+          <p:cNvPr id="8" name="TextBox 7"/>
+          <p:cNvSpPr txBox="1"/>
+          <p:nvPr/>
+        </p:nvSpPr>
+        <p:spPr>
+          <a:xfrm>
+            <a:off x="1097280" y="5760720"/>
+            <a:ext cx="9966960" cy="274320"/>
+          </a:xfrm>
+          <a:prstGeom prst="rect">
+            <a:avLst/>
+          </a:prstGeom>
+          <a:noFill/>
+        </p:spPr>
+        <p:txBody>
+          <a:bodyPr wrap="square">
+            <a:spAutoFit/>
+          </a:bodyPr>
+          <a:lstStyle/>
+          <a:p>
+            <a:pPr algn="l">
+              <a:defRPr sz="1100" b="0" i="0">
+                <a:solidFill>
+                  <a:srgbClr val="5C6270"/>
+                </a:solidFill>
+                <a:latin typeface="Calibri"/>
+              </a:defRPr>
+            </a:pPr>
+            <a:r>
+              <a:t>#general</a:t>
+            </a:r>
+          </a:p>
+        </p:txBody>
+      </p:sp>
+    </p:spTree>
+  </p:cSld>
+  <p:clrMapOvr>
+    <a:masterClrMapping/>
+  </p:clrMapOvr>
+</p:sld>
+</file>
+
+<file path=ppt/slides/slide24.xml><?xml version="1.0" encoding="utf-8"?>
+<p:sld xmlns:a="http://schemas.openxmlformats.org/drawingml/2006/main" xmlns:p="http://schemas.openxmlformats.org/presentationml/2006/main" xmlns:r="http://schemas.openxmlformats.org/officeDocument/2006/relationships">
+  <p:cSld>
+    <p:bg>
+      <p:bgPr>
+        <a:solidFill>
+          <a:srgbClr val="08080C"/>
+        </a:solidFill>
+        <a:effectLst/>
+      </p:bgPr>
+    </p:bg>
+    <p:spTree>
+      <p:nvGrpSpPr>
+        <p:cNvPr id="1" name=""/>
+        <p:cNvGrpSpPr/>
+        <p:nvPr/>
+      </p:nvGrpSpPr>
+      <p:grpSpPr/>
+      <p:sp>
+        <p:nvSpPr>
+          <p:cNvPr id="2" name="Rectangle 1"/>
+          <p:cNvSpPr/>
+          <p:nvPr/>
+        </p:nvSpPr>
+        <p:spPr>
+          <a:xfrm>
+            <a:off x="0" y="365760"/>
+            <a:ext cx="12191695" cy="54864"/>
+          </a:xfrm>
+          <a:prstGeom prst="rect">
+            <a:avLst/>
+          </a:prstGeom>
+          <a:solidFill>
+            <a:srgbClr val="00FFD1"/>
+          </a:solidFill>
+          <a:ln>
+            <a:noFill/>
+          </a:ln>
+        </p:spPr>
+        <p:style>
+          <a:lnRef idx="1">
+            <a:schemeClr val="accent1"/>
+          </a:lnRef>
+          <a:fillRef idx="3">
+            <a:schemeClr val="accent1"/>
+          </a:fillRef>
+          <a:effectRef idx="2">
+            <a:schemeClr val="accent1"/>
+          </a:effectRef>
+          <a:fontRef idx="minor">
+            <a:schemeClr val="lt1"/>
+          </a:fontRef>
+        </p:style>
+        <p:txBody>
+          <a:bodyPr rtlCol="0" anchor="ctr"/>
+          <a:lstStyle/>
+          <a:p>
+            <a:pPr algn="ctr"/>
+          </a:p>
+        </p:txBody>
+      </p:sp>
+      <p:sp>
+        <p:nvSpPr>
+          <p:cNvPr id="3" name="TextBox 2"/>
+          <p:cNvSpPr txBox="1"/>
+          <p:nvPr/>
+        </p:nvSpPr>
+        <p:spPr>
+          <a:xfrm>
+            <a:off x="1097280" y="731520"/>
+            <a:ext cx="3657600" cy="365760"/>
+          </a:xfrm>
+          <a:prstGeom prst="rect">
+            <a:avLst/>
+          </a:prstGeom>
+          <a:noFill/>
+        </p:spPr>
+        <p:txBody>
+          <a:bodyPr wrap="none">
+            <a:spAutoFit/>
+          </a:bodyPr>
+          <a:lstStyle/>
+          <a:p>
+            <a:pPr algn="l">
+              <a:defRPr sz="1000" b="1">
+                <a:solidFill>
+                  <a:srgbClr val="00FFD1"/>
+                </a:solidFill>
+                <a:latin typeface="Calibri"/>
+              </a:defRPr>
+            </a:pPr>
+            <a:r>
+              <a:t>📢  OFFICE LIFE</a:t>
+            </a:r>
+          </a:p>
+        </p:txBody>
+      </p:sp>
+      <p:sp>
+        <p:nvSpPr>
+          <p:cNvPr id="4" name="TextBox 3"/>
+          <p:cNvSpPr txBox="1"/>
+          <p:nvPr/>
+        </p:nvSpPr>
+        <p:spPr>
+          <a:xfrm>
+            <a:off x="1097280" y="1188720"/>
+            <a:ext cx="9966960" cy="731520"/>
+          </a:xfrm>
+          <a:prstGeom prst="rect">
+            <a:avLst/>
+          </a:prstGeom>
+          <a:noFill/>
+        </p:spPr>
+        <p:txBody>
+          <a:bodyPr wrap="square">
+            <a:spAutoFit/>
+          </a:bodyPr>
+          <a:lstStyle/>
+          <a:p>
+            <a:pPr algn="l">
+              <a:defRPr sz="3200" b="1" i="0">
+                <a:solidFill>
+                  <a:srgbClr val="00FFD1"/>
+                </a:solidFill>
+                <a:latin typeface="Calibri"/>
+              </a:defRPr>
+            </a:pPr>
+            <a:r>
+              <a:t>From #general</a:t>
+            </a:r>
+          </a:p>
+        </p:txBody>
+      </p:sp>
+      <p:sp>
+        <p:nvSpPr>
+          <p:cNvPr id="5" name="TextBox 4"/>
+          <p:cNvSpPr txBox="1"/>
+          <p:nvPr/>
+        </p:nvSpPr>
+        <p:spPr>
+          <a:xfrm>
+            <a:off x="1097280" y="2103120"/>
+            <a:ext cx="9966960" cy="457200"/>
+          </a:xfrm>
+          <a:prstGeom prst="rect">
+            <a:avLst/>
+          </a:prstGeom>
+          <a:noFill/>
+        </p:spPr>
+        <p:txBody>
+          <a:bodyPr wrap="square">
+            <a:spAutoFit/>
+          </a:bodyPr>
+          <a:lstStyle/>
+          <a:p>
+            <a:pPr algn="l">
+              <a:defRPr sz="1800" b="1" i="0">
+                <a:solidFill>
+                  <a:srgbClr val="FFFFFF"/>
+                </a:solidFill>
+                <a:latin typeface="Calibri"/>
+              </a:defRPr>
+            </a:pPr>
+            <a:r>
+              <a:t>_Hi everyone &lt;!channel&gt;_ :wave:</a:t>
+            </a:r>
+            <a:br/>
+            <a:r>
+              <a:t>_I recorded a short video showing how I built a ...</a:t>
+            </a:r>
+          </a:p>
+        </p:txBody>
+      </p:sp>
+      <p:sp>
+        <p:nvSpPr>
+          <p:cNvPr id="6" name="TextBox 5"/>
+          <p:cNvSpPr txBox="1"/>
+          <p:nvPr/>
+        </p:nvSpPr>
+        <p:spPr>
+          <a:xfrm>
+            <a:off x="1371600" y="2743200"/>
+            <a:ext cx="9692640" cy="1828800"/>
+          </a:xfrm>
+          <a:prstGeom prst="rect">
+            <a:avLst/>
+          </a:prstGeom>
+          <a:noFill/>
+        </p:spPr>
+        <p:txBody>
+          <a:bodyPr wrap="square">
+            <a:spAutoFit/>
+          </a:bodyPr>
+          <a:lstStyle/>
+          <a:p>
+            <a:pPr algn="l">
+              <a:defRPr sz="1500" b="0" i="1">
+                <a:solidFill>
+                  <a:srgbClr val="E2E2EA"/>
+                </a:solidFill>
+                <a:latin typeface="Calibri"/>
+              </a:defRPr>
+            </a:pPr>
+            <a:r>
+              <a:t>"_Hi everyone &lt;!channel&gt;_ :wave:</a:t>
+            </a:r>
+            <a:br/>
+            <a:r>
+              <a:t>_I recorded a short video showing how I built a fully automated AI-powered system — from idea to production — using only AI tools and zero coding experience._</a:t>
+            </a:r>
+            <a:br/>
+            <a:r>
+              <a:t>_Slack data → AI curation → auto-deploying a live dashboard on office TVs. All running on autopilot._</a:t>
+            </a:r>
+            <a:br/>
+            <a:r>
+              <a:t>_If I c"</a:t>
+            </a:r>
+          </a:p>
+        </p:txBody>
+      </p:sp>
+      <p:sp>
+        <p:nvSpPr>
+          <p:cNvPr id="7" name="TextBox 6"/>
+          <p:cNvSpPr txBox="1"/>
+          <p:nvPr/>
+        </p:nvSpPr>
+        <p:spPr>
+          <a:xfrm>
+            <a:off x="1097280" y="4754880"/>
+            <a:ext cx="9966960" cy="365760"/>
+          </a:xfrm>
+          <a:prstGeom prst="rect">
+            <a:avLst/>
+          </a:prstGeom>
+          <a:noFill/>
+        </p:spPr>
+        <p:txBody>
+          <a:bodyPr wrap="square">
+            <a:spAutoFit/>
+          </a:bodyPr>
+          <a:lstStyle/>
+          <a:p>
+            <a:pPr algn="l">
+              <a:defRPr sz="1400" b="0" i="0">
+                <a:solidFill>
+                  <a:srgbClr val="8F95A3"/>
+                </a:solidFill>
+                <a:latin typeface="Calibri"/>
+              </a:defRPr>
+            </a:pPr>
+            <a:r>
+              <a:t>— Liliya Garifullina</a:t>
+            </a:r>
+          </a:p>
+        </p:txBody>
+      </p:sp>
+      <p:sp>
+        <p:nvSpPr>
+          <p:cNvPr id="8" name="TextBox 7"/>
+          <p:cNvSpPr txBox="1"/>
+          <p:nvPr/>
+        </p:nvSpPr>
+        <p:spPr>
+          <a:xfrm>
+            <a:off x="1097280" y="5760720"/>
+            <a:ext cx="9966960" cy="274320"/>
+          </a:xfrm>
+          <a:prstGeom prst="rect">
+            <a:avLst/>
+          </a:prstGeom>
+          <a:noFill/>
+        </p:spPr>
+        <p:txBody>
+          <a:bodyPr wrap="square">
+            <a:spAutoFit/>
+          </a:bodyPr>
+          <a:lstStyle/>
+          <a:p>
+            <a:pPr algn="l">
+              <a:defRPr sz="1100" b="0" i="0">
+                <a:solidFill>
+                  <a:srgbClr val="5C6270"/>
+                </a:solidFill>
+                <a:latin typeface="Calibri"/>
+              </a:defRPr>
+            </a:pPr>
+            <a:r>
+              <a:t>#general</a:t>
+            </a:r>
+          </a:p>
+        </p:txBody>
+      </p:sp>
+    </p:spTree>
+  </p:cSld>
+  <p:clrMapOvr>
+    <a:masterClrMapping/>
+  </p:clrMapOvr>
+</p:sld>
+</file>
+
+<file path=ppt/slides/slide25.xml><?xml version="1.0" encoding="utf-8"?>
+<p:sld xmlns:a="http://schemas.openxmlformats.org/drawingml/2006/main" xmlns:p="http://schemas.openxmlformats.org/presentationml/2006/main" xmlns:r="http://schemas.openxmlformats.org/officeDocument/2006/relationships">
+  <p:cSld>
+    <p:bg>
+      <p:bgPr>
+        <a:solidFill>
+          <a:srgbClr val="08080C"/>
+        </a:solidFill>
+        <a:effectLst/>
+      </p:bgPr>
+    </p:bg>
+    <p:spTree>
+      <p:nvGrpSpPr>
+        <p:cNvPr id="1" name=""/>
+        <p:cNvGrpSpPr/>
+        <p:nvPr/>
+      </p:nvGrpSpPr>
+      <p:grpSpPr/>
+      <p:sp>
+        <p:nvSpPr>
+          <p:cNvPr id="2" name="Rectangle 1"/>
+          <p:cNvSpPr/>
+          <p:nvPr/>
+        </p:nvSpPr>
+        <p:spPr>
+          <a:xfrm>
+            <a:off x="0" y="365760"/>
+            <a:ext cx="12191695" cy="54864"/>
+          </a:xfrm>
+          <a:prstGeom prst="rect">
+            <a:avLst/>
+          </a:prstGeom>
+          <a:solidFill>
+            <a:srgbClr val="00FFD1"/>
+          </a:solidFill>
+          <a:ln>
+            <a:noFill/>
+          </a:ln>
+        </p:spPr>
+        <p:style>
+          <a:lnRef idx="1">
+            <a:schemeClr val="accent1"/>
+          </a:lnRef>
+          <a:fillRef idx="3">
+            <a:schemeClr val="accent1"/>
+          </a:fillRef>
+          <a:effectRef idx="2">
+            <a:schemeClr val="accent1"/>
+          </a:effectRef>
+          <a:fontRef idx="minor">
+            <a:schemeClr val="lt1"/>
+          </a:fontRef>
+        </p:style>
+        <p:txBody>
+          <a:bodyPr rtlCol="0" anchor="ctr"/>
+          <a:lstStyle/>
+          <a:p>
+            <a:pPr algn="ctr"/>
+          </a:p>
+        </p:txBody>
+      </p:sp>
+      <p:sp>
+        <p:nvSpPr>
+          <p:cNvPr id="3" name="TextBox 2"/>
+          <p:cNvSpPr txBox="1"/>
+          <p:nvPr/>
+        </p:nvSpPr>
+        <p:spPr>
+          <a:xfrm>
+            <a:off x="1097280" y="731520"/>
+            <a:ext cx="3657600" cy="365760"/>
+          </a:xfrm>
+          <a:prstGeom prst="rect">
+            <a:avLst/>
+          </a:prstGeom>
+          <a:noFill/>
+        </p:spPr>
+        <p:txBody>
+          <a:bodyPr wrap="none">
+            <a:spAutoFit/>
+          </a:bodyPr>
+          <a:lstStyle/>
+          <a:p>
+            <a:pPr algn="l">
+              <a:defRPr sz="1000" b="1">
+                <a:solidFill>
+                  <a:srgbClr val="00FFD1"/>
+                </a:solidFill>
+                <a:latin typeface="Calibri"/>
+              </a:defRPr>
+            </a:pPr>
+            <a:r>
+              <a:t>📢  OFFICE LIFE</a:t>
+            </a:r>
+          </a:p>
+        </p:txBody>
+      </p:sp>
+      <p:sp>
+        <p:nvSpPr>
+          <p:cNvPr id="4" name="TextBox 3"/>
+          <p:cNvSpPr txBox="1"/>
+          <p:nvPr/>
+        </p:nvSpPr>
+        <p:spPr>
+          <a:xfrm>
+            <a:off x="1097280" y="1188720"/>
+            <a:ext cx="9966960" cy="731520"/>
+          </a:xfrm>
+          <a:prstGeom prst="rect">
+            <a:avLst/>
+          </a:prstGeom>
+          <a:noFill/>
+        </p:spPr>
+        <p:txBody>
+          <a:bodyPr wrap="square">
+            <a:spAutoFit/>
+          </a:bodyPr>
+          <a:lstStyle/>
+          <a:p>
+            <a:pPr algn="l">
+              <a:defRPr sz="3200" b="1" i="0">
+                <a:solidFill>
+                  <a:srgbClr val="00FFD1"/>
+                </a:solidFill>
+                <a:latin typeface="Calibri"/>
+              </a:defRPr>
+            </a:pPr>
+            <a:r>
+              <a:t>From #general</a:t>
+            </a:r>
+          </a:p>
+        </p:txBody>
+      </p:sp>
+      <p:sp>
+        <p:nvSpPr>
+          <p:cNvPr id="5" name="TextBox 4"/>
+          <p:cNvSpPr txBox="1"/>
+          <p:nvPr/>
+        </p:nvSpPr>
+        <p:spPr>
+          <a:xfrm>
+            <a:off x="1097280" y="2103120"/>
+            <a:ext cx="9966960" cy="457200"/>
+          </a:xfrm>
+          <a:prstGeom prst="rect">
+            <a:avLst/>
+          </a:prstGeom>
+          <a:noFill/>
+        </p:spPr>
+        <p:txBody>
+          <a:bodyPr wrap="square">
+            <a:spAutoFit/>
+          </a:bodyPr>
+          <a:lstStyle/>
+          <a:p>
+            <a:pPr algn="l">
+              <a:defRPr sz="1800" b="1" i="0">
+                <a:solidFill>
+                  <a:srgbClr val="FFFFFF"/>
+                </a:solidFill>
+                <a:latin typeface="Calibri"/>
+              </a:defRPr>
+            </a:pPr>
+            <a:r>
+              <a:t>&lt;!channel&gt;</a:t>
+            </a:r>
+            <a:br/>
+            <a:r>
+              <a:t>Team,</a:t>
+            </a:r>
+            <a:br/>
+            <a:br/>
+            <a:r>
+              <a:t>We’re making great progress in building products, and it’s esp...</a:t>
+            </a:r>
+          </a:p>
+        </p:txBody>
+      </p:sp>
+      <p:sp>
+        <p:nvSpPr>
+          <p:cNvPr id="6" name="TextBox 5"/>
+          <p:cNvSpPr txBox="1"/>
+          <p:nvPr/>
+        </p:nvSpPr>
+        <p:spPr>
+          <a:xfrm>
+            <a:off x="1371600" y="2743200"/>
+            <a:ext cx="9692640" cy="1828800"/>
+          </a:xfrm>
+          <a:prstGeom prst="rect">
+            <a:avLst/>
+          </a:prstGeom>
+          <a:noFill/>
+        </p:spPr>
+        <p:txBody>
+          <a:bodyPr wrap="square">
+            <a:spAutoFit/>
+          </a:bodyPr>
+          <a:lstStyle/>
+          <a:p>
+            <a:pPr algn="l">
+              <a:defRPr sz="1500" b="0" i="1">
+                <a:solidFill>
+                  <a:srgbClr val="E2E2EA"/>
+                </a:solidFill>
+                <a:latin typeface="Calibri"/>
+              </a:defRPr>
+            </a:pPr>
+            <a:r>
+              <a:t>"&lt;!channel&gt;</a:t>
+            </a:r>
+            <a:br/>
+            <a:r>
+              <a:t>Team,</a:t>
+            </a:r>
+            <a:br/>
+            <a:br/>
+            <a:r>
+              <a:t>We’re making great progress in building products, and it’s especially exciting to see how quickly non-engineering teams have created so many useful tools. This is a strong sign that we’re learning fast and moving in the right direction.</a:t>
+            </a:r>
+            <a:br/>
+            <a:br/>
+            <a:r>
+              <a:t>At the same time, it’s important that we fol"</a:t>
+            </a:r>
+          </a:p>
+        </p:txBody>
+      </p:sp>
+      <p:sp>
+        <p:nvSpPr>
+          <p:cNvPr id="7" name="TextBox 6"/>
+          <p:cNvSpPr txBox="1"/>
+          <p:nvPr/>
+        </p:nvSpPr>
+        <p:spPr>
+          <a:xfrm>
+            <a:off x="1097280" y="4754880"/>
+            <a:ext cx="9966960" cy="365760"/>
+          </a:xfrm>
+          <a:prstGeom prst="rect">
+            <a:avLst/>
+          </a:prstGeom>
+          <a:noFill/>
+        </p:spPr>
+        <p:txBody>
+          <a:bodyPr wrap="square">
+            <a:spAutoFit/>
+          </a:bodyPr>
+          <a:lstStyle/>
+          <a:p>
+            <a:pPr algn="l">
+              <a:defRPr sz="1400" b="0" i="0">
+                <a:solidFill>
+                  <a:srgbClr val="8F95A3"/>
+                </a:solidFill>
+                <a:latin typeface="Calibri"/>
+              </a:defRPr>
+            </a:pPr>
+            <a:r>
+              <a:t>— Alexandr Zhitlukhin</a:t>
+            </a:r>
+          </a:p>
+        </p:txBody>
+      </p:sp>
+      <p:sp>
+        <p:nvSpPr>
+          <p:cNvPr id="8" name="TextBox 7"/>
+          <p:cNvSpPr txBox="1"/>
+          <p:nvPr/>
+        </p:nvSpPr>
+        <p:spPr>
+          <a:xfrm>
+            <a:off x="1097280" y="5760720"/>
+            <a:ext cx="9966960" cy="274320"/>
+          </a:xfrm>
+          <a:prstGeom prst="rect">
+            <a:avLst/>
+          </a:prstGeom>
+          <a:noFill/>
+        </p:spPr>
+        <p:txBody>
+          <a:bodyPr wrap="square">
+            <a:spAutoFit/>
+          </a:bodyPr>
+          <a:lstStyle/>
+          <a:p>
+            <a:pPr algn="l">
+              <a:defRPr sz="1100" b="0" i="0">
+                <a:solidFill>
+                  <a:srgbClr val="5C6270"/>
+                </a:solidFill>
+                <a:latin typeface="Calibri"/>
+              </a:defRPr>
+            </a:pPr>
+            <a:r>
+              <a:t>#general</a:t>
             </a:r>
           </a:p>
         </p:txBody>
@@ -4616,7 +8345,7 @@
               </a:defRPr>
             </a:pPr>
             <a:r>
-              <a:t>Giulia Galvani</a:t>
+              <a:t>Denis Glavatskikh</a:t>
             </a:r>
           </a:p>
         </p:txBody>
@@ -4901,7 +8630,7 @@
               </a:defRPr>
             </a:pPr>
             <a:r>
-              <a:t>Yanina Lozben</a:t>
+              <a:t>Anton Nikifarau</a:t>
             </a:r>
           </a:p>
         </p:txBody>
@@ -5186,7 +8915,7 @@
               </a:defRPr>
             </a:pPr>
             <a:r>
-              <a:t>Daryna Rudavka</a:t>
+              <a:t>Miguel Perez</a:t>
             </a:r>
           </a:p>
         </p:txBody>
@@ -5471,7 +9200,7 @@
               </a:defRPr>
             </a:pPr>
             <a:r>
-              <a:t>Vladimir Khrolovich</a:t>
+              <a:t>Irina Koval</a:t>
             </a:r>
           </a:p>
         </p:txBody>
@@ -5756,7 +9485,7 @@
               </a:defRPr>
             </a:pPr>
             <a:r>
-              <a:t>Denis Glavatskikh</a:t>
+              <a:t>Dmitrii Rodionov</a:t>
             </a:r>
           </a:p>
         </p:txBody>
@@ -6041,7 +9770,7 @@
               </a:defRPr>
             </a:pPr>
             <a:r>
-              <a:t>Irina Koval</a:t>
+              <a:t>Giulia Galvani</a:t>
             </a:r>
           </a:p>
         </p:txBody>
@@ -6326,7 +10055,7 @@
               </a:defRPr>
             </a:pPr>
             <a:r>
-              <a:t>Denis Glavatskikh</a:t>
+              <a:t>Vladimir Khrolovich</a:t>
             </a:r>
           </a:p>
         </p:txBody>

--- a/data/archive/pulse_2026-03-13.pptx
+++ b/data/archive/pulse_2026-03-13.pptx
@@ -12,6 +12,23 @@
     <p:sldId id="260" r:id="rId11"/>
     <p:sldId id="261" r:id="rId12"/>
     <p:sldId id="262" r:id="rId13"/>
+    <p:sldId id="263" r:id="rId14"/>
+    <p:sldId id="264" r:id="rId15"/>
+    <p:sldId id="265" r:id="rId16"/>
+    <p:sldId id="266" r:id="rId17"/>
+    <p:sldId id="267" r:id="rId18"/>
+    <p:sldId id="268" r:id="rId19"/>
+    <p:sldId id="269" r:id="rId20"/>
+    <p:sldId id="270" r:id="rId21"/>
+    <p:sldId id="271" r:id="rId22"/>
+    <p:sldId id="272" r:id="rId23"/>
+    <p:sldId id="273" r:id="rId24"/>
+    <p:sldId id="274" r:id="rId25"/>
+    <p:sldId id="275" r:id="rId26"/>
+    <p:sldId id="276" r:id="rId27"/>
+    <p:sldId id="277" r:id="rId28"/>
+    <p:sldId id="278" r:id="rId29"/>
+    <p:sldId id="279" r:id="rId30"/>
   </p:sldIdLst>
   <p:sldSz cx="12191695" cy="6858000" type="screen4x3"/>
   <p:notesSz cx="6858000" cy="9144000"/>
@@ -3261,6 +3278,2856 @@
 </p:sld>
 </file>
 
+<file path=ppt/slides/slide10.xml><?xml version="1.0" encoding="utf-8"?>
+<p:sld xmlns:a="http://schemas.openxmlformats.org/drawingml/2006/main" xmlns:p="http://schemas.openxmlformats.org/presentationml/2006/main" xmlns:r="http://schemas.openxmlformats.org/officeDocument/2006/relationships">
+  <p:cSld>
+    <p:bg>
+      <p:bgPr>
+        <a:solidFill>
+          <a:srgbClr val="08080C"/>
+        </a:solidFill>
+        <a:effectLst/>
+      </p:bgPr>
+    </p:bg>
+    <p:spTree>
+      <p:nvGrpSpPr>
+        <p:cNvPr id="1" name=""/>
+        <p:cNvGrpSpPr/>
+        <p:nvPr/>
+      </p:nvGrpSpPr>
+      <p:grpSpPr/>
+      <p:sp>
+        <p:nvSpPr>
+          <p:cNvPr id="2" name="Rectangle 1"/>
+          <p:cNvSpPr/>
+          <p:nvPr/>
+        </p:nvSpPr>
+        <p:spPr>
+          <a:xfrm>
+            <a:off x="0" y="365760"/>
+            <a:ext cx="12191695" cy="54864"/>
+          </a:xfrm>
+          <a:prstGeom prst="rect">
+            <a:avLst/>
+          </a:prstGeom>
+          <a:solidFill>
+            <a:srgbClr val="FFB72B"/>
+          </a:solidFill>
+          <a:ln>
+            <a:noFill/>
+          </a:ln>
+        </p:spPr>
+        <p:style>
+          <a:lnRef idx="1">
+            <a:schemeClr val="accent1"/>
+          </a:lnRef>
+          <a:fillRef idx="3">
+            <a:schemeClr val="accent1"/>
+          </a:fillRef>
+          <a:effectRef idx="2">
+            <a:schemeClr val="accent1"/>
+          </a:effectRef>
+          <a:fontRef idx="minor">
+            <a:schemeClr val="lt1"/>
+          </a:fontRef>
+        </p:style>
+        <p:txBody>
+          <a:bodyPr rtlCol="0" anchor="ctr"/>
+          <a:lstStyle/>
+          <a:p>
+            <a:pPr algn="ctr"/>
+          </a:p>
+        </p:txBody>
+      </p:sp>
+      <p:sp>
+        <p:nvSpPr>
+          <p:cNvPr id="3" name="TextBox 2"/>
+          <p:cNvSpPr txBox="1"/>
+          <p:nvPr/>
+        </p:nvSpPr>
+        <p:spPr>
+          <a:xfrm>
+            <a:off x="1097280" y="731520"/>
+            <a:ext cx="3657600" cy="365760"/>
+          </a:xfrm>
+          <a:prstGeom prst="rect">
+            <a:avLst/>
+          </a:prstGeom>
+          <a:noFill/>
+        </p:spPr>
+        <p:txBody>
+          <a:bodyPr wrap="none">
+            <a:spAutoFit/>
+          </a:bodyPr>
+          <a:lstStyle/>
+          <a:p>
+            <a:pPr algn="l">
+              <a:defRPr sz="1000" b="1">
+                <a:solidFill>
+                  <a:srgbClr val="FFB72B"/>
+                </a:solidFill>
+                <a:latin typeface="Calibri"/>
+              </a:defRPr>
+            </a:pPr>
+            <a:r>
+              <a:t>🎂  CELEBRATION</a:t>
+            </a:r>
+          </a:p>
+        </p:txBody>
+      </p:sp>
+      <p:sp>
+        <p:nvSpPr>
+          <p:cNvPr id="4" name="TextBox 3"/>
+          <p:cNvSpPr txBox="1"/>
+          <p:nvPr/>
+        </p:nvSpPr>
+        <p:spPr>
+          <a:xfrm>
+            <a:off x="1097280" y="1188720"/>
+            <a:ext cx="9966960" cy="731520"/>
+          </a:xfrm>
+          <a:prstGeom prst="rect">
+            <a:avLst/>
+          </a:prstGeom>
+          <a:noFill/>
+        </p:spPr>
+        <p:txBody>
+          <a:bodyPr wrap="square">
+            <a:spAutoFit/>
+          </a:bodyPr>
+          <a:lstStyle/>
+          <a:p>
+            <a:pPr algn="l">
+              <a:defRPr sz="3200" b="1" i="0">
+                <a:solidFill>
+                  <a:srgbClr val="FFB72B"/>
+                </a:solidFill>
+                <a:latin typeface="Calibri"/>
+              </a:defRPr>
+            </a:pPr>
+            <a:r>
+              <a:t>Happy Birthday!</a:t>
+            </a:r>
+          </a:p>
+        </p:txBody>
+      </p:sp>
+      <p:sp>
+        <p:nvSpPr>
+          <p:cNvPr id="5" name="TextBox 4"/>
+          <p:cNvSpPr txBox="1"/>
+          <p:nvPr/>
+        </p:nvSpPr>
+        <p:spPr>
+          <a:xfrm>
+            <a:off x="1097280" y="2103120"/>
+            <a:ext cx="9966960" cy="640080"/>
+          </a:xfrm>
+          <a:prstGeom prst="rect">
+            <a:avLst/>
+          </a:prstGeom>
+          <a:noFill/>
+        </p:spPr>
+        <p:txBody>
+          <a:bodyPr wrap="square">
+            <a:spAutoFit/>
+          </a:bodyPr>
+          <a:lstStyle/>
+          <a:p>
+            <a:pPr algn="l">
+              <a:defRPr sz="2800" b="1" i="0">
+                <a:solidFill>
+                  <a:srgbClr val="FFFFFF"/>
+                </a:solidFill>
+                <a:latin typeface="Calibri"/>
+              </a:defRPr>
+            </a:pPr>
+            <a:r>
+              <a:t>Vladimir Khrolovich</a:t>
+            </a:r>
+          </a:p>
+        </p:txBody>
+      </p:sp>
+      <p:sp>
+        <p:nvSpPr>
+          <p:cNvPr id="6" name="TextBox 5"/>
+          <p:cNvSpPr txBox="1"/>
+          <p:nvPr/>
+        </p:nvSpPr>
+        <p:spPr>
+          <a:xfrm>
+            <a:off x="1097280" y="2743200"/>
+            <a:ext cx="9966960" cy="365760"/>
+          </a:xfrm>
+          <a:prstGeom prst="rect">
+            <a:avLst/>
+          </a:prstGeom>
+          <a:noFill/>
+        </p:spPr>
+        <p:txBody>
+          <a:bodyPr wrap="square">
+            <a:spAutoFit/>
+          </a:bodyPr>
+          <a:lstStyle/>
+          <a:p>
+            <a:pPr algn="l">
+              <a:defRPr sz="1400" b="0" i="0">
+                <a:solidFill>
+                  <a:srgbClr val="8F95A3"/>
+                </a:solidFill>
+                <a:latin typeface="Calibri"/>
+              </a:defRPr>
+            </a:pPr>
+            <a:r>
+              <a:t>March 13</a:t>
+            </a:r>
+          </a:p>
+        </p:txBody>
+      </p:sp>
+      <p:sp>
+        <p:nvSpPr>
+          <p:cNvPr id="7" name="TextBox 6"/>
+          <p:cNvSpPr txBox="1"/>
+          <p:nvPr/>
+        </p:nvSpPr>
+        <p:spPr>
+          <a:xfrm>
+            <a:off x="1097280" y="3291840"/>
+            <a:ext cx="9966960" cy="914400"/>
+          </a:xfrm>
+          <a:prstGeom prst="rect">
+            <a:avLst/>
+          </a:prstGeom>
+          <a:noFill/>
+        </p:spPr>
+        <p:txBody>
+          <a:bodyPr wrap="square">
+            <a:spAutoFit/>
+          </a:bodyPr>
+          <a:lstStyle/>
+          <a:p>
+            <a:pPr algn="l">
+              <a:defRPr sz="1600" b="0" i="0">
+                <a:solidFill>
+                  <a:srgbClr val="E2E2EA"/>
+                </a:solidFill>
+                <a:latin typeface="Calibri"/>
+              </a:defRPr>
+            </a:pPr>
+            <a:r>
+              <a:t>Wishing you an amazing day filled with joy and celebration!</a:t>
+            </a:r>
+          </a:p>
+        </p:txBody>
+      </p:sp>
+      <p:sp>
+        <p:nvSpPr>
+          <p:cNvPr id="8" name="TextBox 7"/>
+          <p:cNvSpPr txBox="1"/>
+          <p:nvPr/>
+        </p:nvSpPr>
+        <p:spPr>
+          <a:xfrm>
+            <a:off x="1097280" y="4572000"/>
+            <a:ext cx="9966960" cy="457200"/>
+          </a:xfrm>
+          <a:prstGeom prst="rect">
+            <a:avLst/>
+          </a:prstGeom>
+          <a:noFill/>
+        </p:spPr>
+        <p:txBody>
+          <a:bodyPr wrap="square">
+            <a:spAutoFit/>
+          </a:bodyPr>
+          <a:lstStyle/>
+          <a:p>
+            <a:pPr algn="l">
+              <a:defRPr sz="1400" b="0" i="1">
+                <a:solidFill>
+                  <a:srgbClr val="FFB72B"/>
+                </a:solidFill>
+                <a:latin typeface="Calibri"/>
+              </a:defRPr>
+            </a:pPr>
+            <a:r>
+              <a:t>With love, Your Appodeal Team 💜</a:t>
+            </a:r>
+          </a:p>
+        </p:txBody>
+      </p:sp>
+    </p:spTree>
+  </p:cSld>
+  <p:clrMapOvr>
+    <a:masterClrMapping/>
+  </p:clrMapOvr>
+</p:sld>
+</file>
+
+<file path=ppt/slides/slide11.xml><?xml version="1.0" encoding="utf-8"?>
+<p:sld xmlns:a="http://schemas.openxmlformats.org/drawingml/2006/main" xmlns:p="http://schemas.openxmlformats.org/presentationml/2006/main" xmlns:r="http://schemas.openxmlformats.org/officeDocument/2006/relationships">
+  <p:cSld>
+    <p:bg>
+      <p:bgPr>
+        <a:solidFill>
+          <a:srgbClr val="08080C"/>
+        </a:solidFill>
+        <a:effectLst/>
+      </p:bgPr>
+    </p:bg>
+    <p:spTree>
+      <p:nvGrpSpPr>
+        <p:cNvPr id="1" name=""/>
+        <p:cNvGrpSpPr/>
+        <p:nvPr/>
+      </p:nvGrpSpPr>
+      <p:grpSpPr/>
+      <p:sp>
+        <p:nvSpPr>
+          <p:cNvPr id="2" name="Rectangle 1"/>
+          <p:cNvSpPr/>
+          <p:nvPr/>
+        </p:nvSpPr>
+        <p:spPr>
+          <a:xfrm>
+            <a:off x="0" y="365760"/>
+            <a:ext cx="12191695" cy="54864"/>
+          </a:xfrm>
+          <a:prstGeom prst="rect">
+            <a:avLst/>
+          </a:prstGeom>
+          <a:solidFill>
+            <a:srgbClr val="FFB72B"/>
+          </a:solidFill>
+          <a:ln>
+            <a:noFill/>
+          </a:ln>
+        </p:spPr>
+        <p:style>
+          <a:lnRef idx="1">
+            <a:schemeClr val="accent1"/>
+          </a:lnRef>
+          <a:fillRef idx="3">
+            <a:schemeClr val="accent1"/>
+          </a:fillRef>
+          <a:effectRef idx="2">
+            <a:schemeClr val="accent1"/>
+          </a:effectRef>
+          <a:fontRef idx="minor">
+            <a:schemeClr val="lt1"/>
+          </a:fontRef>
+        </p:style>
+        <p:txBody>
+          <a:bodyPr rtlCol="0" anchor="ctr"/>
+          <a:lstStyle/>
+          <a:p>
+            <a:pPr algn="ctr"/>
+          </a:p>
+        </p:txBody>
+      </p:sp>
+      <p:sp>
+        <p:nvSpPr>
+          <p:cNvPr id="3" name="TextBox 2"/>
+          <p:cNvSpPr txBox="1"/>
+          <p:nvPr/>
+        </p:nvSpPr>
+        <p:spPr>
+          <a:xfrm>
+            <a:off x="1097280" y="731520"/>
+            <a:ext cx="3657600" cy="365760"/>
+          </a:xfrm>
+          <a:prstGeom prst="rect">
+            <a:avLst/>
+          </a:prstGeom>
+          <a:noFill/>
+        </p:spPr>
+        <p:txBody>
+          <a:bodyPr wrap="none">
+            <a:spAutoFit/>
+          </a:bodyPr>
+          <a:lstStyle/>
+          <a:p>
+            <a:pPr algn="l">
+              <a:defRPr sz="1000" b="1">
+                <a:solidFill>
+                  <a:srgbClr val="FFB72B"/>
+                </a:solidFill>
+                <a:latin typeface="Calibri"/>
+              </a:defRPr>
+            </a:pPr>
+            <a:r>
+              <a:t>🎂  CELEBRATION</a:t>
+            </a:r>
+          </a:p>
+        </p:txBody>
+      </p:sp>
+      <p:sp>
+        <p:nvSpPr>
+          <p:cNvPr id="4" name="TextBox 3"/>
+          <p:cNvSpPr txBox="1"/>
+          <p:nvPr/>
+        </p:nvSpPr>
+        <p:spPr>
+          <a:xfrm>
+            <a:off x="1097280" y="1188720"/>
+            <a:ext cx="9966960" cy="731520"/>
+          </a:xfrm>
+          <a:prstGeom prst="rect">
+            <a:avLst/>
+          </a:prstGeom>
+          <a:noFill/>
+        </p:spPr>
+        <p:txBody>
+          <a:bodyPr wrap="square">
+            <a:spAutoFit/>
+          </a:bodyPr>
+          <a:lstStyle/>
+          <a:p>
+            <a:pPr algn="l">
+              <a:defRPr sz="3200" b="1" i="0">
+                <a:solidFill>
+                  <a:srgbClr val="FFB72B"/>
+                </a:solidFill>
+                <a:latin typeface="Calibri"/>
+              </a:defRPr>
+            </a:pPr>
+            <a:r>
+              <a:t>Happy Birthday!</a:t>
+            </a:r>
+          </a:p>
+        </p:txBody>
+      </p:sp>
+      <p:sp>
+        <p:nvSpPr>
+          <p:cNvPr id="5" name="TextBox 4"/>
+          <p:cNvSpPr txBox="1"/>
+          <p:nvPr/>
+        </p:nvSpPr>
+        <p:spPr>
+          <a:xfrm>
+            <a:off x="1097280" y="2103120"/>
+            <a:ext cx="9966960" cy="640080"/>
+          </a:xfrm>
+          <a:prstGeom prst="rect">
+            <a:avLst/>
+          </a:prstGeom>
+          <a:noFill/>
+        </p:spPr>
+        <p:txBody>
+          <a:bodyPr wrap="square">
+            <a:spAutoFit/>
+          </a:bodyPr>
+          <a:lstStyle/>
+          <a:p>
+            <a:pPr algn="l">
+              <a:defRPr sz="2800" b="1" i="0">
+                <a:solidFill>
+                  <a:srgbClr val="FFFFFF"/>
+                </a:solidFill>
+                <a:latin typeface="Calibri"/>
+              </a:defRPr>
+            </a:pPr>
+            <a:r>
+              <a:t>Dmitry Feshchenko</a:t>
+            </a:r>
+          </a:p>
+        </p:txBody>
+      </p:sp>
+      <p:sp>
+        <p:nvSpPr>
+          <p:cNvPr id="6" name="TextBox 5"/>
+          <p:cNvSpPr txBox="1"/>
+          <p:nvPr/>
+        </p:nvSpPr>
+        <p:spPr>
+          <a:xfrm>
+            <a:off x="1097280" y="2743200"/>
+            <a:ext cx="9966960" cy="365760"/>
+          </a:xfrm>
+          <a:prstGeom prst="rect">
+            <a:avLst/>
+          </a:prstGeom>
+          <a:noFill/>
+        </p:spPr>
+        <p:txBody>
+          <a:bodyPr wrap="square">
+            <a:spAutoFit/>
+          </a:bodyPr>
+          <a:lstStyle/>
+          <a:p>
+            <a:pPr algn="l">
+              <a:defRPr sz="1400" b="0" i="0">
+                <a:solidFill>
+                  <a:srgbClr val="8F95A3"/>
+                </a:solidFill>
+                <a:latin typeface="Calibri"/>
+              </a:defRPr>
+            </a:pPr>
+            <a:r>
+              <a:t>March 13</a:t>
+            </a:r>
+          </a:p>
+        </p:txBody>
+      </p:sp>
+      <p:sp>
+        <p:nvSpPr>
+          <p:cNvPr id="7" name="TextBox 6"/>
+          <p:cNvSpPr txBox="1"/>
+          <p:nvPr/>
+        </p:nvSpPr>
+        <p:spPr>
+          <a:xfrm>
+            <a:off x="1097280" y="3291840"/>
+            <a:ext cx="9966960" cy="914400"/>
+          </a:xfrm>
+          <a:prstGeom prst="rect">
+            <a:avLst/>
+          </a:prstGeom>
+          <a:noFill/>
+        </p:spPr>
+        <p:txBody>
+          <a:bodyPr wrap="square">
+            <a:spAutoFit/>
+          </a:bodyPr>
+          <a:lstStyle/>
+          <a:p>
+            <a:pPr algn="l">
+              <a:defRPr sz="1600" b="0" i="0">
+                <a:solidFill>
+                  <a:srgbClr val="E2E2EA"/>
+                </a:solidFill>
+                <a:latin typeface="Calibri"/>
+              </a:defRPr>
+            </a:pPr>
+            <a:r>
+              <a:t>Wishing you an amazing day filled with joy and celebration!</a:t>
+            </a:r>
+          </a:p>
+        </p:txBody>
+      </p:sp>
+      <p:sp>
+        <p:nvSpPr>
+          <p:cNvPr id="8" name="TextBox 7"/>
+          <p:cNvSpPr txBox="1"/>
+          <p:nvPr/>
+        </p:nvSpPr>
+        <p:spPr>
+          <a:xfrm>
+            <a:off x="1097280" y="4572000"/>
+            <a:ext cx="9966960" cy="457200"/>
+          </a:xfrm>
+          <a:prstGeom prst="rect">
+            <a:avLst/>
+          </a:prstGeom>
+          <a:noFill/>
+        </p:spPr>
+        <p:txBody>
+          <a:bodyPr wrap="square">
+            <a:spAutoFit/>
+          </a:bodyPr>
+          <a:lstStyle/>
+          <a:p>
+            <a:pPr algn="l">
+              <a:defRPr sz="1400" b="0" i="1">
+                <a:solidFill>
+                  <a:srgbClr val="FFB72B"/>
+                </a:solidFill>
+                <a:latin typeface="Calibri"/>
+              </a:defRPr>
+            </a:pPr>
+            <a:r>
+              <a:t>With love, Your Appodeal Team 💜</a:t>
+            </a:r>
+          </a:p>
+        </p:txBody>
+      </p:sp>
+    </p:spTree>
+  </p:cSld>
+  <p:clrMapOvr>
+    <a:masterClrMapping/>
+  </p:clrMapOvr>
+</p:sld>
+</file>
+
+<file path=ppt/slides/slide12.xml><?xml version="1.0" encoding="utf-8"?>
+<p:sld xmlns:a="http://schemas.openxmlformats.org/drawingml/2006/main" xmlns:p="http://schemas.openxmlformats.org/presentationml/2006/main" xmlns:r="http://schemas.openxmlformats.org/officeDocument/2006/relationships">
+  <p:cSld>
+    <p:bg>
+      <p:bgPr>
+        <a:solidFill>
+          <a:srgbClr val="08080C"/>
+        </a:solidFill>
+        <a:effectLst/>
+      </p:bgPr>
+    </p:bg>
+    <p:spTree>
+      <p:nvGrpSpPr>
+        <p:cNvPr id="1" name=""/>
+        <p:cNvGrpSpPr/>
+        <p:nvPr/>
+      </p:nvGrpSpPr>
+      <p:grpSpPr/>
+      <p:sp>
+        <p:nvSpPr>
+          <p:cNvPr id="2" name="Rectangle 1"/>
+          <p:cNvSpPr/>
+          <p:nvPr/>
+        </p:nvSpPr>
+        <p:spPr>
+          <a:xfrm>
+            <a:off x="0" y="365760"/>
+            <a:ext cx="12191695" cy="54864"/>
+          </a:xfrm>
+          <a:prstGeom prst="rect">
+            <a:avLst/>
+          </a:prstGeom>
+          <a:solidFill>
+            <a:srgbClr val="FFB72B"/>
+          </a:solidFill>
+          <a:ln>
+            <a:noFill/>
+          </a:ln>
+        </p:spPr>
+        <p:style>
+          <a:lnRef idx="1">
+            <a:schemeClr val="accent1"/>
+          </a:lnRef>
+          <a:fillRef idx="3">
+            <a:schemeClr val="accent1"/>
+          </a:fillRef>
+          <a:effectRef idx="2">
+            <a:schemeClr val="accent1"/>
+          </a:effectRef>
+          <a:fontRef idx="minor">
+            <a:schemeClr val="lt1"/>
+          </a:fontRef>
+        </p:style>
+        <p:txBody>
+          <a:bodyPr rtlCol="0" anchor="ctr"/>
+          <a:lstStyle/>
+          <a:p>
+            <a:pPr algn="ctr"/>
+          </a:p>
+        </p:txBody>
+      </p:sp>
+      <p:sp>
+        <p:nvSpPr>
+          <p:cNvPr id="3" name="TextBox 2"/>
+          <p:cNvSpPr txBox="1"/>
+          <p:nvPr/>
+        </p:nvSpPr>
+        <p:spPr>
+          <a:xfrm>
+            <a:off x="1097280" y="731520"/>
+            <a:ext cx="3657600" cy="365760"/>
+          </a:xfrm>
+          <a:prstGeom prst="rect">
+            <a:avLst/>
+          </a:prstGeom>
+          <a:noFill/>
+        </p:spPr>
+        <p:txBody>
+          <a:bodyPr wrap="none">
+            <a:spAutoFit/>
+          </a:bodyPr>
+          <a:lstStyle/>
+          <a:p>
+            <a:pPr algn="l">
+              <a:defRPr sz="1000" b="1">
+                <a:solidFill>
+                  <a:srgbClr val="FFB72B"/>
+                </a:solidFill>
+                <a:latin typeface="Calibri"/>
+              </a:defRPr>
+            </a:pPr>
+            <a:r>
+              <a:t>🎂  CELEBRATION</a:t>
+            </a:r>
+          </a:p>
+        </p:txBody>
+      </p:sp>
+      <p:sp>
+        <p:nvSpPr>
+          <p:cNvPr id="4" name="TextBox 3"/>
+          <p:cNvSpPr txBox="1"/>
+          <p:nvPr/>
+        </p:nvSpPr>
+        <p:spPr>
+          <a:xfrm>
+            <a:off x="1097280" y="1188720"/>
+            <a:ext cx="9966960" cy="731520"/>
+          </a:xfrm>
+          <a:prstGeom prst="rect">
+            <a:avLst/>
+          </a:prstGeom>
+          <a:noFill/>
+        </p:spPr>
+        <p:txBody>
+          <a:bodyPr wrap="square">
+            <a:spAutoFit/>
+          </a:bodyPr>
+          <a:lstStyle/>
+          <a:p>
+            <a:pPr algn="l">
+              <a:defRPr sz="3200" b="1" i="0">
+                <a:solidFill>
+                  <a:srgbClr val="FFB72B"/>
+                </a:solidFill>
+                <a:latin typeface="Calibri"/>
+              </a:defRPr>
+            </a:pPr>
+            <a:r>
+              <a:t>Happy Birthday!</a:t>
+            </a:r>
+          </a:p>
+        </p:txBody>
+      </p:sp>
+      <p:sp>
+        <p:nvSpPr>
+          <p:cNvPr id="5" name="TextBox 4"/>
+          <p:cNvSpPr txBox="1"/>
+          <p:nvPr/>
+        </p:nvSpPr>
+        <p:spPr>
+          <a:xfrm>
+            <a:off x="1097280" y="2103120"/>
+            <a:ext cx="9966960" cy="640080"/>
+          </a:xfrm>
+          <a:prstGeom prst="rect">
+            <a:avLst/>
+          </a:prstGeom>
+          <a:noFill/>
+        </p:spPr>
+        <p:txBody>
+          <a:bodyPr wrap="square">
+            <a:spAutoFit/>
+          </a:bodyPr>
+          <a:lstStyle/>
+          <a:p>
+            <a:pPr algn="l">
+              <a:defRPr sz="2800" b="1" i="0">
+                <a:solidFill>
+                  <a:srgbClr val="FFFFFF"/>
+                </a:solidFill>
+                <a:latin typeface="Calibri"/>
+              </a:defRPr>
+            </a:pPr>
+            <a:r>
+              <a:t>Giulia Galvani</a:t>
+            </a:r>
+          </a:p>
+        </p:txBody>
+      </p:sp>
+      <p:sp>
+        <p:nvSpPr>
+          <p:cNvPr id="6" name="TextBox 5"/>
+          <p:cNvSpPr txBox="1"/>
+          <p:nvPr/>
+        </p:nvSpPr>
+        <p:spPr>
+          <a:xfrm>
+            <a:off x="1097280" y="2743200"/>
+            <a:ext cx="9966960" cy="365760"/>
+          </a:xfrm>
+          <a:prstGeom prst="rect">
+            <a:avLst/>
+          </a:prstGeom>
+          <a:noFill/>
+        </p:spPr>
+        <p:txBody>
+          <a:bodyPr wrap="square">
+            <a:spAutoFit/>
+          </a:bodyPr>
+          <a:lstStyle/>
+          <a:p>
+            <a:pPr algn="l">
+              <a:defRPr sz="1400" b="0" i="0">
+                <a:solidFill>
+                  <a:srgbClr val="8F95A3"/>
+                </a:solidFill>
+                <a:latin typeface="Calibri"/>
+              </a:defRPr>
+            </a:pPr>
+            <a:r>
+              <a:t>March 13</a:t>
+            </a:r>
+          </a:p>
+        </p:txBody>
+      </p:sp>
+      <p:sp>
+        <p:nvSpPr>
+          <p:cNvPr id="7" name="TextBox 6"/>
+          <p:cNvSpPr txBox="1"/>
+          <p:nvPr/>
+        </p:nvSpPr>
+        <p:spPr>
+          <a:xfrm>
+            <a:off x="1097280" y="3291840"/>
+            <a:ext cx="9966960" cy="914400"/>
+          </a:xfrm>
+          <a:prstGeom prst="rect">
+            <a:avLst/>
+          </a:prstGeom>
+          <a:noFill/>
+        </p:spPr>
+        <p:txBody>
+          <a:bodyPr wrap="square">
+            <a:spAutoFit/>
+          </a:bodyPr>
+          <a:lstStyle/>
+          <a:p>
+            <a:pPr algn="l">
+              <a:defRPr sz="1600" b="0" i="0">
+                <a:solidFill>
+                  <a:srgbClr val="E2E2EA"/>
+                </a:solidFill>
+                <a:latin typeface="Calibri"/>
+              </a:defRPr>
+            </a:pPr>
+            <a:r>
+              <a:t>Wishing you an amazing day filled with joy and celebration!</a:t>
+            </a:r>
+          </a:p>
+        </p:txBody>
+      </p:sp>
+      <p:sp>
+        <p:nvSpPr>
+          <p:cNvPr id="8" name="TextBox 7"/>
+          <p:cNvSpPr txBox="1"/>
+          <p:nvPr/>
+        </p:nvSpPr>
+        <p:spPr>
+          <a:xfrm>
+            <a:off x="1097280" y="4572000"/>
+            <a:ext cx="9966960" cy="457200"/>
+          </a:xfrm>
+          <a:prstGeom prst="rect">
+            <a:avLst/>
+          </a:prstGeom>
+          <a:noFill/>
+        </p:spPr>
+        <p:txBody>
+          <a:bodyPr wrap="square">
+            <a:spAutoFit/>
+          </a:bodyPr>
+          <a:lstStyle/>
+          <a:p>
+            <a:pPr algn="l">
+              <a:defRPr sz="1400" b="0" i="1">
+                <a:solidFill>
+                  <a:srgbClr val="FFB72B"/>
+                </a:solidFill>
+                <a:latin typeface="Calibri"/>
+              </a:defRPr>
+            </a:pPr>
+            <a:r>
+              <a:t>With love, Your Appodeal Team 💜</a:t>
+            </a:r>
+          </a:p>
+        </p:txBody>
+      </p:sp>
+    </p:spTree>
+  </p:cSld>
+  <p:clrMapOvr>
+    <a:masterClrMapping/>
+  </p:clrMapOvr>
+</p:sld>
+</file>
+
+<file path=ppt/slides/slide13.xml><?xml version="1.0" encoding="utf-8"?>
+<p:sld xmlns:a="http://schemas.openxmlformats.org/drawingml/2006/main" xmlns:p="http://schemas.openxmlformats.org/presentationml/2006/main" xmlns:r="http://schemas.openxmlformats.org/officeDocument/2006/relationships">
+  <p:cSld>
+    <p:bg>
+      <p:bgPr>
+        <a:solidFill>
+          <a:srgbClr val="08080C"/>
+        </a:solidFill>
+        <a:effectLst/>
+      </p:bgPr>
+    </p:bg>
+    <p:spTree>
+      <p:nvGrpSpPr>
+        <p:cNvPr id="1" name=""/>
+        <p:cNvGrpSpPr/>
+        <p:nvPr/>
+      </p:nvGrpSpPr>
+      <p:grpSpPr/>
+      <p:sp>
+        <p:nvSpPr>
+          <p:cNvPr id="2" name="Rectangle 1"/>
+          <p:cNvSpPr/>
+          <p:nvPr/>
+        </p:nvSpPr>
+        <p:spPr>
+          <a:xfrm>
+            <a:off x="0" y="365760"/>
+            <a:ext cx="12191695" cy="54864"/>
+          </a:xfrm>
+          <a:prstGeom prst="rect">
+            <a:avLst/>
+          </a:prstGeom>
+          <a:solidFill>
+            <a:srgbClr val="FFB72B"/>
+          </a:solidFill>
+          <a:ln>
+            <a:noFill/>
+          </a:ln>
+        </p:spPr>
+        <p:style>
+          <a:lnRef idx="1">
+            <a:schemeClr val="accent1"/>
+          </a:lnRef>
+          <a:fillRef idx="3">
+            <a:schemeClr val="accent1"/>
+          </a:fillRef>
+          <a:effectRef idx="2">
+            <a:schemeClr val="accent1"/>
+          </a:effectRef>
+          <a:fontRef idx="minor">
+            <a:schemeClr val="lt1"/>
+          </a:fontRef>
+        </p:style>
+        <p:txBody>
+          <a:bodyPr rtlCol="0" anchor="ctr"/>
+          <a:lstStyle/>
+          <a:p>
+            <a:pPr algn="ctr"/>
+          </a:p>
+        </p:txBody>
+      </p:sp>
+      <p:sp>
+        <p:nvSpPr>
+          <p:cNvPr id="3" name="TextBox 2"/>
+          <p:cNvSpPr txBox="1"/>
+          <p:nvPr/>
+        </p:nvSpPr>
+        <p:spPr>
+          <a:xfrm>
+            <a:off x="1097280" y="731520"/>
+            <a:ext cx="3657600" cy="365760"/>
+          </a:xfrm>
+          <a:prstGeom prst="rect">
+            <a:avLst/>
+          </a:prstGeom>
+          <a:noFill/>
+        </p:spPr>
+        <p:txBody>
+          <a:bodyPr wrap="none">
+            <a:spAutoFit/>
+          </a:bodyPr>
+          <a:lstStyle/>
+          <a:p>
+            <a:pPr algn="l">
+              <a:defRPr sz="1000" b="1">
+                <a:solidFill>
+                  <a:srgbClr val="FFB72B"/>
+                </a:solidFill>
+                <a:latin typeface="Calibri"/>
+              </a:defRPr>
+            </a:pPr>
+            <a:r>
+              <a:t>🎂  CELEBRATION</a:t>
+            </a:r>
+          </a:p>
+        </p:txBody>
+      </p:sp>
+      <p:sp>
+        <p:nvSpPr>
+          <p:cNvPr id="4" name="TextBox 3"/>
+          <p:cNvSpPr txBox="1"/>
+          <p:nvPr/>
+        </p:nvSpPr>
+        <p:spPr>
+          <a:xfrm>
+            <a:off x="1097280" y="1188720"/>
+            <a:ext cx="9966960" cy="731520"/>
+          </a:xfrm>
+          <a:prstGeom prst="rect">
+            <a:avLst/>
+          </a:prstGeom>
+          <a:noFill/>
+        </p:spPr>
+        <p:txBody>
+          <a:bodyPr wrap="square">
+            <a:spAutoFit/>
+          </a:bodyPr>
+          <a:lstStyle/>
+          <a:p>
+            <a:pPr algn="l">
+              <a:defRPr sz="3200" b="1" i="0">
+                <a:solidFill>
+                  <a:srgbClr val="FFB72B"/>
+                </a:solidFill>
+                <a:latin typeface="Calibri"/>
+              </a:defRPr>
+            </a:pPr>
+            <a:r>
+              <a:t>Happy Birthday!</a:t>
+            </a:r>
+          </a:p>
+        </p:txBody>
+      </p:sp>
+      <p:sp>
+        <p:nvSpPr>
+          <p:cNvPr id="5" name="TextBox 4"/>
+          <p:cNvSpPr txBox="1"/>
+          <p:nvPr/>
+        </p:nvSpPr>
+        <p:spPr>
+          <a:xfrm>
+            <a:off x="1097280" y="2103120"/>
+            <a:ext cx="9966960" cy="640080"/>
+          </a:xfrm>
+          <a:prstGeom prst="rect">
+            <a:avLst/>
+          </a:prstGeom>
+          <a:noFill/>
+        </p:spPr>
+        <p:txBody>
+          <a:bodyPr wrap="square">
+            <a:spAutoFit/>
+          </a:bodyPr>
+          <a:lstStyle/>
+          <a:p>
+            <a:pPr algn="l">
+              <a:defRPr sz="2800" b="1" i="0">
+                <a:solidFill>
+                  <a:srgbClr val="FFFFFF"/>
+                </a:solidFill>
+                <a:latin typeface="Calibri"/>
+              </a:defRPr>
+            </a:pPr>
+            <a:r>
+              <a:t>Katarzyna Raniszewska</a:t>
+            </a:r>
+          </a:p>
+        </p:txBody>
+      </p:sp>
+      <p:sp>
+        <p:nvSpPr>
+          <p:cNvPr id="6" name="TextBox 5"/>
+          <p:cNvSpPr txBox="1"/>
+          <p:nvPr/>
+        </p:nvSpPr>
+        <p:spPr>
+          <a:xfrm>
+            <a:off x="1097280" y="2743200"/>
+            <a:ext cx="9966960" cy="365760"/>
+          </a:xfrm>
+          <a:prstGeom prst="rect">
+            <a:avLst/>
+          </a:prstGeom>
+          <a:noFill/>
+        </p:spPr>
+        <p:txBody>
+          <a:bodyPr wrap="square">
+            <a:spAutoFit/>
+          </a:bodyPr>
+          <a:lstStyle/>
+          <a:p>
+            <a:pPr algn="l">
+              <a:defRPr sz="1400" b="0" i="0">
+                <a:solidFill>
+                  <a:srgbClr val="8F95A3"/>
+                </a:solidFill>
+                <a:latin typeface="Calibri"/>
+              </a:defRPr>
+            </a:pPr>
+            <a:r>
+              <a:t>March 13</a:t>
+            </a:r>
+          </a:p>
+        </p:txBody>
+      </p:sp>
+      <p:sp>
+        <p:nvSpPr>
+          <p:cNvPr id="7" name="TextBox 6"/>
+          <p:cNvSpPr txBox="1"/>
+          <p:nvPr/>
+        </p:nvSpPr>
+        <p:spPr>
+          <a:xfrm>
+            <a:off x="1097280" y="3291840"/>
+            <a:ext cx="9966960" cy="914400"/>
+          </a:xfrm>
+          <a:prstGeom prst="rect">
+            <a:avLst/>
+          </a:prstGeom>
+          <a:noFill/>
+        </p:spPr>
+        <p:txBody>
+          <a:bodyPr wrap="square">
+            <a:spAutoFit/>
+          </a:bodyPr>
+          <a:lstStyle/>
+          <a:p>
+            <a:pPr algn="l">
+              <a:defRPr sz="1600" b="0" i="0">
+                <a:solidFill>
+                  <a:srgbClr val="E2E2EA"/>
+                </a:solidFill>
+                <a:latin typeface="Calibri"/>
+              </a:defRPr>
+            </a:pPr>
+            <a:r>
+              <a:t>Wishing you an amazing day filled with joy and celebration!</a:t>
+            </a:r>
+          </a:p>
+        </p:txBody>
+      </p:sp>
+      <p:sp>
+        <p:nvSpPr>
+          <p:cNvPr id="8" name="TextBox 7"/>
+          <p:cNvSpPr txBox="1"/>
+          <p:nvPr/>
+        </p:nvSpPr>
+        <p:spPr>
+          <a:xfrm>
+            <a:off x="1097280" y="4572000"/>
+            <a:ext cx="9966960" cy="457200"/>
+          </a:xfrm>
+          <a:prstGeom prst="rect">
+            <a:avLst/>
+          </a:prstGeom>
+          <a:noFill/>
+        </p:spPr>
+        <p:txBody>
+          <a:bodyPr wrap="square">
+            <a:spAutoFit/>
+          </a:bodyPr>
+          <a:lstStyle/>
+          <a:p>
+            <a:pPr algn="l">
+              <a:defRPr sz="1400" b="0" i="1">
+                <a:solidFill>
+                  <a:srgbClr val="FFB72B"/>
+                </a:solidFill>
+                <a:latin typeface="Calibri"/>
+              </a:defRPr>
+            </a:pPr>
+            <a:r>
+              <a:t>With love, Your Appodeal Team 💜</a:t>
+            </a:r>
+          </a:p>
+        </p:txBody>
+      </p:sp>
+    </p:spTree>
+  </p:cSld>
+  <p:clrMapOvr>
+    <a:masterClrMapping/>
+  </p:clrMapOvr>
+</p:sld>
+</file>
+
+<file path=ppt/slides/slide14.xml><?xml version="1.0" encoding="utf-8"?>
+<p:sld xmlns:a="http://schemas.openxmlformats.org/drawingml/2006/main" xmlns:p="http://schemas.openxmlformats.org/presentationml/2006/main" xmlns:r="http://schemas.openxmlformats.org/officeDocument/2006/relationships">
+  <p:cSld>
+    <p:bg>
+      <p:bgPr>
+        <a:solidFill>
+          <a:srgbClr val="08080C"/>
+        </a:solidFill>
+        <a:effectLst/>
+      </p:bgPr>
+    </p:bg>
+    <p:spTree>
+      <p:nvGrpSpPr>
+        <p:cNvPr id="1" name=""/>
+        <p:cNvGrpSpPr/>
+        <p:nvPr/>
+      </p:nvGrpSpPr>
+      <p:grpSpPr/>
+      <p:sp>
+        <p:nvSpPr>
+          <p:cNvPr id="2" name="Rectangle 1"/>
+          <p:cNvSpPr/>
+          <p:nvPr/>
+        </p:nvSpPr>
+        <p:spPr>
+          <a:xfrm>
+            <a:off x="0" y="365760"/>
+            <a:ext cx="12191695" cy="54864"/>
+          </a:xfrm>
+          <a:prstGeom prst="rect">
+            <a:avLst/>
+          </a:prstGeom>
+          <a:solidFill>
+            <a:srgbClr val="FFB72B"/>
+          </a:solidFill>
+          <a:ln>
+            <a:noFill/>
+          </a:ln>
+        </p:spPr>
+        <p:style>
+          <a:lnRef idx="1">
+            <a:schemeClr val="accent1"/>
+          </a:lnRef>
+          <a:fillRef idx="3">
+            <a:schemeClr val="accent1"/>
+          </a:fillRef>
+          <a:effectRef idx="2">
+            <a:schemeClr val="accent1"/>
+          </a:effectRef>
+          <a:fontRef idx="minor">
+            <a:schemeClr val="lt1"/>
+          </a:fontRef>
+        </p:style>
+        <p:txBody>
+          <a:bodyPr rtlCol="0" anchor="ctr"/>
+          <a:lstStyle/>
+          <a:p>
+            <a:pPr algn="ctr"/>
+          </a:p>
+        </p:txBody>
+      </p:sp>
+      <p:sp>
+        <p:nvSpPr>
+          <p:cNvPr id="3" name="TextBox 2"/>
+          <p:cNvSpPr txBox="1"/>
+          <p:nvPr/>
+        </p:nvSpPr>
+        <p:spPr>
+          <a:xfrm>
+            <a:off x="1097280" y="731520"/>
+            <a:ext cx="3657600" cy="365760"/>
+          </a:xfrm>
+          <a:prstGeom prst="rect">
+            <a:avLst/>
+          </a:prstGeom>
+          <a:noFill/>
+        </p:spPr>
+        <p:txBody>
+          <a:bodyPr wrap="none">
+            <a:spAutoFit/>
+          </a:bodyPr>
+          <a:lstStyle/>
+          <a:p>
+            <a:pPr algn="l">
+              <a:defRPr sz="1000" b="1">
+                <a:solidFill>
+                  <a:srgbClr val="FFB72B"/>
+                </a:solidFill>
+                <a:latin typeface="Calibri"/>
+              </a:defRPr>
+            </a:pPr>
+            <a:r>
+              <a:t>🎂  CELEBRATION</a:t>
+            </a:r>
+          </a:p>
+        </p:txBody>
+      </p:sp>
+      <p:sp>
+        <p:nvSpPr>
+          <p:cNvPr id="4" name="TextBox 3"/>
+          <p:cNvSpPr txBox="1"/>
+          <p:nvPr/>
+        </p:nvSpPr>
+        <p:spPr>
+          <a:xfrm>
+            <a:off x="1097280" y="1188720"/>
+            <a:ext cx="9966960" cy="731520"/>
+          </a:xfrm>
+          <a:prstGeom prst="rect">
+            <a:avLst/>
+          </a:prstGeom>
+          <a:noFill/>
+        </p:spPr>
+        <p:txBody>
+          <a:bodyPr wrap="square">
+            <a:spAutoFit/>
+          </a:bodyPr>
+          <a:lstStyle/>
+          <a:p>
+            <a:pPr algn="l">
+              <a:defRPr sz="3200" b="1" i="0">
+                <a:solidFill>
+                  <a:srgbClr val="FFB72B"/>
+                </a:solidFill>
+                <a:latin typeface="Calibri"/>
+              </a:defRPr>
+            </a:pPr>
+            <a:r>
+              <a:t>Happy Birthday!</a:t>
+            </a:r>
+          </a:p>
+        </p:txBody>
+      </p:sp>
+      <p:sp>
+        <p:nvSpPr>
+          <p:cNvPr id="5" name="TextBox 4"/>
+          <p:cNvSpPr txBox="1"/>
+          <p:nvPr/>
+        </p:nvSpPr>
+        <p:spPr>
+          <a:xfrm>
+            <a:off x="1097280" y="2103120"/>
+            <a:ext cx="9966960" cy="640080"/>
+          </a:xfrm>
+          <a:prstGeom prst="rect">
+            <a:avLst/>
+          </a:prstGeom>
+          <a:noFill/>
+        </p:spPr>
+        <p:txBody>
+          <a:bodyPr wrap="square">
+            <a:spAutoFit/>
+          </a:bodyPr>
+          <a:lstStyle/>
+          <a:p>
+            <a:pPr algn="l">
+              <a:defRPr sz="2800" b="1" i="0">
+                <a:solidFill>
+                  <a:srgbClr val="FFFFFF"/>
+                </a:solidFill>
+                <a:latin typeface="Calibri"/>
+              </a:defRPr>
+            </a:pPr>
+            <a:r>
+              <a:t>Radu Stoia</a:t>
+            </a:r>
+          </a:p>
+        </p:txBody>
+      </p:sp>
+      <p:sp>
+        <p:nvSpPr>
+          <p:cNvPr id="6" name="TextBox 5"/>
+          <p:cNvSpPr txBox="1"/>
+          <p:nvPr/>
+        </p:nvSpPr>
+        <p:spPr>
+          <a:xfrm>
+            <a:off x="1097280" y="2743200"/>
+            <a:ext cx="9966960" cy="365760"/>
+          </a:xfrm>
+          <a:prstGeom prst="rect">
+            <a:avLst/>
+          </a:prstGeom>
+          <a:noFill/>
+        </p:spPr>
+        <p:txBody>
+          <a:bodyPr wrap="square">
+            <a:spAutoFit/>
+          </a:bodyPr>
+          <a:lstStyle/>
+          <a:p>
+            <a:pPr algn="l">
+              <a:defRPr sz="1400" b="0" i="0">
+                <a:solidFill>
+                  <a:srgbClr val="8F95A3"/>
+                </a:solidFill>
+                <a:latin typeface="Calibri"/>
+              </a:defRPr>
+            </a:pPr>
+            <a:r>
+              <a:t>March 13</a:t>
+            </a:r>
+          </a:p>
+        </p:txBody>
+      </p:sp>
+      <p:sp>
+        <p:nvSpPr>
+          <p:cNvPr id="7" name="TextBox 6"/>
+          <p:cNvSpPr txBox="1"/>
+          <p:nvPr/>
+        </p:nvSpPr>
+        <p:spPr>
+          <a:xfrm>
+            <a:off x="1097280" y="3291840"/>
+            <a:ext cx="9966960" cy="914400"/>
+          </a:xfrm>
+          <a:prstGeom prst="rect">
+            <a:avLst/>
+          </a:prstGeom>
+          <a:noFill/>
+        </p:spPr>
+        <p:txBody>
+          <a:bodyPr wrap="square">
+            <a:spAutoFit/>
+          </a:bodyPr>
+          <a:lstStyle/>
+          <a:p>
+            <a:pPr algn="l">
+              <a:defRPr sz="1600" b="0" i="0">
+                <a:solidFill>
+                  <a:srgbClr val="E2E2EA"/>
+                </a:solidFill>
+                <a:latin typeface="Calibri"/>
+              </a:defRPr>
+            </a:pPr>
+            <a:r>
+              <a:t>Wishing you an amazing day filled with joy and celebration!</a:t>
+            </a:r>
+          </a:p>
+        </p:txBody>
+      </p:sp>
+      <p:sp>
+        <p:nvSpPr>
+          <p:cNvPr id="8" name="TextBox 7"/>
+          <p:cNvSpPr txBox="1"/>
+          <p:nvPr/>
+        </p:nvSpPr>
+        <p:spPr>
+          <a:xfrm>
+            <a:off x="1097280" y="4572000"/>
+            <a:ext cx="9966960" cy="457200"/>
+          </a:xfrm>
+          <a:prstGeom prst="rect">
+            <a:avLst/>
+          </a:prstGeom>
+          <a:noFill/>
+        </p:spPr>
+        <p:txBody>
+          <a:bodyPr wrap="square">
+            <a:spAutoFit/>
+          </a:bodyPr>
+          <a:lstStyle/>
+          <a:p>
+            <a:pPr algn="l">
+              <a:defRPr sz="1400" b="0" i="1">
+                <a:solidFill>
+                  <a:srgbClr val="FFB72B"/>
+                </a:solidFill>
+                <a:latin typeface="Calibri"/>
+              </a:defRPr>
+            </a:pPr>
+            <a:r>
+              <a:t>With love, Your Appodeal Team 💜</a:t>
+            </a:r>
+          </a:p>
+        </p:txBody>
+      </p:sp>
+    </p:spTree>
+  </p:cSld>
+  <p:clrMapOvr>
+    <a:masterClrMapping/>
+  </p:clrMapOvr>
+</p:sld>
+</file>
+
+<file path=ppt/slides/slide15.xml><?xml version="1.0" encoding="utf-8"?>
+<p:sld xmlns:a="http://schemas.openxmlformats.org/drawingml/2006/main" xmlns:p="http://schemas.openxmlformats.org/presentationml/2006/main" xmlns:r="http://schemas.openxmlformats.org/officeDocument/2006/relationships">
+  <p:cSld>
+    <p:bg>
+      <p:bgPr>
+        <a:solidFill>
+          <a:srgbClr val="08080C"/>
+        </a:solidFill>
+        <a:effectLst/>
+      </p:bgPr>
+    </p:bg>
+    <p:spTree>
+      <p:nvGrpSpPr>
+        <p:cNvPr id="1" name=""/>
+        <p:cNvGrpSpPr/>
+        <p:nvPr/>
+      </p:nvGrpSpPr>
+      <p:grpSpPr/>
+      <p:sp>
+        <p:nvSpPr>
+          <p:cNvPr id="2" name="Rectangle 1"/>
+          <p:cNvSpPr/>
+          <p:nvPr/>
+        </p:nvSpPr>
+        <p:spPr>
+          <a:xfrm>
+            <a:off x="0" y="365760"/>
+            <a:ext cx="12191695" cy="54864"/>
+          </a:xfrm>
+          <a:prstGeom prst="rect">
+            <a:avLst/>
+          </a:prstGeom>
+          <a:solidFill>
+            <a:srgbClr val="FFB72B"/>
+          </a:solidFill>
+          <a:ln>
+            <a:noFill/>
+          </a:ln>
+        </p:spPr>
+        <p:style>
+          <a:lnRef idx="1">
+            <a:schemeClr val="accent1"/>
+          </a:lnRef>
+          <a:fillRef idx="3">
+            <a:schemeClr val="accent1"/>
+          </a:fillRef>
+          <a:effectRef idx="2">
+            <a:schemeClr val="accent1"/>
+          </a:effectRef>
+          <a:fontRef idx="minor">
+            <a:schemeClr val="lt1"/>
+          </a:fontRef>
+        </p:style>
+        <p:txBody>
+          <a:bodyPr rtlCol="0" anchor="ctr"/>
+          <a:lstStyle/>
+          <a:p>
+            <a:pPr algn="ctr"/>
+          </a:p>
+        </p:txBody>
+      </p:sp>
+      <p:sp>
+        <p:nvSpPr>
+          <p:cNvPr id="3" name="TextBox 2"/>
+          <p:cNvSpPr txBox="1"/>
+          <p:nvPr/>
+        </p:nvSpPr>
+        <p:spPr>
+          <a:xfrm>
+            <a:off x="1097280" y="731520"/>
+            <a:ext cx="3657600" cy="365760"/>
+          </a:xfrm>
+          <a:prstGeom prst="rect">
+            <a:avLst/>
+          </a:prstGeom>
+          <a:noFill/>
+        </p:spPr>
+        <p:txBody>
+          <a:bodyPr wrap="none">
+            <a:spAutoFit/>
+          </a:bodyPr>
+          <a:lstStyle/>
+          <a:p>
+            <a:pPr algn="l">
+              <a:defRPr sz="1000" b="1">
+                <a:solidFill>
+                  <a:srgbClr val="FFB72B"/>
+                </a:solidFill>
+                <a:latin typeface="Calibri"/>
+              </a:defRPr>
+            </a:pPr>
+            <a:r>
+              <a:t>🎂  CELEBRATION</a:t>
+            </a:r>
+          </a:p>
+        </p:txBody>
+      </p:sp>
+      <p:sp>
+        <p:nvSpPr>
+          <p:cNvPr id="4" name="TextBox 3"/>
+          <p:cNvSpPr txBox="1"/>
+          <p:nvPr/>
+        </p:nvSpPr>
+        <p:spPr>
+          <a:xfrm>
+            <a:off x="1097280" y="1188720"/>
+            <a:ext cx="9966960" cy="731520"/>
+          </a:xfrm>
+          <a:prstGeom prst="rect">
+            <a:avLst/>
+          </a:prstGeom>
+          <a:noFill/>
+        </p:spPr>
+        <p:txBody>
+          <a:bodyPr wrap="square">
+            <a:spAutoFit/>
+          </a:bodyPr>
+          <a:lstStyle/>
+          <a:p>
+            <a:pPr algn="l">
+              <a:defRPr sz="3200" b="1" i="0">
+                <a:solidFill>
+                  <a:srgbClr val="FFB72B"/>
+                </a:solidFill>
+                <a:latin typeface="Calibri"/>
+              </a:defRPr>
+            </a:pPr>
+            <a:r>
+              <a:t>Happy Birthday!</a:t>
+            </a:r>
+          </a:p>
+        </p:txBody>
+      </p:sp>
+      <p:sp>
+        <p:nvSpPr>
+          <p:cNvPr id="5" name="TextBox 4"/>
+          <p:cNvSpPr txBox="1"/>
+          <p:nvPr/>
+        </p:nvSpPr>
+        <p:spPr>
+          <a:xfrm>
+            <a:off x="1097280" y="2103120"/>
+            <a:ext cx="9966960" cy="640080"/>
+          </a:xfrm>
+          <a:prstGeom prst="rect">
+            <a:avLst/>
+          </a:prstGeom>
+          <a:noFill/>
+        </p:spPr>
+        <p:txBody>
+          <a:bodyPr wrap="square">
+            <a:spAutoFit/>
+          </a:bodyPr>
+          <a:lstStyle/>
+          <a:p>
+            <a:pPr algn="l">
+              <a:defRPr sz="2800" b="1" i="0">
+                <a:solidFill>
+                  <a:srgbClr val="FFFFFF"/>
+                </a:solidFill>
+                <a:latin typeface="Calibri"/>
+              </a:defRPr>
+            </a:pPr>
+            <a:r>
+              <a:t>Eduard Malkhasyan</a:t>
+            </a:r>
+          </a:p>
+        </p:txBody>
+      </p:sp>
+      <p:sp>
+        <p:nvSpPr>
+          <p:cNvPr id="6" name="TextBox 5"/>
+          <p:cNvSpPr txBox="1"/>
+          <p:nvPr/>
+        </p:nvSpPr>
+        <p:spPr>
+          <a:xfrm>
+            <a:off x="1097280" y="2743200"/>
+            <a:ext cx="9966960" cy="365760"/>
+          </a:xfrm>
+          <a:prstGeom prst="rect">
+            <a:avLst/>
+          </a:prstGeom>
+          <a:noFill/>
+        </p:spPr>
+        <p:txBody>
+          <a:bodyPr wrap="square">
+            <a:spAutoFit/>
+          </a:bodyPr>
+          <a:lstStyle/>
+          <a:p>
+            <a:pPr algn="l">
+              <a:defRPr sz="1400" b="0" i="0">
+                <a:solidFill>
+                  <a:srgbClr val="8F95A3"/>
+                </a:solidFill>
+                <a:latin typeface="Calibri"/>
+              </a:defRPr>
+            </a:pPr>
+            <a:r>
+              <a:t>March 13</a:t>
+            </a:r>
+          </a:p>
+        </p:txBody>
+      </p:sp>
+      <p:sp>
+        <p:nvSpPr>
+          <p:cNvPr id="7" name="TextBox 6"/>
+          <p:cNvSpPr txBox="1"/>
+          <p:nvPr/>
+        </p:nvSpPr>
+        <p:spPr>
+          <a:xfrm>
+            <a:off x="1097280" y="3291840"/>
+            <a:ext cx="9966960" cy="914400"/>
+          </a:xfrm>
+          <a:prstGeom prst="rect">
+            <a:avLst/>
+          </a:prstGeom>
+          <a:noFill/>
+        </p:spPr>
+        <p:txBody>
+          <a:bodyPr wrap="square">
+            <a:spAutoFit/>
+          </a:bodyPr>
+          <a:lstStyle/>
+          <a:p>
+            <a:pPr algn="l">
+              <a:defRPr sz="1600" b="0" i="0">
+                <a:solidFill>
+                  <a:srgbClr val="E2E2EA"/>
+                </a:solidFill>
+                <a:latin typeface="Calibri"/>
+              </a:defRPr>
+            </a:pPr>
+            <a:r>
+              <a:t>Wishing you an amazing day filled with joy and celebration!</a:t>
+            </a:r>
+          </a:p>
+        </p:txBody>
+      </p:sp>
+      <p:sp>
+        <p:nvSpPr>
+          <p:cNvPr id="8" name="TextBox 7"/>
+          <p:cNvSpPr txBox="1"/>
+          <p:nvPr/>
+        </p:nvSpPr>
+        <p:spPr>
+          <a:xfrm>
+            <a:off x="1097280" y="4572000"/>
+            <a:ext cx="9966960" cy="457200"/>
+          </a:xfrm>
+          <a:prstGeom prst="rect">
+            <a:avLst/>
+          </a:prstGeom>
+          <a:noFill/>
+        </p:spPr>
+        <p:txBody>
+          <a:bodyPr wrap="square">
+            <a:spAutoFit/>
+          </a:bodyPr>
+          <a:lstStyle/>
+          <a:p>
+            <a:pPr algn="l">
+              <a:defRPr sz="1400" b="0" i="1">
+                <a:solidFill>
+                  <a:srgbClr val="FFB72B"/>
+                </a:solidFill>
+                <a:latin typeface="Calibri"/>
+              </a:defRPr>
+            </a:pPr>
+            <a:r>
+              <a:t>With love, Your Appodeal Team 💜</a:t>
+            </a:r>
+          </a:p>
+        </p:txBody>
+      </p:sp>
+    </p:spTree>
+  </p:cSld>
+  <p:clrMapOvr>
+    <a:masterClrMapping/>
+  </p:clrMapOvr>
+</p:sld>
+</file>
+
+<file path=ppt/slides/slide16.xml><?xml version="1.0" encoding="utf-8"?>
+<p:sld xmlns:a="http://schemas.openxmlformats.org/drawingml/2006/main" xmlns:p="http://schemas.openxmlformats.org/presentationml/2006/main" xmlns:r="http://schemas.openxmlformats.org/officeDocument/2006/relationships">
+  <p:cSld>
+    <p:bg>
+      <p:bgPr>
+        <a:solidFill>
+          <a:srgbClr val="08080C"/>
+        </a:solidFill>
+        <a:effectLst/>
+      </p:bgPr>
+    </p:bg>
+    <p:spTree>
+      <p:nvGrpSpPr>
+        <p:cNvPr id="1" name=""/>
+        <p:cNvGrpSpPr/>
+        <p:nvPr/>
+      </p:nvGrpSpPr>
+      <p:grpSpPr/>
+      <p:sp>
+        <p:nvSpPr>
+          <p:cNvPr id="2" name="Rectangle 1"/>
+          <p:cNvSpPr/>
+          <p:nvPr/>
+        </p:nvSpPr>
+        <p:spPr>
+          <a:xfrm>
+            <a:off x="0" y="365760"/>
+            <a:ext cx="12191695" cy="54864"/>
+          </a:xfrm>
+          <a:prstGeom prst="rect">
+            <a:avLst/>
+          </a:prstGeom>
+          <a:solidFill>
+            <a:srgbClr val="FFB72B"/>
+          </a:solidFill>
+          <a:ln>
+            <a:noFill/>
+          </a:ln>
+        </p:spPr>
+        <p:style>
+          <a:lnRef idx="1">
+            <a:schemeClr val="accent1"/>
+          </a:lnRef>
+          <a:fillRef idx="3">
+            <a:schemeClr val="accent1"/>
+          </a:fillRef>
+          <a:effectRef idx="2">
+            <a:schemeClr val="accent1"/>
+          </a:effectRef>
+          <a:fontRef idx="minor">
+            <a:schemeClr val="lt1"/>
+          </a:fontRef>
+        </p:style>
+        <p:txBody>
+          <a:bodyPr rtlCol="0" anchor="ctr"/>
+          <a:lstStyle/>
+          <a:p>
+            <a:pPr algn="ctr"/>
+          </a:p>
+        </p:txBody>
+      </p:sp>
+      <p:sp>
+        <p:nvSpPr>
+          <p:cNvPr id="3" name="TextBox 2"/>
+          <p:cNvSpPr txBox="1"/>
+          <p:nvPr/>
+        </p:nvSpPr>
+        <p:spPr>
+          <a:xfrm>
+            <a:off x="1097280" y="731520"/>
+            <a:ext cx="3657600" cy="365760"/>
+          </a:xfrm>
+          <a:prstGeom prst="rect">
+            <a:avLst/>
+          </a:prstGeom>
+          <a:noFill/>
+        </p:spPr>
+        <p:txBody>
+          <a:bodyPr wrap="none">
+            <a:spAutoFit/>
+          </a:bodyPr>
+          <a:lstStyle/>
+          <a:p>
+            <a:pPr algn="l">
+              <a:defRPr sz="1000" b="1">
+                <a:solidFill>
+                  <a:srgbClr val="FFB72B"/>
+                </a:solidFill>
+                <a:latin typeface="Calibri"/>
+              </a:defRPr>
+            </a:pPr>
+            <a:r>
+              <a:t>🎂  CELEBRATION</a:t>
+            </a:r>
+          </a:p>
+        </p:txBody>
+      </p:sp>
+      <p:sp>
+        <p:nvSpPr>
+          <p:cNvPr id="4" name="TextBox 3"/>
+          <p:cNvSpPr txBox="1"/>
+          <p:nvPr/>
+        </p:nvSpPr>
+        <p:spPr>
+          <a:xfrm>
+            <a:off x="1097280" y="1188720"/>
+            <a:ext cx="9966960" cy="731520"/>
+          </a:xfrm>
+          <a:prstGeom prst="rect">
+            <a:avLst/>
+          </a:prstGeom>
+          <a:noFill/>
+        </p:spPr>
+        <p:txBody>
+          <a:bodyPr wrap="square">
+            <a:spAutoFit/>
+          </a:bodyPr>
+          <a:lstStyle/>
+          <a:p>
+            <a:pPr algn="l">
+              <a:defRPr sz="3200" b="1" i="0">
+                <a:solidFill>
+                  <a:srgbClr val="FFB72B"/>
+                </a:solidFill>
+                <a:latin typeface="Calibri"/>
+              </a:defRPr>
+            </a:pPr>
+            <a:r>
+              <a:t>Happy Birthday!</a:t>
+            </a:r>
+          </a:p>
+        </p:txBody>
+      </p:sp>
+      <p:sp>
+        <p:nvSpPr>
+          <p:cNvPr id="5" name="TextBox 4"/>
+          <p:cNvSpPr txBox="1"/>
+          <p:nvPr/>
+        </p:nvSpPr>
+        <p:spPr>
+          <a:xfrm>
+            <a:off x="1097280" y="2103120"/>
+            <a:ext cx="9966960" cy="640080"/>
+          </a:xfrm>
+          <a:prstGeom prst="rect">
+            <a:avLst/>
+          </a:prstGeom>
+          <a:noFill/>
+        </p:spPr>
+        <p:txBody>
+          <a:bodyPr wrap="square">
+            <a:spAutoFit/>
+          </a:bodyPr>
+          <a:lstStyle/>
+          <a:p>
+            <a:pPr algn="l">
+              <a:defRPr sz="2800" b="1" i="0">
+                <a:solidFill>
+                  <a:srgbClr val="FFFFFF"/>
+                </a:solidFill>
+                <a:latin typeface="Calibri"/>
+              </a:defRPr>
+            </a:pPr>
+            <a:r>
+              <a:t>Daryna Rudavka</a:t>
+            </a:r>
+          </a:p>
+        </p:txBody>
+      </p:sp>
+      <p:sp>
+        <p:nvSpPr>
+          <p:cNvPr id="6" name="TextBox 5"/>
+          <p:cNvSpPr txBox="1"/>
+          <p:nvPr/>
+        </p:nvSpPr>
+        <p:spPr>
+          <a:xfrm>
+            <a:off x="1097280" y="2743200"/>
+            <a:ext cx="9966960" cy="365760"/>
+          </a:xfrm>
+          <a:prstGeom prst="rect">
+            <a:avLst/>
+          </a:prstGeom>
+          <a:noFill/>
+        </p:spPr>
+        <p:txBody>
+          <a:bodyPr wrap="square">
+            <a:spAutoFit/>
+          </a:bodyPr>
+          <a:lstStyle/>
+          <a:p>
+            <a:pPr algn="l">
+              <a:defRPr sz="1400" b="0" i="0">
+                <a:solidFill>
+                  <a:srgbClr val="8F95A3"/>
+                </a:solidFill>
+                <a:latin typeface="Calibri"/>
+              </a:defRPr>
+            </a:pPr>
+            <a:r>
+              <a:t>March 13</a:t>
+            </a:r>
+          </a:p>
+        </p:txBody>
+      </p:sp>
+      <p:sp>
+        <p:nvSpPr>
+          <p:cNvPr id="7" name="TextBox 6"/>
+          <p:cNvSpPr txBox="1"/>
+          <p:nvPr/>
+        </p:nvSpPr>
+        <p:spPr>
+          <a:xfrm>
+            <a:off x="1097280" y="3291840"/>
+            <a:ext cx="9966960" cy="914400"/>
+          </a:xfrm>
+          <a:prstGeom prst="rect">
+            <a:avLst/>
+          </a:prstGeom>
+          <a:noFill/>
+        </p:spPr>
+        <p:txBody>
+          <a:bodyPr wrap="square">
+            <a:spAutoFit/>
+          </a:bodyPr>
+          <a:lstStyle/>
+          <a:p>
+            <a:pPr algn="l">
+              <a:defRPr sz="1600" b="0" i="0">
+                <a:solidFill>
+                  <a:srgbClr val="E2E2EA"/>
+                </a:solidFill>
+                <a:latin typeface="Calibri"/>
+              </a:defRPr>
+            </a:pPr>
+            <a:r>
+              <a:t>Wishing you an amazing day filled with joy and celebration!</a:t>
+            </a:r>
+          </a:p>
+        </p:txBody>
+      </p:sp>
+      <p:sp>
+        <p:nvSpPr>
+          <p:cNvPr id="8" name="TextBox 7"/>
+          <p:cNvSpPr txBox="1"/>
+          <p:nvPr/>
+        </p:nvSpPr>
+        <p:spPr>
+          <a:xfrm>
+            <a:off x="1097280" y="4572000"/>
+            <a:ext cx="9966960" cy="457200"/>
+          </a:xfrm>
+          <a:prstGeom prst="rect">
+            <a:avLst/>
+          </a:prstGeom>
+          <a:noFill/>
+        </p:spPr>
+        <p:txBody>
+          <a:bodyPr wrap="square">
+            <a:spAutoFit/>
+          </a:bodyPr>
+          <a:lstStyle/>
+          <a:p>
+            <a:pPr algn="l">
+              <a:defRPr sz="1400" b="0" i="1">
+                <a:solidFill>
+                  <a:srgbClr val="FFB72B"/>
+                </a:solidFill>
+                <a:latin typeface="Calibri"/>
+              </a:defRPr>
+            </a:pPr>
+            <a:r>
+              <a:t>With love, Your Appodeal Team 💜</a:t>
+            </a:r>
+          </a:p>
+        </p:txBody>
+      </p:sp>
+    </p:spTree>
+  </p:cSld>
+  <p:clrMapOvr>
+    <a:masterClrMapping/>
+  </p:clrMapOvr>
+</p:sld>
+</file>
+
+<file path=ppt/slides/slide17.xml><?xml version="1.0" encoding="utf-8"?>
+<p:sld xmlns:a="http://schemas.openxmlformats.org/drawingml/2006/main" xmlns:p="http://schemas.openxmlformats.org/presentationml/2006/main" xmlns:r="http://schemas.openxmlformats.org/officeDocument/2006/relationships">
+  <p:cSld>
+    <p:bg>
+      <p:bgPr>
+        <a:solidFill>
+          <a:srgbClr val="08080C"/>
+        </a:solidFill>
+        <a:effectLst/>
+      </p:bgPr>
+    </p:bg>
+    <p:spTree>
+      <p:nvGrpSpPr>
+        <p:cNvPr id="1" name=""/>
+        <p:cNvGrpSpPr/>
+        <p:nvPr/>
+      </p:nvGrpSpPr>
+      <p:grpSpPr/>
+      <p:sp>
+        <p:nvSpPr>
+          <p:cNvPr id="2" name="Rectangle 1"/>
+          <p:cNvSpPr/>
+          <p:nvPr/>
+        </p:nvSpPr>
+        <p:spPr>
+          <a:xfrm>
+            <a:off x="0" y="365760"/>
+            <a:ext cx="12191695" cy="54864"/>
+          </a:xfrm>
+          <a:prstGeom prst="rect">
+            <a:avLst/>
+          </a:prstGeom>
+          <a:solidFill>
+            <a:srgbClr val="FFB72B"/>
+          </a:solidFill>
+          <a:ln>
+            <a:noFill/>
+          </a:ln>
+        </p:spPr>
+        <p:style>
+          <a:lnRef idx="1">
+            <a:schemeClr val="accent1"/>
+          </a:lnRef>
+          <a:fillRef idx="3">
+            <a:schemeClr val="accent1"/>
+          </a:fillRef>
+          <a:effectRef idx="2">
+            <a:schemeClr val="accent1"/>
+          </a:effectRef>
+          <a:fontRef idx="minor">
+            <a:schemeClr val="lt1"/>
+          </a:fontRef>
+        </p:style>
+        <p:txBody>
+          <a:bodyPr rtlCol="0" anchor="ctr"/>
+          <a:lstStyle/>
+          <a:p>
+            <a:pPr algn="ctr"/>
+          </a:p>
+        </p:txBody>
+      </p:sp>
+      <p:sp>
+        <p:nvSpPr>
+          <p:cNvPr id="3" name="TextBox 2"/>
+          <p:cNvSpPr txBox="1"/>
+          <p:nvPr/>
+        </p:nvSpPr>
+        <p:spPr>
+          <a:xfrm>
+            <a:off x="1097280" y="731520"/>
+            <a:ext cx="3657600" cy="365760"/>
+          </a:xfrm>
+          <a:prstGeom prst="rect">
+            <a:avLst/>
+          </a:prstGeom>
+          <a:noFill/>
+        </p:spPr>
+        <p:txBody>
+          <a:bodyPr wrap="none">
+            <a:spAutoFit/>
+          </a:bodyPr>
+          <a:lstStyle/>
+          <a:p>
+            <a:pPr algn="l">
+              <a:defRPr sz="1000" b="1">
+                <a:solidFill>
+                  <a:srgbClr val="FFB72B"/>
+                </a:solidFill>
+                <a:latin typeface="Calibri"/>
+              </a:defRPr>
+            </a:pPr>
+            <a:r>
+              <a:t>🎂  CELEBRATION</a:t>
+            </a:r>
+          </a:p>
+        </p:txBody>
+      </p:sp>
+      <p:sp>
+        <p:nvSpPr>
+          <p:cNvPr id="4" name="TextBox 3"/>
+          <p:cNvSpPr txBox="1"/>
+          <p:nvPr/>
+        </p:nvSpPr>
+        <p:spPr>
+          <a:xfrm>
+            <a:off x="1097280" y="1188720"/>
+            <a:ext cx="9966960" cy="731520"/>
+          </a:xfrm>
+          <a:prstGeom prst="rect">
+            <a:avLst/>
+          </a:prstGeom>
+          <a:noFill/>
+        </p:spPr>
+        <p:txBody>
+          <a:bodyPr wrap="square">
+            <a:spAutoFit/>
+          </a:bodyPr>
+          <a:lstStyle/>
+          <a:p>
+            <a:pPr algn="l">
+              <a:defRPr sz="3200" b="1" i="0">
+                <a:solidFill>
+                  <a:srgbClr val="FFB72B"/>
+                </a:solidFill>
+                <a:latin typeface="Calibri"/>
+              </a:defRPr>
+            </a:pPr>
+            <a:r>
+              <a:t>Happy Birthday!</a:t>
+            </a:r>
+          </a:p>
+        </p:txBody>
+      </p:sp>
+      <p:sp>
+        <p:nvSpPr>
+          <p:cNvPr id="5" name="TextBox 4"/>
+          <p:cNvSpPr txBox="1"/>
+          <p:nvPr/>
+        </p:nvSpPr>
+        <p:spPr>
+          <a:xfrm>
+            <a:off x="1097280" y="2103120"/>
+            <a:ext cx="9966960" cy="640080"/>
+          </a:xfrm>
+          <a:prstGeom prst="rect">
+            <a:avLst/>
+          </a:prstGeom>
+          <a:noFill/>
+        </p:spPr>
+        <p:txBody>
+          <a:bodyPr wrap="square">
+            <a:spAutoFit/>
+          </a:bodyPr>
+          <a:lstStyle/>
+          <a:p>
+            <a:pPr algn="l">
+              <a:defRPr sz="2800" b="1" i="0">
+                <a:solidFill>
+                  <a:srgbClr val="FFFFFF"/>
+                </a:solidFill>
+                <a:latin typeface="Calibri"/>
+              </a:defRPr>
+            </a:pPr>
+            <a:r>
+              <a:t>Yanina Lozben</a:t>
+            </a:r>
+          </a:p>
+        </p:txBody>
+      </p:sp>
+      <p:sp>
+        <p:nvSpPr>
+          <p:cNvPr id="6" name="TextBox 5"/>
+          <p:cNvSpPr txBox="1"/>
+          <p:nvPr/>
+        </p:nvSpPr>
+        <p:spPr>
+          <a:xfrm>
+            <a:off x="1097280" y="2743200"/>
+            <a:ext cx="9966960" cy="365760"/>
+          </a:xfrm>
+          <a:prstGeom prst="rect">
+            <a:avLst/>
+          </a:prstGeom>
+          <a:noFill/>
+        </p:spPr>
+        <p:txBody>
+          <a:bodyPr wrap="square">
+            <a:spAutoFit/>
+          </a:bodyPr>
+          <a:lstStyle/>
+          <a:p>
+            <a:pPr algn="l">
+              <a:defRPr sz="1400" b="0" i="0">
+                <a:solidFill>
+                  <a:srgbClr val="8F95A3"/>
+                </a:solidFill>
+                <a:latin typeface="Calibri"/>
+              </a:defRPr>
+            </a:pPr>
+            <a:r>
+              <a:t>March 13</a:t>
+            </a:r>
+          </a:p>
+        </p:txBody>
+      </p:sp>
+      <p:sp>
+        <p:nvSpPr>
+          <p:cNvPr id="7" name="TextBox 6"/>
+          <p:cNvSpPr txBox="1"/>
+          <p:nvPr/>
+        </p:nvSpPr>
+        <p:spPr>
+          <a:xfrm>
+            <a:off x="1097280" y="3291840"/>
+            <a:ext cx="9966960" cy="914400"/>
+          </a:xfrm>
+          <a:prstGeom prst="rect">
+            <a:avLst/>
+          </a:prstGeom>
+          <a:noFill/>
+        </p:spPr>
+        <p:txBody>
+          <a:bodyPr wrap="square">
+            <a:spAutoFit/>
+          </a:bodyPr>
+          <a:lstStyle/>
+          <a:p>
+            <a:pPr algn="l">
+              <a:defRPr sz="1600" b="0" i="0">
+                <a:solidFill>
+                  <a:srgbClr val="E2E2EA"/>
+                </a:solidFill>
+                <a:latin typeface="Calibri"/>
+              </a:defRPr>
+            </a:pPr>
+            <a:r>
+              <a:t>Wishing you an amazing day filled with joy and celebration!</a:t>
+            </a:r>
+          </a:p>
+        </p:txBody>
+      </p:sp>
+      <p:sp>
+        <p:nvSpPr>
+          <p:cNvPr id="8" name="TextBox 7"/>
+          <p:cNvSpPr txBox="1"/>
+          <p:nvPr/>
+        </p:nvSpPr>
+        <p:spPr>
+          <a:xfrm>
+            <a:off x="1097280" y="4572000"/>
+            <a:ext cx="9966960" cy="457200"/>
+          </a:xfrm>
+          <a:prstGeom prst="rect">
+            <a:avLst/>
+          </a:prstGeom>
+          <a:noFill/>
+        </p:spPr>
+        <p:txBody>
+          <a:bodyPr wrap="square">
+            <a:spAutoFit/>
+          </a:bodyPr>
+          <a:lstStyle/>
+          <a:p>
+            <a:pPr algn="l">
+              <a:defRPr sz="1400" b="0" i="1">
+                <a:solidFill>
+                  <a:srgbClr val="FFB72B"/>
+                </a:solidFill>
+                <a:latin typeface="Calibri"/>
+              </a:defRPr>
+            </a:pPr>
+            <a:r>
+              <a:t>With love, Your Appodeal Team 💜</a:t>
+            </a:r>
+          </a:p>
+        </p:txBody>
+      </p:sp>
+    </p:spTree>
+  </p:cSld>
+  <p:clrMapOvr>
+    <a:masterClrMapping/>
+  </p:clrMapOvr>
+</p:sld>
+</file>
+
+<file path=ppt/slides/slide18.xml><?xml version="1.0" encoding="utf-8"?>
+<p:sld xmlns:a="http://schemas.openxmlformats.org/drawingml/2006/main" xmlns:p="http://schemas.openxmlformats.org/presentationml/2006/main" xmlns:r="http://schemas.openxmlformats.org/officeDocument/2006/relationships">
+  <p:cSld>
+    <p:bg>
+      <p:bgPr>
+        <a:solidFill>
+          <a:srgbClr val="08080C"/>
+        </a:solidFill>
+        <a:effectLst/>
+      </p:bgPr>
+    </p:bg>
+    <p:spTree>
+      <p:nvGrpSpPr>
+        <p:cNvPr id="1" name=""/>
+        <p:cNvGrpSpPr/>
+        <p:nvPr/>
+      </p:nvGrpSpPr>
+      <p:grpSpPr/>
+      <p:sp>
+        <p:nvSpPr>
+          <p:cNvPr id="2" name="Rectangle 1"/>
+          <p:cNvSpPr/>
+          <p:nvPr/>
+        </p:nvSpPr>
+        <p:spPr>
+          <a:xfrm>
+            <a:off x="0" y="365760"/>
+            <a:ext cx="12191695" cy="54864"/>
+          </a:xfrm>
+          <a:prstGeom prst="rect">
+            <a:avLst/>
+          </a:prstGeom>
+          <a:solidFill>
+            <a:srgbClr val="FFB72B"/>
+          </a:solidFill>
+          <a:ln>
+            <a:noFill/>
+          </a:ln>
+        </p:spPr>
+        <p:style>
+          <a:lnRef idx="1">
+            <a:schemeClr val="accent1"/>
+          </a:lnRef>
+          <a:fillRef idx="3">
+            <a:schemeClr val="accent1"/>
+          </a:fillRef>
+          <a:effectRef idx="2">
+            <a:schemeClr val="accent1"/>
+          </a:effectRef>
+          <a:fontRef idx="minor">
+            <a:schemeClr val="lt1"/>
+          </a:fontRef>
+        </p:style>
+        <p:txBody>
+          <a:bodyPr rtlCol="0" anchor="ctr"/>
+          <a:lstStyle/>
+          <a:p>
+            <a:pPr algn="ctr"/>
+          </a:p>
+        </p:txBody>
+      </p:sp>
+      <p:sp>
+        <p:nvSpPr>
+          <p:cNvPr id="3" name="TextBox 2"/>
+          <p:cNvSpPr txBox="1"/>
+          <p:nvPr/>
+        </p:nvSpPr>
+        <p:spPr>
+          <a:xfrm>
+            <a:off x="1097280" y="731520"/>
+            <a:ext cx="3657600" cy="365760"/>
+          </a:xfrm>
+          <a:prstGeom prst="rect">
+            <a:avLst/>
+          </a:prstGeom>
+          <a:noFill/>
+        </p:spPr>
+        <p:txBody>
+          <a:bodyPr wrap="none">
+            <a:spAutoFit/>
+          </a:bodyPr>
+          <a:lstStyle/>
+          <a:p>
+            <a:pPr algn="l">
+              <a:defRPr sz="1000" b="1">
+                <a:solidFill>
+                  <a:srgbClr val="FFB72B"/>
+                </a:solidFill>
+                <a:latin typeface="Calibri"/>
+              </a:defRPr>
+            </a:pPr>
+            <a:r>
+              <a:t>🎂  CELEBRATION</a:t>
+            </a:r>
+          </a:p>
+        </p:txBody>
+      </p:sp>
+      <p:sp>
+        <p:nvSpPr>
+          <p:cNvPr id="4" name="TextBox 3"/>
+          <p:cNvSpPr txBox="1"/>
+          <p:nvPr/>
+        </p:nvSpPr>
+        <p:spPr>
+          <a:xfrm>
+            <a:off x="1097280" y="1188720"/>
+            <a:ext cx="9966960" cy="731520"/>
+          </a:xfrm>
+          <a:prstGeom prst="rect">
+            <a:avLst/>
+          </a:prstGeom>
+          <a:noFill/>
+        </p:spPr>
+        <p:txBody>
+          <a:bodyPr wrap="square">
+            <a:spAutoFit/>
+          </a:bodyPr>
+          <a:lstStyle/>
+          <a:p>
+            <a:pPr algn="l">
+              <a:defRPr sz="3200" b="1" i="0">
+                <a:solidFill>
+                  <a:srgbClr val="FFB72B"/>
+                </a:solidFill>
+                <a:latin typeface="Calibri"/>
+              </a:defRPr>
+            </a:pPr>
+            <a:r>
+              <a:t>Happy Birthday!</a:t>
+            </a:r>
+          </a:p>
+        </p:txBody>
+      </p:sp>
+      <p:sp>
+        <p:nvSpPr>
+          <p:cNvPr id="5" name="TextBox 4"/>
+          <p:cNvSpPr txBox="1"/>
+          <p:nvPr/>
+        </p:nvSpPr>
+        <p:spPr>
+          <a:xfrm>
+            <a:off x="1097280" y="2103120"/>
+            <a:ext cx="9966960" cy="640080"/>
+          </a:xfrm>
+          <a:prstGeom prst="rect">
+            <a:avLst/>
+          </a:prstGeom>
+          <a:noFill/>
+        </p:spPr>
+        <p:txBody>
+          <a:bodyPr wrap="square">
+            <a:spAutoFit/>
+          </a:bodyPr>
+          <a:lstStyle/>
+          <a:p>
+            <a:pPr algn="l">
+              <a:defRPr sz="2800" b="1" i="0">
+                <a:solidFill>
+                  <a:srgbClr val="FFFFFF"/>
+                </a:solidFill>
+                <a:latin typeface="Calibri"/>
+              </a:defRPr>
+            </a:pPr>
+            <a:r>
+              <a:t>Irina Koval</a:t>
+            </a:r>
+          </a:p>
+        </p:txBody>
+      </p:sp>
+      <p:sp>
+        <p:nvSpPr>
+          <p:cNvPr id="6" name="TextBox 5"/>
+          <p:cNvSpPr txBox="1"/>
+          <p:nvPr/>
+        </p:nvSpPr>
+        <p:spPr>
+          <a:xfrm>
+            <a:off x="1097280" y="2743200"/>
+            <a:ext cx="9966960" cy="365760"/>
+          </a:xfrm>
+          <a:prstGeom prst="rect">
+            <a:avLst/>
+          </a:prstGeom>
+          <a:noFill/>
+        </p:spPr>
+        <p:txBody>
+          <a:bodyPr wrap="square">
+            <a:spAutoFit/>
+          </a:bodyPr>
+          <a:lstStyle/>
+          <a:p>
+            <a:pPr algn="l">
+              <a:defRPr sz="1400" b="0" i="0">
+                <a:solidFill>
+                  <a:srgbClr val="8F95A3"/>
+                </a:solidFill>
+                <a:latin typeface="Calibri"/>
+              </a:defRPr>
+            </a:pPr>
+            <a:r>
+              <a:t>March 13</a:t>
+            </a:r>
+          </a:p>
+        </p:txBody>
+      </p:sp>
+      <p:sp>
+        <p:nvSpPr>
+          <p:cNvPr id="7" name="TextBox 6"/>
+          <p:cNvSpPr txBox="1"/>
+          <p:nvPr/>
+        </p:nvSpPr>
+        <p:spPr>
+          <a:xfrm>
+            <a:off x="1097280" y="3291840"/>
+            <a:ext cx="9966960" cy="914400"/>
+          </a:xfrm>
+          <a:prstGeom prst="rect">
+            <a:avLst/>
+          </a:prstGeom>
+          <a:noFill/>
+        </p:spPr>
+        <p:txBody>
+          <a:bodyPr wrap="square">
+            <a:spAutoFit/>
+          </a:bodyPr>
+          <a:lstStyle/>
+          <a:p>
+            <a:pPr algn="l">
+              <a:defRPr sz="1600" b="0" i="0">
+                <a:solidFill>
+                  <a:srgbClr val="E2E2EA"/>
+                </a:solidFill>
+                <a:latin typeface="Calibri"/>
+              </a:defRPr>
+            </a:pPr>
+            <a:r>
+              <a:t>Wishing you an amazing day filled with joy and celebration!</a:t>
+            </a:r>
+          </a:p>
+        </p:txBody>
+      </p:sp>
+      <p:sp>
+        <p:nvSpPr>
+          <p:cNvPr id="8" name="TextBox 7"/>
+          <p:cNvSpPr txBox="1"/>
+          <p:nvPr/>
+        </p:nvSpPr>
+        <p:spPr>
+          <a:xfrm>
+            <a:off x="1097280" y="4572000"/>
+            <a:ext cx="9966960" cy="457200"/>
+          </a:xfrm>
+          <a:prstGeom prst="rect">
+            <a:avLst/>
+          </a:prstGeom>
+          <a:noFill/>
+        </p:spPr>
+        <p:txBody>
+          <a:bodyPr wrap="square">
+            <a:spAutoFit/>
+          </a:bodyPr>
+          <a:lstStyle/>
+          <a:p>
+            <a:pPr algn="l">
+              <a:defRPr sz="1400" b="0" i="1">
+                <a:solidFill>
+                  <a:srgbClr val="FFB72B"/>
+                </a:solidFill>
+                <a:latin typeface="Calibri"/>
+              </a:defRPr>
+            </a:pPr>
+            <a:r>
+              <a:t>With love, Your Appodeal Team 💜</a:t>
+            </a:r>
+          </a:p>
+        </p:txBody>
+      </p:sp>
+    </p:spTree>
+  </p:cSld>
+  <p:clrMapOvr>
+    <a:masterClrMapping/>
+  </p:clrMapOvr>
+</p:sld>
+</file>
+
+<file path=ppt/slides/slide19.xml><?xml version="1.0" encoding="utf-8"?>
+<p:sld xmlns:a="http://schemas.openxmlformats.org/drawingml/2006/main" xmlns:p="http://schemas.openxmlformats.org/presentationml/2006/main" xmlns:r="http://schemas.openxmlformats.org/officeDocument/2006/relationships">
+  <p:cSld>
+    <p:bg>
+      <p:bgPr>
+        <a:solidFill>
+          <a:srgbClr val="08080C"/>
+        </a:solidFill>
+        <a:effectLst/>
+      </p:bgPr>
+    </p:bg>
+    <p:spTree>
+      <p:nvGrpSpPr>
+        <p:cNvPr id="1" name=""/>
+        <p:cNvGrpSpPr/>
+        <p:nvPr/>
+      </p:nvGrpSpPr>
+      <p:grpSpPr/>
+      <p:sp>
+        <p:nvSpPr>
+          <p:cNvPr id="2" name="Rectangle 1"/>
+          <p:cNvSpPr/>
+          <p:nvPr/>
+        </p:nvSpPr>
+        <p:spPr>
+          <a:xfrm>
+            <a:off x="0" y="365760"/>
+            <a:ext cx="12191695" cy="54864"/>
+          </a:xfrm>
+          <a:prstGeom prst="rect">
+            <a:avLst/>
+          </a:prstGeom>
+          <a:solidFill>
+            <a:srgbClr val="FFB72B"/>
+          </a:solidFill>
+          <a:ln>
+            <a:noFill/>
+          </a:ln>
+        </p:spPr>
+        <p:style>
+          <a:lnRef idx="1">
+            <a:schemeClr val="accent1"/>
+          </a:lnRef>
+          <a:fillRef idx="3">
+            <a:schemeClr val="accent1"/>
+          </a:fillRef>
+          <a:effectRef idx="2">
+            <a:schemeClr val="accent1"/>
+          </a:effectRef>
+          <a:fontRef idx="minor">
+            <a:schemeClr val="lt1"/>
+          </a:fontRef>
+        </p:style>
+        <p:txBody>
+          <a:bodyPr rtlCol="0" anchor="ctr"/>
+          <a:lstStyle/>
+          <a:p>
+            <a:pPr algn="ctr"/>
+          </a:p>
+        </p:txBody>
+      </p:sp>
+      <p:sp>
+        <p:nvSpPr>
+          <p:cNvPr id="3" name="TextBox 2"/>
+          <p:cNvSpPr txBox="1"/>
+          <p:nvPr/>
+        </p:nvSpPr>
+        <p:spPr>
+          <a:xfrm>
+            <a:off x="1097280" y="731520"/>
+            <a:ext cx="3657600" cy="365760"/>
+          </a:xfrm>
+          <a:prstGeom prst="rect">
+            <a:avLst/>
+          </a:prstGeom>
+          <a:noFill/>
+        </p:spPr>
+        <p:txBody>
+          <a:bodyPr wrap="none">
+            <a:spAutoFit/>
+          </a:bodyPr>
+          <a:lstStyle/>
+          <a:p>
+            <a:pPr algn="l">
+              <a:defRPr sz="1000" b="1">
+                <a:solidFill>
+                  <a:srgbClr val="FFB72B"/>
+                </a:solidFill>
+                <a:latin typeface="Calibri"/>
+              </a:defRPr>
+            </a:pPr>
+            <a:r>
+              <a:t>🎂  CELEBRATION</a:t>
+            </a:r>
+          </a:p>
+        </p:txBody>
+      </p:sp>
+      <p:sp>
+        <p:nvSpPr>
+          <p:cNvPr id="4" name="TextBox 3"/>
+          <p:cNvSpPr txBox="1"/>
+          <p:nvPr/>
+        </p:nvSpPr>
+        <p:spPr>
+          <a:xfrm>
+            <a:off x="1097280" y="1188720"/>
+            <a:ext cx="9966960" cy="731520"/>
+          </a:xfrm>
+          <a:prstGeom prst="rect">
+            <a:avLst/>
+          </a:prstGeom>
+          <a:noFill/>
+        </p:spPr>
+        <p:txBody>
+          <a:bodyPr wrap="square">
+            <a:spAutoFit/>
+          </a:bodyPr>
+          <a:lstStyle/>
+          <a:p>
+            <a:pPr algn="l">
+              <a:defRPr sz="3200" b="1" i="0">
+                <a:solidFill>
+                  <a:srgbClr val="FFB72B"/>
+                </a:solidFill>
+                <a:latin typeface="Calibri"/>
+              </a:defRPr>
+            </a:pPr>
+            <a:r>
+              <a:t>Happy Birthday!</a:t>
+            </a:r>
+          </a:p>
+        </p:txBody>
+      </p:sp>
+      <p:sp>
+        <p:nvSpPr>
+          <p:cNvPr id="5" name="TextBox 4"/>
+          <p:cNvSpPr txBox="1"/>
+          <p:nvPr/>
+        </p:nvSpPr>
+        <p:spPr>
+          <a:xfrm>
+            <a:off x="1097280" y="2103120"/>
+            <a:ext cx="9966960" cy="640080"/>
+          </a:xfrm>
+          <a:prstGeom prst="rect">
+            <a:avLst/>
+          </a:prstGeom>
+          <a:noFill/>
+        </p:spPr>
+        <p:txBody>
+          <a:bodyPr wrap="square">
+            <a:spAutoFit/>
+          </a:bodyPr>
+          <a:lstStyle/>
+          <a:p>
+            <a:pPr algn="l">
+              <a:defRPr sz="2800" b="1" i="0">
+                <a:solidFill>
+                  <a:srgbClr val="FFFFFF"/>
+                </a:solidFill>
+                <a:latin typeface="Calibri"/>
+              </a:defRPr>
+            </a:pPr>
+            <a:r>
+              <a:t>Francesco Cerigioni</a:t>
+            </a:r>
+          </a:p>
+        </p:txBody>
+      </p:sp>
+      <p:sp>
+        <p:nvSpPr>
+          <p:cNvPr id="6" name="TextBox 5"/>
+          <p:cNvSpPr txBox="1"/>
+          <p:nvPr/>
+        </p:nvSpPr>
+        <p:spPr>
+          <a:xfrm>
+            <a:off x="1097280" y="2743200"/>
+            <a:ext cx="9966960" cy="365760"/>
+          </a:xfrm>
+          <a:prstGeom prst="rect">
+            <a:avLst/>
+          </a:prstGeom>
+          <a:noFill/>
+        </p:spPr>
+        <p:txBody>
+          <a:bodyPr wrap="square">
+            <a:spAutoFit/>
+          </a:bodyPr>
+          <a:lstStyle/>
+          <a:p>
+            <a:pPr algn="l">
+              <a:defRPr sz="1400" b="0" i="0">
+                <a:solidFill>
+                  <a:srgbClr val="8F95A3"/>
+                </a:solidFill>
+                <a:latin typeface="Calibri"/>
+              </a:defRPr>
+            </a:pPr>
+            <a:r>
+              <a:t>March 13</a:t>
+            </a:r>
+          </a:p>
+        </p:txBody>
+      </p:sp>
+      <p:sp>
+        <p:nvSpPr>
+          <p:cNvPr id="7" name="TextBox 6"/>
+          <p:cNvSpPr txBox="1"/>
+          <p:nvPr/>
+        </p:nvSpPr>
+        <p:spPr>
+          <a:xfrm>
+            <a:off x="1097280" y="3291840"/>
+            <a:ext cx="9966960" cy="914400"/>
+          </a:xfrm>
+          <a:prstGeom prst="rect">
+            <a:avLst/>
+          </a:prstGeom>
+          <a:noFill/>
+        </p:spPr>
+        <p:txBody>
+          <a:bodyPr wrap="square">
+            <a:spAutoFit/>
+          </a:bodyPr>
+          <a:lstStyle/>
+          <a:p>
+            <a:pPr algn="l">
+              <a:defRPr sz="1600" b="0" i="0">
+                <a:solidFill>
+                  <a:srgbClr val="E2E2EA"/>
+                </a:solidFill>
+                <a:latin typeface="Calibri"/>
+              </a:defRPr>
+            </a:pPr>
+            <a:r>
+              <a:t>Wishing you an amazing day filled with joy and celebration!</a:t>
+            </a:r>
+          </a:p>
+        </p:txBody>
+      </p:sp>
+      <p:sp>
+        <p:nvSpPr>
+          <p:cNvPr id="8" name="TextBox 7"/>
+          <p:cNvSpPr txBox="1"/>
+          <p:nvPr/>
+        </p:nvSpPr>
+        <p:spPr>
+          <a:xfrm>
+            <a:off x="1097280" y="4572000"/>
+            <a:ext cx="9966960" cy="457200"/>
+          </a:xfrm>
+          <a:prstGeom prst="rect">
+            <a:avLst/>
+          </a:prstGeom>
+          <a:noFill/>
+        </p:spPr>
+        <p:txBody>
+          <a:bodyPr wrap="square">
+            <a:spAutoFit/>
+          </a:bodyPr>
+          <a:lstStyle/>
+          <a:p>
+            <a:pPr algn="l">
+              <a:defRPr sz="1400" b="0" i="1">
+                <a:solidFill>
+                  <a:srgbClr val="FFB72B"/>
+                </a:solidFill>
+                <a:latin typeface="Calibri"/>
+              </a:defRPr>
+            </a:pPr>
+            <a:r>
+              <a:t>With love, Your Appodeal Team 💜</a:t>
+            </a:r>
+          </a:p>
+        </p:txBody>
+      </p:sp>
+    </p:spTree>
+  </p:cSld>
+  <p:clrMapOvr>
+    <a:masterClrMapping/>
+  </p:clrMapOvr>
+</p:sld>
+</file>
+
 <file path=ppt/slides/slide2.xml><?xml version="1.0" encoding="utf-8"?>
 <p:sld xmlns:a="http://schemas.openxmlformats.org/drawingml/2006/main" xmlns:p="http://schemas.openxmlformats.org/presentationml/2006/main" xmlns:r="http://schemas.openxmlformats.org/officeDocument/2006/relationships">
   <p:cSld>
@@ -3425,7 +6292,7 @@
               </a:defRPr>
             </a:pPr>
             <a:r>
-              <a:t>Artem Orlov</a:t>
+              <a:t>Denis Glavatskikh</a:t>
             </a:r>
           </a:p>
         </p:txBody>
@@ -3534,6 +6401,1482 @@
             </a:pPr>
             <a:r>
               <a:t>With love, Your Appodeal Team 💜</a:t>
+            </a:r>
+          </a:p>
+        </p:txBody>
+      </p:sp>
+    </p:spTree>
+  </p:cSld>
+  <p:clrMapOvr>
+    <a:masterClrMapping/>
+  </p:clrMapOvr>
+</p:sld>
+</file>
+
+<file path=ppt/slides/slide20.xml><?xml version="1.0" encoding="utf-8"?>
+<p:sld xmlns:a="http://schemas.openxmlformats.org/drawingml/2006/main" xmlns:p="http://schemas.openxmlformats.org/presentationml/2006/main" xmlns:r="http://schemas.openxmlformats.org/officeDocument/2006/relationships">
+  <p:cSld>
+    <p:bg>
+      <p:bgPr>
+        <a:solidFill>
+          <a:srgbClr val="08080C"/>
+        </a:solidFill>
+        <a:effectLst/>
+      </p:bgPr>
+    </p:bg>
+    <p:spTree>
+      <p:nvGrpSpPr>
+        <p:cNvPr id="1" name=""/>
+        <p:cNvGrpSpPr/>
+        <p:nvPr/>
+      </p:nvGrpSpPr>
+      <p:grpSpPr/>
+      <p:sp>
+        <p:nvSpPr>
+          <p:cNvPr id="2" name="Rectangle 1"/>
+          <p:cNvSpPr/>
+          <p:nvPr/>
+        </p:nvSpPr>
+        <p:spPr>
+          <a:xfrm>
+            <a:off x="0" y="365760"/>
+            <a:ext cx="12191695" cy="54864"/>
+          </a:xfrm>
+          <a:prstGeom prst="rect">
+            <a:avLst/>
+          </a:prstGeom>
+          <a:solidFill>
+            <a:srgbClr val="FFB72B"/>
+          </a:solidFill>
+          <a:ln>
+            <a:noFill/>
+          </a:ln>
+        </p:spPr>
+        <p:style>
+          <a:lnRef idx="1">
+            <a:schemeClr val="accent1"/>
+          </a:lnRef>
+          <a:fillRef idx="3">
+            <a:schemeClr val="accent1"/>
+          </a:fillRef>
+          <a:effectRef idx="2">
+            <a:schemeClr val="accent1"/>
+          </a:effectRef>
+          <a:fontRef idx="minor">
+            <a:schemeClr val="lt1"/>
+          </a:fontRef>
+        </p:style>
+        <p:txBody>
+          <a:bodyPr rtlCol="0" anchor="ctr"/>
+          <a:lstStyle/>
+          <a:p>
+            <a:pPr algn="ctr"/>
+          </a:p>
+        </p:txBody>
+      </p:sp>
+      <p:sp>
+        <p:nvSpPr>
+          <p:cNvPr id="3" name="TextBox 2"/>
+          <p:cNvSpPr txBox="1"/>
+          <p:nvPr/>
+        </p:nvSpPr>
+        <p:spPr>
+          <a:xfrm>
+            <a:off x="1097280" y="731520"/>
+            <a:ext cx="3657600" cy="365760"/>
+          </a:xfrm>
+          <a:prstGeom prst="rect">
+            <a:avLst/>
+          </a:prstGeom>
+          <a:noFill/>
+        </p:spPr>
+        <p:txBody>
+          <a:bodyPr wrap="none">
+            <a:spAutoFit/>
+          </a:bodyPr>
+          <a:lstStyle/>
+          <a:p>
+            <a:pPr algn="l">
+              <a:defRPr sz="1000" b="1">
+                <a:solidFill>
+                  <a:srgbClr val="FFB72B"/>
+                </a:solidFill>
+                <a:latin typeface="Calibri"/>
+              </a:defRPr>
+            </a:pPr>
+            <a:r>
+              <a:t>🎂  CELEBRATION</a:t>
+            </a:r>
+          </a:p>
+        </p:txBody>
+      </p:sp>
+      <p:sp>
+        <p:nvSpPr>
+          <p:cNvPr id="4" name="TextBox 3"/>
+          <p:cNvSpPr txBox="1"/>
+          <p:nvPr/>
+        </p:nvSpPr>
+        <p:spPr>
+          <a:xfrm>
+            <a:off x="1097280" y="1188720"/>
+            <a:ext cx="9966960" cy="731520"/>
+          </a:xfrm>
+          <a:prstGeom prst="rect">
+            <a:avLst/>
+          </a:prstGeom>
+          <a:noFill/>
+        </p:spPr>
+        <p:txBody>
+          <a:bodyPr wrap="square">
+            <a:spAutoFit/>
+          </a:bodyPr>
+          <a:lstStyle/>
+          <a:p>
+            <a:pPr algn="l">
+              <a:defRPr sz="3200" b="1" i="0">
+                <a:solidFill>
+                  <a:srgbClr val="FFB72B"/>
+                </a:solidFill>
+                <a:latin typeface="Calibri"/>
+              </a:defRPr>
+            </a:pPr>
+            <a:r>
+              <a:t>Happy Birthday!</a:t>
+            </a:r>
+          </a:p>
+        </p:txBody>
+      </p:sp>
+      <p:sp>
+        <p:nvSpPr>
+          <p:cNvPr id="5" name="TextBox 4"/>
+          <p:cNvSpPr txBox="1"/>
+          <p:nvPr/>
+        </p:nvSpPr>
+        <p:spPr>
+          <a:xfrm>
+            <a:off x="1097280" y="2103120"/>
+            <a:ext cx="9966960" cy="640080"/>
+          </a:xfrm>
+          <a:prstGeom prst="rect">
+            <a:avLst/>
+          </a:prstGeom>
+          <a:noFill/>
+        </p:spPr>
+        <p:txBody>
+          <a:bodyPr wrap="square">
+            <a:spAutoFit/>
+          </a:bodyPr>
+          <a:lstStyle/>
+          <a:p>
+            <a:pPr algn="l">
+              <a:defRPr sz="2800" b="1" i="0">
+                <a:solidFill>
+                  <a:srgbClr val="FFFFFF"/>
+                </a:solidFill>
+                <a:latin typeface="Calibri"/>
+              </a:defRPr>
+            </a:pPr>
+            <a:r>
+              <a:t>Iryna Peretiatko</a:t>
+            </a:r>
+          </a:p>
+        </p:txBody>
+      </p:sp>
+      <p:sp>
+        <p:nvSpPr>
+          <p:cNvPr id="6" name="TextBox 5"/>
+          <p:cNvSpPr txBox="1"/>
+          <p:nvPr/>
+        </p:nvSpPr>
+        <p:spPr>
+          <a:xfrm>
+            <a:off x="1097280" y="2743200"/>
+            <a:ext cx="9966960" cy="365760"/>
+          </a:xfrm>
+          <a:prstGeom prst="rect">
+            <a:avLst/>
+          </a:prstGeom>
+          <a:noFill/>
+        </p:spPr>
+        <p:txBody>
+          <a:bodyPr wrap="square">
+            <a:spAutoFit/>
+          </a:bodyPr>
+          <a:lstStyle/>
+          <a:p>
+            <a:pPr algn="l">
+              <a:defRPr sz="1400" b="0" i="0">
+                <a:solidFill>
+                  <a:srgbClr val="8F95A3"/>
+                </a:solidFill>
+                <a:latin typeface="Calibri"/>
+              </a:defRPr>
+            </a:pPr>
+            <a:r>
+              <a:t>March 13</a:t>
+            </a:r>
+          </a:p>
+        </p:txBody>
+      </p:sp>
+      <p:sp>
+        <p:nvSpPr>
+          <p:cNvPr id="7" name="TextBox 6"/>
+          <p:cNvSpPr txBox="1"/>
+          <p:nvPr/>
+        </p:nvSpPr>
+        <p:spPr>
+          <a:xfrm>
+            <a:off x="1097280" y="3291840"/>
+            <a:ext cx="9966960" cy="914400"/>
+          </a:xfrm>
+          <a:prstGeom prst="rect">
+            <a:avLst/>
+          </a:prstGeom>
+          <a:noFill/>
+        </p:spPr>
+        <p:txBody>
+          <a:bodyPr wrap="square">
+            <a:spAutoFit/>
+          </a:bodyPr>
+          <a:lstStyle/>
+          <a:p>
+            <a:pPr algn="l">
+              <a:defRPr sz="1600" b="0" i="0">
+                <a:solidFill>
+                  <a:srgbClr val="E2E2EA"/>
+                </a:solidFill>
+                <a:latin typeface="Calibri"/>
+              </a:defRPr>
+            </a:pPr>
+            <a:r>
+              <a:t>Wishing you an amazing day filled with joy and celebration!</a:t>
+            </a:r>
+          </a:p>
+        </p:txBody>
+      </p:sp>
+      <p:sp>
+        <p:nvSpPr>
+          <p:cNvPr id="8" name="TextBox 7"/>
+          <p:cNvSpPr txBox="1"/>
+          <p:nvPr/>
+        </p:nvSpPr>
+        <p:spPr>
+          <a:xfrm>
+            <a:off x="1097280" y="4572000"/>
+            <a:ext cx="9966960" cy="457200"/>
+          </a:xfrm>
+          <a:prstGeom prst="rect">
+            <a:avLst/>
+          </a:prstGeom>
+          <a:noFill/>
+        </p:spPr>
+        <p:txBody>
+          <a:bodyPr wrap="square">
+            <a:spAutoFit/>
+          </a:bodyPr>
+          <a:lstStyle/>
+          <a:p>
+            <a:pPr algn="l">
+              <a:defRPr sz="1400" b="0" i="1">
+                <a:solidFill>
+                  <a:srgbClr val="FFB72B"/>
+                </a:solidFill>
+                <a:latin typeface="Calibri"/>
+              </a:defRPr>
+            </a:pPr>
+            <a:r>
+              <a:t>With love, Your Appodeal Team 💜</a:t>
+            </a:r>
+          </a:p>
+        </p:txBody>
+      </p:sp>
+    </p:spTree>
+  </p:cSld>
+  <p:clrMapOvr>
+    <a:masterClrMapping/>
+  </p:clrMapOvr>
+</p:sld>
+</file>
+
+<file path=ppt/slides/slide21.xml><?xml version="1.0" encoding="utf-8"?>
+<p:sld xmlns:a="http://schemas.openxmlformats.org/drawingml/2006/main" xmlns:p="http://schemas.openxmlformats.org/presentationml/2006/main" xmlns:r="http://schemas.openxmlformats.org/officeDocument/2006/relationships">
+  <p:cSld>
+    <p:bg>
+      <p:bgPr>
+        <a:solidFill>
+          <a:srgbClr val="08080C"/>
+        </a:solidFill>
+        <a:effectLst/>
+      </p:bgPr>
+    </p:bg>
+    <p:spTree>
+      <p:nvGrpSpPr>
+        <p:cNvPr id="1" name=""/>
+        <p:cNvGrpSpPr/>
+        <p:nvPr/>
+      </p:nvGrpSpPr>
+      <p:grpSpPr/>
+      <p:sp>
+        <p:nvSpPr>
+          <p:cNvPr id="2" name="Rectangle 1"/>
+          <p:cNvSpPr/>
+          <p:nvPr/>
+        </p:nvSpPr>
+        <p:spPr>
+          <a:xfrm>
+            <a:off x="0" y="365760"/>
+            <a:ext cx="12191695" cy="54864"/>
+          </a:xfrm>
+          <a:prstGeom prst="rect">
+            <a:avLst/>
+          </a:prstGeom>
+          <a:solidFill>
+            <a:srgbClr val="FFB72B"/>
+          </a:solidFill>
+          <a:ln>
+            <a:noFill/>
+          </a:ln>
+        </p:spPr>
+        <p:style>
+          <a:lnRef idx="1">
+            <a:schemeClr val="accent1"/>
+          </a:lnRef>
+          <a:fillRef idx="3">
+            <a:schemeClr val="accent1"/>
+          </a:fillRef>
+          <a:effectRef idx="2">
+            <a:schemeClr val="accent1"/>
+          </a:effectRef>
+          <a:fontRef idx="minor">
+            <a:schemeClr val="lt1"/>
+          </a:fontRef>
+        </p:style>
+        <p:txBody>
+          <a:bodyPr rtlCol="0" anchor="ctr"/>
+          <a:lstStyle/>
+          <a:p>
+            <a:pPr algn="ctr"/>
+          </a:p>
+        </p:txBody>
+      </p:sp>
+      <p:sp>
+        <p:nvSpPr>
+          <p:cNvPr id="3" name="TextBox 2"/>
+          <p:cNvSpPr txBox="1"/>
+          <p:nvPr/>
+        </p:nvSpPr>
+        <p:spPr>
+          <a:xfrm>
+            <a:off x="1097280" y="731520"/>
+            <a:ext cx="3657600" cy="365760"/>
+          </a:xfrm>
+          <a:prstGeom prst="rect">
+            <a:avLst/>
+          </a:prstGeom>
+          <a:noFill/>
+        </p:spPr>
+        <p:txBody>
+          <a:bodyPr wrap="none">
+            <a:spAutoFit/>
+          </a:bodyPr>
+          <a:lstStyle/>
+          <a:p>
+            <a:pPr algn="l">
+              <a:defRPr sz="1000" b="1">
+                <a:solidFill>
+                  <a:srgbClr val="FFB72B"/>
+                </a:solidFill>
+                <a:latin typeface="Calibri"/>
+              </a:defRPr>
+            </a:pPr>
+            <a:r>
+              <a:t>🎂  CELEBRATION</a:t>
+            </a:r>
+          </a:p>
+        </p:txBody>
+      </p:sp>
+      <p:sp>
+        <p:nvSpPr>
+          <p:cNvPr id="4" name="TextBox 3"/>
+          <p:cNvSpPr txBox="1"/>
+          <p:nvPr/>
+        </p:nvSpPr>
+        <p:spPr>
+          <a:xfrm>
+            <a:off x="1097280" y="1188720"/>
+            <a:ext cx="9966960" cy="731520"/>
+          </a:xfrm>
+          <a:prstGeom prst="rect">
+            <a:avLst/>
+          </a:prstGeom>
+          <a:noFill/>
+        </p:spPr>
+        <p:txBody>
+          <a:bodyPr wrap="square">
+            <a:spAutoFit/>
+          </a:bodyPr>
+          <a:lstStyle/>
+          <a:p>
+            <a:pPr algn="l">
+              <a:defRPr sz="3200" b="1" i="0">
+                <a:solidFill>
+                  <a:srgbClr val="FFB72B"/>
+                </a:solidFill>
+                <a:latin typeface="Calibri"/>
+              </a:defRPr>
+            </a:pPr>
+            <a:r>
+              <a:t>Happy Birthday!</a:t>
+            </a:r>
+          </a:p>
+        </p:txBody>
+      </p:sp>
+      <p:sp>
+        <p:nvSpPr>
+          <p:cNvPr id="5" name="TextBox 4"/>
+          <p:cNvSpPr txBox="1"/>
+          <p:nvPr/>
+        </p:nvSpPr>
+        <p:spPr>
+          <a:xfrm>
+            <a:off x="1097280" y="2103120"/>
+            <a:ext cx="9966960" cy="640080"/>
+          </a:xfrm>
+          <a:prstGeom prst="rect">
+            <a:avLst/>
+          </a:prstGeom>
+          <a:noFill/>
+        </p:spPr>
+        <p:txBody>
+          <a:bodyPr wrap="square">
+            <a:spAutoFit/>
+          </a:bodyPr>
+          <a:lstStyle/>
+          <a:p>
+            <a:pPr algn="l">
+              <a:defRPr sz="2800" b="1" i="0">
+                <a:solidFill>
+                  <a:srgbClr val="FFFFFF"/>
+                </a:solidFill>
+                <a:latin typeface="Calibri"/>
+              </a:defRPr>
+            </a:pPr>
+            <a:r>
+              <a:t>Iryna Peretiatko</a:t>
+            </a:r>
+          </a:p>
+        </p:txBody>
+      </p:sp>
+      <p:sp>
+        <p:nvSpPr>
+          <p:cNvPr id="6" name="TextBox 5"/>
+          <p:cNvSpPr txBox="1"/>
+          <p:nvPr/>
+        </p:nvSpPr>
+        <p:spPr>
+          <a:xfrm>
+            <a:off x="1097280" y="2743200"/>
+            <a:ext cx="9966960" cy="365760"/>
+          </a:xfrm>
+          <a:prstGeom prst="rect">
+            <a:avLst/>
+          </a:prstGeom>
+          <a:noFill/>
+        </p:spPr>
+        <p:txBody>
+          <a:bodyPr wrap="square">
+            <a:spAutoFit/>
+          </a:bodyPr>
+          <a:lstStyle/>
+          <a:p>
+            <a:pPr algn="l">
+              <a:defRPr sz="1400" b="0" i="0">
+                <a:solidFill>
+                  <a:srgbClr val="8F95A3"/>
+                </a:solidFill>
+                <a:latin typeface="Calibri"/>
+              </a:defRPr>
+            </a:pPr>
+            <a:r>
+              <a:t>March 13</a:t>
+            </a:r>
+          </a:p>
+        </p:txBody>
+      </p:sp>
+      <p:sp>
+        <p:nvSpPr>
+          <p:cNvPr id="7" name="TextBox 6"/>
+          <p:cNvSpPr txBox="1"/>
+          <p:nvPr/>
+        </p:nvSpPr>
+        <p:spPr>
+          <a:xfrm>
+            <a:off x="1097280" y="3291840"/>
+            <a:ext cx="9966960" cy="914400"/>
+          </a:xfrm>
+          <a:prstGeom prst="rect">
+            <a:avLst/>
+          </a:prstGeom>
+          <a:noFill/>
+        </p:spPr>
+        <p:txBody>
+          <a:bodyPr wrap="square">
+            <a:spAutoFit/>
+          </a:bodyPr>
+          <a:lstStyle/>
+          <a:p>
+            <a:pPr algn="l">
+              <a:defRPr sz="1600" b="0" i="0">
+                <a:solidFill>
+                  <a:srgbClr val="E2E2EA"/>
+                </a:solidFill>
+                <a:latin typeface="Calibri"/>
+              </a:defRPr>
+            </a:pPr>
+            <a:r>
+              <a:t>Wishing you an amazing day filled with joy and celebration!</a:t>
+            </a:r>
+          </a:p>
+        </p:txBody>
+      </p:sp>
+      <p:sp>
+        <p:nvSpPr>
+          <p:cNvPr id="8" name="TextBox 7"/>
+          <p:cNvSpPr txBox="1"/>
+          <p:nvPr/>
+        </p:nvSpPr>
+        <p:spPr>
+          <a:xfrm>
+            <a:off x="1097280" y="4572000"/>
+            <a:ext cx="9966960" cy="457200"/>
+          </a:xfrm>
+          <a:prstGeom prst="rect">
+            <a:avLst/>
+          </a:prstGeom>
+          <a:noFill/>
+        </p:spPr>
+        <p:txBody>
+          <a:bodyPr wrap="square">
+            <a:spAutoFit/>
+          </a:bodyPr>
+          <a:lstStyle/>
+          <a:p>
+            <a:pPr algn="l">
+              <a:defRPr sz="1400" b="0" i="1">
+                <a:solidFill>
+                  <a:srgbClr val="FFB72B"/>
+                </a:solidFill>
+                <a:latin typeface="Calibri"/>
+              </a:defRPr>
+            </a:pPr>
+            <a:r>
+              <a:t>With love, Your Appodeal Team 💜</a:t>
+            </a:r>
+          </a:p>
+        </p:txBody>
+      </p:sp>
+    </p:spTree>
+  </p:cSld>
+  <p:clrMapOvr>
+    <a:masterClrMapping/>
+  </p:clrMapOvr>
+</p:sld>
+</file>
+
+<file path=ppt/slides/slide22.xml><?xml version="1.0" encoding="utf-8"?>
+<p:sld xmlns:a="http://schemas.openxmlformats.org/drawingml/2006/main" xmlns:p="http://schemas.openxmlformats.org/presentationml/2006/main" xmlns:r="http://schemas.openxmlformats.org/officeDocument/2006/relationships">
+  <p:cSld>
+    <p:bg>
+      <p:bgPr>
+        <a:solidFill>
+          <a:srgbClr val="08080C"/>
+        </a:solidFill>
+        <a:effectLst/>
+      </p:bgPr>
+    </p:bg>
+    <p:spTree>
+      <p:nvGrpSpPr>
+        <p:cNvPr id="1" name=""/>
+        <p:cNvGrpSpPr/>
+        <p:nvPr/>
+      </p:nvGrpSpPr>
+      <p:grpSpPr/>
+      <p:sp>
+        <p:nvSpPr>
+          <p:cNvPr id="2" name="Rectangle 1"/>
+          <p:cNvSpPr/>
+          <p:nvPr/>
+        </p:nvSpPr>
+        <p:spPr>
+          <a:xfrm>
+            <a:off x="0" y="365760"/>
+            <a:ext cx="12191695" cy="54864"/>
+          </a:xfrm>
+          <a:prstGeom prst="rect">
+            <a:avLst/>
+          </a:prstGeom>
+          <a:solidFill>
+            <a:srgbClr val="00FFD1"/>
+          </a:solidFill>
+          <a:ln>
+            <a:noFill/>
+          </a:ln>
+        </p:spPr>
+        <p:style>
+          <a:lnRef idx="1">
+            <a:schemeClr val="accent1"/>
+          </a:lnRef>
+          <a:fillRef idx="3">
+            <a:schemeClr val="accent1"/>
+          </a:fillRef>
+          <a:effectRef idx="2">
+            <a:schemeClr val="accent1"/>
+          </a:effectRef>
+          <a:fontRef idx="minor">
+            <a:schemeClr val="lt1"/>
+          </a:fontRef>
+        </p:style>
+        <p:txBody>
+          <a:bodyPr rtlCol="0" anchor="ctr"/>
+          <a:lstStyle/>
+          <a:p>
+            <a:pPr algn="ctr"/>
+          </a:p>
+        </p:txBody>
+      </p:sp>
+      <p:sp>
+        <p:nvSpPr>
+          <p:cNvPr id="3" name="TextBox 2"/>
+          <p:cNvSpPr txBox="1"/>
+          <p:nvPr/>
+        </p:nvSpPr>
+        <p:spPr>
+          <a:xfrm>
+            <a:off x="1097280" y="731520"/>
+            <a:ext cx="3657600" cy="365760"/>
+          </a:xfrm>
+          <a:prstGeom prst="rect">
+            <a:avLst/>
+          </a:prstGeom>
+          <a:noFill/>
+        </p:spPr>
+        <p:txBody>
+          <a:bodyPr wrap="none">
+            <a:spAutoFit/>
+          </a:bodyPr>
+          <a:lstStyle/>
+          <a:p>
+            <a:pPr algn="l">
+              <a:defRPr sz="1000" b="1">
+                <a:solidFill>
+                  <a:srgbClr val="00FFD1"/>
+                </a:solidFill>
+                <a:latin typeface="Calibri"/>
+              </a:defRPr>
+            </a:pPr>
+            <a:r>
+              <a:t>📢  OFFICE LIFE</a:t>
+            </a:r>
+          </a:p>
+        </p:txBody>
+      </p:sp>
+      <p:sp>
+        <p:nvSpPr>
+          <p:cNvPr id="4" name="TextBox 3"/>
+          <p:cNvSpPr txBox="1"/>
+          <p:nvPr/>
+        </p:nvSpPr>
+        <p:spPr>
+          <a:xfrm>
+            <a:off x="1097280" y="1188720"/>
+            <a:ext cx="9966960" cy="731520"/>
+          </a:xfrm>
+          <a:prstGeom prst="rect">
+            <a:avLst/>
+          </a:prstGeom>
+          <a:noFill/>
+        </p:spPr>
+        <p:txBody>
+          <a:bodyPr wrap="square">
+            <a:spAutoFit/>
+          </a:bodyPr>
+          <a:lstStyle/>
+          <a:p>
+            <a:pPr algn="l">
+              <a:defRPr sz="3200" b="1" i="0">
+                <a:solidFill>
+                  <a:srgbClr val="00FFD1"/>
+                </a:solidFill>
+                <a:latin typeface="Calibri"/>
+              </a:defRPr>
+            </a:pPr>
+            <a:r>
+              <a:t>From #general</a:t>
+            </a:r>
+          </a:p>
+        </p:txBody>
+      </p:sp>
+      <p:sp>
+        <p:nvSpPr>
+          <p:cNvPr id="5" name="TextBox 4"/>
+          <p:cNvSpPr txBox="1"/>
+          <p:nvPr/>
+        </p:nvSpPr>
+        <p:spPr>
+          <a:xfrm>
+            <a:off x="1097280" y="2103120"/>
+            <a:ext cx="9966960" cy="457200"/>
+          </a:xfrm>
+          <a:prstGeom prst="rect">
+            <a:avLst/>
+          </a:prstGeom>
+          <a:noFill/>
+        </p:spPr>
+        <p:txBody>
+          <a:bodyPr wrap="square">
+            <a:spAutoFit/>
+          </a:bodyPr>
+          <a:lstStyle/>
+          <a:p>
+            <a:pPr algn="l">
+              <a:defRPr sz="1800" b="1" i="0">
+                <a:solidFill>
+                  <a:srgbClr val="FFFFFF"/>
+                </a:solidFill>
+                <a:latin typeface="Calibri"/>
+              </a:defRPr>
+            </a:pPr>
+            <a:r>
+              <a:t>:wave: Hello everyone &lt;!channel&gt;!</a:t>
+            </a:r>
+            <a:br/>
+            <a:br/>
+            <a:r>
+              <a:t>I’d like to share a cool thing our DevOps tea...</a:t>
+            </a:r>
+          </a:p>
+        </p:txBody>
+      </p:sp>
+      <p:sp>
+        <p:nvSpPr>
+          <p:cNvPr id="6" name="TextBox 5"/>
+          <p:cNvSpPr txBox="1"/>
+          <p:nvPr/>
+        </p:nvSpPr>
+        <p:spPr>
+          <a:xfrm>
+            <a:off x="1371600" y="2743200"/>
+            <a:ext cx="9692640" cy="1828800"/>
+          </a:xfrm>
+          <a:prstGeom prst="rect">
+            <a:avLst/>
+          </a:prstGeom>
+          <a:noFill/>
+        </p:spPr>
+        <p:txBody>
+          <a:bodyPr wrap="square">
+            <a:spAutoFit/>
+          </a:bodyPr>
+          <a:lstStyle/>
+          <a:p>
+            <a:pPr algn="l">
+              <a:defRPr sz="1500" b="0" i="1">
+                <a:solidFill>
+                  <a:srgbClr val="E2E2EA"/>
+                </a:solidFill>
+                <a:latin typeface="Calibri"/>
+              </a:defRPr>
+            </a:pPr>
+            <a:r>
+              <a:t>":wave: Hello everyone &lt;!channel&gt;!</a:t>
+            </a:r>
+            <a:br/>
+            <a:br/>
+            <a:r>
+              <a:t>I’d like to share a cool thing our DevOps team has set up for all of us.</a:t>
+            </a:r>
+            <a:br/>
+            <a:r>
+              <a:t>Introducing *&lt;https://coolify.appodeal.com|Coolify&gt;* - a service that allows you to deploy your applications in just a few clicks.</a:t>
+            </a:r>
+            <a:br/>
+            <a:r>
+              <a:t>:memo: I’ve written a short guide on how to use it &lt;https://a"</a:t>
+            </a:r>
+          </a:p>
+        </p:txBody>
+      </p:sp>
+      <p:sp>
+        <p:nvSpPr>
+          <p:cNvPr id="7" name="TextBox 6"/>
+          <p:cNvSpPr txBox="1"/>
+          <p:nvPr/>
+        </p:nvSpPr>
+        <p:spPr>
+          <a:xfrm>
+            <a:off x="1097280" y="4754880"/>
+            <a:ext cx="9966960" cy="365760"/>
+          </a:xfrm>
+          <a:prstGeom prst="rect">
+            <a:avLst/>
+          </a:prstGeom>
+          <a:noFill/>
+        </p:spPr>
+        <p:txBody>
+          <a:bodyPr wrap="square">
+            <a:spAutoFit/>
+          </a:bodyPr>
+          <a:lstStyle/>
+          <a:p>
+            <a:pPr algn="l">
+              <a:defRPr sz="1400" b="0" i="0">
+                <a:solidFill>
+                  <a:srgbClr val="8F95A3"/>
+                </a:solidFill>
+                <a:latin typeface="Calibri"/>
+              </a:defRPr>
+            </a:pPr>
+            <a:r>
+              <a:t>— Gleb Krahotkin</a:t>
+            </a:r>
+          </a:p>
+        </p:txBody>
+      </p:sp>
+      <p:sp>
+        <p:nvSpPr>
+          <p:cNvPr id="8" name="TextBox 7"/>
+          <p:cNvSpPr txBox="1"/>
+          <p:nvPr/>
+        </p:nvSpPr>
+        <p:spPr>
+          <a:xfrm>
+            <a:off x="1097280" y="5760720"/>
+            <a:ext cx="9966960" cy="274320"/>
+          </a:xfrm>
+          <a:prstGeom prst="rect">
+            <a:avLst/>
+          </a:prstGeom>
+          <a:noFill/>
+        </p:spPr>
+        <p:txBody>
+          <a:bodyPr wrap="square">
+            <a:spAutoFit/>
+          </a:bodyPr>
+          <a:lstStyle/>
+          <a:p>
+            <a:pPr algn="l">
+              <a:defRPr sz="1100" b="0" i="0">
+                <a:solidFill>
+                  <a:srgbClr val="5C6270"/>
+                </a:solidFill>
+                <a:latin typeface="Calibri"/>
+              </a:defRPr>
+            </a:pPr>
+            <a:r>
+              <a:t>#general</a:t>
+            </a:r>
+          </a:p>
+        </p:txBody>
+      </p:sp>
+    </p:spTree>
+  </p:cSld>
+  <p:clrMapOvr>
+    <a:masterClrMapping/>
+  </p:clrMapOvr>
+</p:sld>
+</file>
+
+<file path=ppt/slides/slide23.xml><?xml version="1.0" encoding="utf-8"?>
+<p:sld xmlns:a="http://schemas.openxmlformats.org/drawingml/2006/main" xmlns:p="http://schemas.openxmlformats.org/presentationml/2006/main" xmlns:r="http://schemas.openxmlformats.org/officeDocument/2006/relationships">
+  <p:cSld>
+    <p:bg>
+      <p:bgPr>
+        <a:solidFill>
+          <a:srgbClr val="08080C"/>
+        </a:solidFill>
+        <a:effectLst/>
+      </p:bgPr>
+    </p:bg>
+    <p:spTree>
+      <p:nvGrpSpPr>
+        <p:cNvPr id="1" name=""/>
+        <p:cNvGrpSpPr/>
+        <p:nvPr/>
+      </p:nvGrpSpPr>
+      <p:grpSpPr/>
+      <p:sp>
+        <p:nvSpPr>
+          <p:cNvPr id="2" name="Rectangle 1"/>
+          <p:cNvSpPr/>
+          <p:nvPr/>
+        </p:nvSpPr>
+        <p:spPr>
+          <a:xfrm>
+            <a:off x="0" y="365760"/>
+            <a:ext cx="12191695" cy="54864"/>
+          </a:xfrm>
+          <a:prstGeom prst="rect">
+            <a:avLst/>
+          </a:prstGeom>
+          <a:solidFill>
+            <a:srgbClr val="00FFD1"/>
+          </a:solidFill>
+          <a:ln>
+            <a:noFill/>
+          </a:ln>
+        </p:spPr>
+        <p:style>
+          <a:lnRef idx="1">
+            <a:schemeClr val="accent1"/>
+          </a:lnRef>
+          <a:fillRef idx="3">
+            <a:schemeClr val="accent1"/>
+          </a:fillRef>
+          <a:effectRef idx="2">
+            <a:schemeClr val="accent1"/>
+          </a:effectRef>
+          <a:fontRef idx="minor">
+            <a:schemeClr val="lt1"/>
+          </a:fontRef>
+        </p:style>
+        <p:txBody>
+          <a:bodyPr rtlCol="0" anchor="ctr"/>
+          <a:lstStyle/>
+          <a:p>
+            <a:pPr algn="ctr"/>
+          </a:p>
+        </p:txBody>
+      </p:sp>
+      <p:sp>
+        <p:nvSpPr>
+          <p:cNvPr id="3" name="TextBox 2"/>
+          <p:cNvSpPr txBox="1"/>
+          <p:nvPr/>
+        </p:nvSpPr>
+        <p:spPr>
+          <a:xfrm>
+            <a:off x="1097280" y="731520"/>
+            <a:ext cx="3657600" cy="365760"/>
+          </a:xfrm>
+          <a:prstGeom prst="rect">
+            <a:avLst/>
+          </a:prstGeom>
+          <a:noFill/>
+        </p:spPr>
+        <p:txBody>
+          <a:bodyPr wrap="none">
+            <a:spAutoFit/>
+          </a:bodyPr>
+          <a:lstStyle/>
+          <a:p>
+            <a:pPr algn="l">
+              <a:defRPr sz="1000" b="1">
+                <a:solidFill>
+                  <a:srgbClr val="00FFD1"/>
+                </a:solidFill>
+                <a:latin typeface="Calibri"/>
+              </a:defRPr>
+            </a:pPr>
+            <a:r>
+              <a:t>📢  OFFICE LIFE</a:t>
+            </a:r>
+          </a:p>
+        </p:txBody>
+      </p:sp>
+      <p:sp>
+        <p:nvSpPr>
+          <p:cNvPr id="4" name="TextBox 3"/>
+          <p:cNvSpPr txBox="1"/>
+          <p:nvPr/>
+        </p:nvSpPr>
+        <p:spPr>
+          <a:xfrm>
+            <a:off x="1097280" y="1188720"/>
+            <a:ext cx="9966960" cy="731520"/>
+          </a:xfrm>
+          <a:prstGeom prst="rect">
+            <a:avLst/>
+          </a:prstGeom>
+          <a:noFill/>
+        </p:spPr>
+        <p:txBody>
+          <a:bodyPr wrap="square">
+            <a:spAutoFit/>
+          </a:bodyPr>
+          <a:lstStyle/>
+          <a:p>
+            <a:pPr algn="l">
+              <a:defRPr sz="3200" b="1" i="0">
+                <a:solidFill>
+                  <a:srgbClr val="00FFD1"/>
+                </a:solidFill>
+                <a:latin typeface="Calibri"/>
+              </a:defRPr>
+            </a:pPr>
+            <a:r>
+              <a:t>From #general</a:t>
+            </a:r>
+          </a:p>
+        </p:txBody>
+      </p:sp>
+      <p:sp>
+        <p:nvSpPr>
+          <p:cNvPr id="5" name="TextBox 4"/>
+          <p:cNvSpPr txBox="1"/>
+          <p:nvPr/>
+        </p:nvSpPr>
+        <p:spPr>
+          <a:xfrm>
+            <a:off x="1097280" y="2103120"/>
+            <a:ext cx="9966960" cy="457200"/>
+          </a:xfrm>
+          <a:prstGeom prst="rect">
+            <a:avLst/>
+          </a:prstGeom>
+          <a:noFill/>
+        </p:spPr>
+        <p:txBody>
+          <a:bodyPr wrap="square">
+            <a:spAutoFit/>
+          </a:bodyPr>
+          <a:lstStyle/>
+          <a:p>
+            <a:pPr algn="l">
+              <a:defRPr sz="1800" b="1" i="0">
+                <a:solidFill>
+                  <a:srgbClr val="FFFFFF"/>
+                </a:solidFill>
+                <a:latin typeface="Calibri"/>
+              </a:defRPr>
+            </a:pPr>
+            <a:r>
+              <a:t>Hi &lt;!here&gt;! :woman-raising-hand: Thank you for joining our *11th Lunch &amp; Learn s...</a:t>
+            </a:r>
+          </a:p>
+        </p:txBody>
+      </p:sp>
+      <p:sp>
+        <p:nvSpPr>
+          <p:cNvPr id="6" name="TextBox 5"/>
+          <p:cNvSpPr txBox="1"/>
+          <p:nvPr/>
+        </p:nvSpPr>
+        <p:spPr>
+          <a:xfrm>
+            <a:off x="1371600" y="2743200"/>
+            <a:ext cx="9692640" cy="1828800"/>
+          </a:xfrm>
+          <a:prstGeom prst="rect">
+            <a:avLst/>
+          </a:prstGeom>
+          <a:noFill/>
+        </p:spPr>
+        <p:txBody>
+          <a:bodyPr wrap="square">
+            <a:spAutoFit/>
+          </a:bodyPr>
+          <a:lstStyle/>
+          <a:p>
+            <a:pPr algn="l">
+              <a:defRPr sz="1500" b="0" i="1">
+                <a:solidFill>
+                  <a:srgbClr val="E2E2EA"/>
+                </a:solidFill>
+                <a:latin typeface="Calibri"/>
+              </a:defRPr>
+            </a:pPr>
+            <a:r>
+              <a:t>"Hi &lt;!here&gt;! :woman-raising-hand: Thank you for joining our *11th Lunch &amp; Learn session!* :fire:</a:t>
+            </a:r>
+            <a:br/>
+            <a:r>
+              <a:t>A big thank-you to &lt;@U23FJLW5S&gt; for a very interesting presentation :heart:</a:t>
+            </a:r>
+            <a:br/>
+            <a:r>
+              <a:t>Below you can find:</a:t>
+            </a:r>
+            <a:br/>
+            <a:r>
+              <a:t>• :movie_camera: &lt;https://app.fireflies.ai/view/Lunch-and-Learn-How-we-detect-fraud-traffic-by-Timofey-Levan"</a:t>
+            </a:r>
+          </a:p>
+        </p:txBody>
+      </p:sp>
+      <p:sp>
+        <p:nvSpPr>
+          <p:cNvPr id="7" name="TextBox 6"/>
+          <p:cNvSpPr txBox="1"/>
+          <p:nvPr/>
+        </p:nvSpPr>
+        <p:spPr>
+          <a:xfrm>
+            <a:off x="1097280" y="4754880"/>
+            <a:ext cx="9966960" cy="365760"/>
+          </a:xfrm>
+          <a:prstGeom prst="rect">
+            <a:avLst/>
+          </a:prstGeom>
+          <a:noFill/>
+        </p:spPr>
+        <p:txBody>
+          <a:bodyPr wrap="square">
+            <a:spAutoFit/>
+          </a:bodyPr>
+          <a:lstStyle/>
+          <a:p>
+            <a:pPr algn="l">
+              <a:defRPr sz="1400" b="0" i="0">
+                <a:solidFill>
+                  <a:srgbClr val="8F95A3"/>
+                </a:solidFill>
+                <a:latin typeface="Calibri"/>
+              </a:defRPr>
+            </a:pPr>
+            <a:r>
+              <a:t>— Katarzyna Raniszewska</a:t>
+            </a:r>
+          </a:p>
+        </p:txBody>
+      </p:sp>
+      <p:sp>
+        <p:nvSpPr>
+          <p:cNvPr id="8" name="TextBox 7"/>
+          <p:cNvSpPr txBox="1"/>
+          <p:nvPr/>
+        </p:nvSpPr>
+        <p:spPr>
+          <a:xfrm>
+            <a:off x="1097280" y="5760720"/>
+            <a:ext cx="9966960" cy="274320"/>
+          </a:xfrm>
+          <a:prstGeom prst="rect">
+            <a:avLst/>
+          </a:prstGeom>
+          <a:noFill/>
+        </p:spPr>
+        <p:txBody>
+          <a:bodyPr wrap="square">
+            <a:spAutoFit/>
+          </a:bodyPr>
+          <a:lstStyle/>
+          <a:p>
+            <a:pPr algn="l">
+              <a:defRPr sz="1100" b="0" i="0">
+                <a:solidFill>
+                  <a:srgbClr val="5C6270"/>
+                </a:solidFill>
+                <a:latin typeface="Calibri"/>
+              </a:defRPr>
+            </a:pPr>
+            <a:r>
+              <a:t>#general</a:t>
+            </a:r>
+          </a:p>
+        </p:txBody>
+      </p:sp>
+    </p:spTree>
+  </p:cSld>
+  <p:clrMapOvr>
+    <a:masterClrMapping/>
+  </p:clrMapOvr>
+</p:sld>
+</file>
+
+<file path=ppt/slides/slide24.xml><?xml version="1.0" encoding="utf-8"?>
+<p:sld xmlns:a="http://schemas.openxmlformats.org/drawingml/2006/main" xmlns:p="http://schemas.openxmlformats.org/presentationml/2006/main" xmlns:r="http://schemas.openxmlformats.org/officeDocument/2006/relationships">
+  <p:cSld>
+    <p:bg>
+      <p:bgPr>
+        <a:solidFill>
+          <a:srgbClr val="08080C"/>
+        </a:solidFill>
+        <a:effectLst/>
+      </p:bgPr>
+    </p:bg>
+    <p:spTree>
+      <p:nvGrpSpPr>
+        <p:cNvPr id="1" name=""/>
+        <p:cNvGrpSpPr/>
+        <p:nvPr/>
+      </p:nvGrpSpPr>
+      <p:grpSpPr/>
+      <p:sp>
+        <p:nvSpPr>
+          <p:cNvPr id="2" name="Rectangle 1"/>
+          <p:cNvSpPr/>
+          <p:nvPr/>
+        </p:nvSpPr>
+        <p:spPr>
+          <a:xfrm>
+            <a:off x="0" y="365760"/>
+            <a:ext cx="12191695" cy="54864"/>
+          </a:xfrm>
+          <a:prstGeom prst="rect">
+            <a:avLst/>
+          </a:prstGeom>
+          <a:solidFill>
+            <a:srgbClr val="00FFD1"/>
+          </a:solidFill>
+          <a:ln>
+            <a:noFill/>
+          </a:ln>
+        </p:spPr>
+        <p:style>
+          <a:lnRef idx="1">
+            <a:schemeClr val="accent1"/>
+          </a:lnRef>
+          <a:fillRef idx="3">
+            <a:schemeClr val="accent1"/>
+          </a:fillRef>
+          <a:effectRef idx="2">
+            <a:schemeClr val="accent1"/>
+          </a:effectRef>
+          <a:fontRef idx="minor">
+            <a:schemeClr val="lt1"/>
+          </a:fontRef>
+        </p:style>
+        <p:txBody>
+          <a:bodyPr rtlCol="0" anchor="ctr"/>
+          <a:lstStyle/>
+          <a:p>
+            <a:pPr algn="ctr"/>
+          </a:p>
+        </p:txBody>
+      </p:sp>
+      <p:sp>
+        <p:nvSpPr>
+          <p:cNvPr id="3" name="TextBox 2"/>
+          <p:cNvSpPr txBox="1"/>
+          <p:nvPr/>
+        </p:nvSpPr>
+        <p:spPr>
+          <a:xfrm>
+            <a:off x="1097280" y="731520"/>
+            <a:ext cx="3657600" cy="365760"/>
+          </a:xfrm>
+          <a:prstGeom prst="rect">
+            <a:avLst/>
+          </a:prstGeom>
+          <a:noFill/>
+        </p:spPr>
+        <p:txBody>
+          <a:bodyPr wrap="none">
+            <a:spAutoFit/>
+          </a:bodyPr>
+          <a:lstStyle/>
+          <a:p>
+            <a:pPr algn="l">
+              <a:defRPr sz="1000" b="1">
+                <a:solidFill>
+                  <a:srgbClr val="00FFD1"/>
+                </a:solidFill>
+                <a:latin typeface="Calibri"/>
+              </a:defRPr>
+            </a:pPr>
+            <a:r>
+              <a:t>📢  OFFICE LIFE</a:t>
+            </a:r>
+          </a:p>
+        </p:txBody>
+      </p:sp>
+      <p:sp>
+        <p:nvSpPr>
+          <p:cNvPr id="4" name="TextBox 3"/>
+          <p:cNvSpPr txBox="1"/>
+          <p:nvPr/>
+        </p:nvSpPr>
+        <p:spPr>
+          <a:xfrm>
+            <a:off x="1097280" y="1188720"/>
+            <a:ext cx="9966960" cy="731520"/>
+          </a:xfrm>
+          <a:prstGeom prst="rect">
+            <a:avLst/>
+          </a:prstGeom>
+          <a:noFill/>
+        </p:spPr>
+        <p:txBody>
+          <a:bodyPr wrap="square">
+            <a:spAutoFit/>
+          </a:bodyPr>
+          <a:lstStyle/>
+          <a:p>
+            <a:pPr algn="l">
+              <a:defRPr sz="3200" b="1" i="0">
+                <a:solidFill>
+                  <a:srgbClr val="00FFD1"/>
+                </a:solidFill>
+                <a:latin typeface="Calibri"/>
+              </a:defRPr>
+            </a:pPr>
+            <a:r>
+              <a:t>From #general</a:t>
+            </a:r>
+          </a:p>
+        </p:txBody>
+      </p:sp>
+      <p:sp>
+        <p:nvSpPr>
+          <p:cNvPr id="5" name="TextBox 4"/>
+          <p:cNvSpPr txBox="1"/>
+          <p:nvPr/>
+        </p:nvSpPr>
+        <p:spPr>
+          <a:xfrm>
+            <a:off x="1097280" y="2103120"/>
+            <a:ext cx="9966960" cy="457200"/>
+          </a:xfrm>
+          <a:prstGeom prst="rect">
+            <a:avLst/>
+          </a:prstGeom>
+          <a:noFill/>
+        </p:spPr>
+        <p:txBody>
+          <a:bodyPr wrap="square">
+            <a:spAutoFit/>
+          </a:bodyPr>
+          <a:lstStyle/>
+          <a:p>
+            <a:pPr algn="l">
+              <a:defRPr sz="1800" b="1" i="0">
+                <a:solidFill>
+                  <a:srgbClr val="FFFFFF"/>
+                </a:solidFill>
+                <a:latin typeface="Calibri"/>
+              </a:defRPr>
+            </a:pPr>
+            <a:r>
+              <a:t>&lt;!channel&gt; Team,</a:t>
+            </a:r>
+            <a:br/>
+            <a:r>
+              <a:t>Anna is &lt;https://appodeal.slack.com/archives/C08RDS0MU2F/p17730...</a:t>
+            </a:r>
+          </a:p>
+        </p:txBody>
+      </p:sp>
+      <p:sp>
+        <p:nvSpPr>
+          <p:cNvPr id="6" name="TextBox 5"/>
+          <p:cNvSpPr txBox="1"/>
+          <p:nvPr/>
+        </p:nvSpPr>
+        <p:spPr>
+          <a:xfrm>
+            <a:off x="1371600" y="2743200"/>
+            <a:ext cx="9692640" cy="1828800"/>
+          </a:xfrm>
+          <a:prstGeom prst="rect">
+            <a:avLst/>
+          </a:prstGeom>
+          <a:noFill/>
+        </p:spPr>
+        <p:txBody>
+          <a:bodyPr wrap="square">
+            <a:spAutoFit/>
+          </a:bodyPr>
+          <a:lstStyle/>
+          <a:p>
+            <a:pPr algn="l">
+              <a:defRPr sz="1500" b="0" i="1">
+                <a:solidFill>
+                  <a:srgbClr val="E2E2EA"/>
+                </a:solidFill>
+                <a:latin typeface="Calibri"/>
+              </a:defRPr>
+            </a:pPr>
+            <a:r>
+              <a:t>"&lt;!channel&gt; Team,</a:t>
+            </a:r>
+            <a:br/>
+            <a:r>
+              <a:t>Anna is &lt;https://appodeal.slack.com/archives/C08RDS0MU2F/p1773043372580949|starting&gt; a reading club around the book _The 4 Disciplines of Execution_, and I encourage everyone to join.</a:t>
+            </a:r>
+            <a:br/>
+            <a:br/>
+            <a:r>
+              <a:t>The book focuses on four core concepts:</a:t>
+            </a:r>
+            <a:br/>
+            <a:r>
+              <a:t>• *Wildly Important Goals (WIGs)*</a:t>
+            </a:r>
+            <a:br/>
+            <a:r>
+              <a:t>• *Leading and Lagging M"</a:t>
+            </a:r>
+          </a:p>
+        </p:txBody>
+      </p:sp>
+      <p:sp>
+        <p:nvSpPr>
+          <p:cNvPr id="7" name="TextBox 6"/>
+          <p:cNvSpPr txBox="1"/>
+          <p:nvPr/>
+        </p:nvSpPr>
+        <p:spPr>
+          <a:xfrm>
+            <a:off x="1097280" y="4754880"/>
+            <a:ext cx="9966960" cy="365760"/>
+          </a:xfrm>
+          <a:prstGeom prst="rect">
+            <a:avLst/>
+          </a:prstGeom>
+          <a:noFill/>
+        </p:spPr>
+        <p:txBody>
+          <a:bodyPr wrap="square">
+            <a:spAutoFit/>
+          </a:bodyPr>
+          <a:lstStyle/>
+          <a:p>
+            <a:pPr algn="l">
+              <a:defRPr sz="1400" b="0" i="0">
+                <a:solidFill>
+                  <a:srgbClr val="8F95A3"/>
+                </a:solidFill>
+                <a:latin typeface="Calibri"/>
+              </a:defRPr>
+            </a:pPr>
+            <a:r>
+              <a:t>— Pavel Golubev</a:t>
+            </a:r>
+          </a:p>
+        </p:txBody>
+      </p:sp>
+      <p:sp>
+        <p:nvSpPr>
+          <p:cNvPr id="8" name="TextBox 7"/>
+          <p:cNvSpPr txBox="1"/>
+          <p:nvPr/>
+        </p:nvSpPr>
+        <p:spPr>
+          <a:xfrm>
+            <a:off x="1097280" y="5760720"/>
+            <a:ext cx="9966960" cy="274320"/>
+          </a:xfrm>
+          <a:prstGeom prst="rect">
+            <a:avLst/>
+          </a:prstGeom>
+          <a:noFill/>
+        </p:spPr>
+        <p:txBody>
+          <a:bodyPr wrap="square">
+            <a:spAutoFit/>
+          </a:bodyPr>
+          <a:lstStyle/>
+          <a:p>
+            <a:pPr algn="l">
+              <a:defRPr sz="1100" b="0" i="0">
+                <a:solidFill>
+                  <a:srgbClr val="5C6270"/>
+                </a:solidFill>
+                <a:latin typeface="Calibri"/>
+              </a:defRPr>
+            </a:pPr>
+            <a:r>
+              <a:t>#general</a:t>
             </a:r>
           </a:p>
         </p:txBody>
@@ -3579,7 +7922,7 @@
             <a:avLst/>
           </a:prstGeom>
           <a:solidFill>
-            <a:srgbClr val="00FFD1"/>
+            <a:srgbClr val="FFB72B"/>
           </a:solidFill>
           <a:ln>
             <a:noFill/>
@@ -3632,13 +7975,13 @@
             <a:pPr algn="l">
               <a:defRPr sz="1000" b="1">
                 <a:solidFill>
-                  <a:srgbClr val="00FFD1"/>
-                </a:solidFill>
-                <a:latin typeface="Calibri"/>
-              </a:defRPr>
-            </a:pPr>
-            <a:r>
-              <a:t>📢  OFFICE LIFE</a:t>
+                  <a:srgbClr val="FFB72B"/>
+                </a:solidFill>
+                <a:latin typeface="Calibri"/>
+              </a:defRPr>
+            </a:pPr>
+            <a:r>
+              <a:t>🎂  CELEBRATION</a:t>
             </a:r>
           </a:p>
         </p:txBody>
@@ -3668,13 +8011,13 @@
             <a:pPr algn="l">
               <a:defRPr sz="3200" b="1" i="0">
                 <a:solidFill>
-                  <a:srgbClr val="00FFD1"/>
-                </a:solidFill>
-                <a:latin typeface="Calibri"/>
-              </a:defRPr>
-            </a:pPr>
-            <a:r>
-              <a:t>From #general</a:t>
+                  <a:srgbClr val="FFB72B"/>
+                </a:solidFill>
+                <a:latin typeface="Calibri"/>
+              </a:defRPr>
+            </a:pPr>
+            <a:r>
+              <a:t>Happy Birthday!</a:t>
             </a:r>
           </a:p>
         </p:txBody>
@@ -3688,6 +8031,114 @@
         <p:spPr>
           <a:xfrm>
             <a:off x="1097280" y="2103120"/>
+            <a:ext cx="9966960" cy="640080"/>
+          </a:xfrm>
+          <a:prstGeom prst="rect">
+            <a:avLst/>
+          </a:prstGeom>
+          <a:noFill/>
+        </p:spPr>
+        <p:txBody>
+          <a:bodyPr wrap="square">
+            <a:spAutoFit/>
+          </a:bodyPr>
+          <a:lstStyle/>
+          <a:p>
+            <a:pPr algn="l">
+              <a:defRPr sz="2800" b="1" i="0">
+                <a:solidFill>
+                  <a:srgbClr val="FFFFFF"/>
+                </a:solidFill>
+                <a:latin typeface="Calibri"/>
+              </a:defRPr>
+            </a:pPr>
+            <a:r>
+              <a:t>Liliya Garifullina</a:t>
+            </a:r>
+          </a:p>
+        </p:txBody>
+      </p:sp>
+      <p:sp>
+        <p:nvSpPr>
+          <p:cNvPr id="6" name="TextBox 5"/>
+          <p:cNvSpPr txBox="1"/>
+          <p:nvPr/>
+        </p:nvSpPr>
+        <p:spPr>
+          <a:xfrm>
+            <a:off x="1097280" y="2743200"/>
+            <a:ext cx="9966960" cy="365760"/>
+          </a:xfrm>
+          <a:prstGeom prst="rect">
+            <a:avLst/>
+          </a:prstGeom>
+          <a:noFill/>
+        </p:spPr>
+        <p:txBody>
+          <a:bodyPr wrap="square">
+            <a:spAutoFit/>
+          </a:bodyPr>
+          <a:lstStyle/>
+          <a:p>
+            <a:pPr algn="l">
+              <a:defRPr sz="1400" b="0" i="0">
+                <a:solidFill>
+                  <a:srgbClr val="8F95A3"/>
+                </a:solidFill>
+                <a:latin typeface="Calibri"/>
+              </a:defRPr>
+            </a:pPr>
+            <a:r>
+              <a:t>March 13</a:t>
+            </a:r>
+          </a:p>
+        </p:txBody>
+      </p:sp>
+      <p:sp>
+        <p:nvSpPr>
+          <p:cNvPr id="7" name="TextBox 6"/>
+          <p:cNvSpPr txBox="1"/>
+          <p:nvPr/>
+        </p:nvSpPr>
+        <p:spPr>
+          <a:xfrm>
+            <a:off x="1097280" y="3291840"/>
+            <a:ext cx="9966960" cy="914400"/>
+          </a:xfrm>
+          <a:prstGeom prst="rect">
+            <a:avLst/>
+          </a:prstGeom>
+          <a:noFill/>
+        </p:spPr>
+        <p:txBody>
+          <a:bodyPr wrap="square">
+            <a:spAutoFit/>
+          </a:bodyPr>
+          <a:lstStyle/>
+          <a:p>
+            <a:pPr algn="l">
+              <a:defRPr sz="1600" b="0" i="0">
+                <a:solidFill>
+                  <a:srgbClr val="E2E2EA"/>
+                </a:solidFill>
+                <a:latin typeface="Calibri"/>
+              </a:defRPr>
+            </a:pPr>
+            <a:r>
+              <a:t>Wishing you an amazing day filled with joy and celebration!</a:t>
+            </a:r>
+          </a:p>
+        </p:txBody>
+      </p:sp>
+      <p:sp>
+        <p:nvSpPr>
+          <p:cNvPr id="8" name="TextBox 7"/>
+          <p:cNvSpPr txBox="1"/>
+          <p:nvPr/>
+        </p:nvSpPr>
+        <p:spPr>
+          <a:xfrm>
+            <a:off x="1097280" y="4572000"/>
             <a:ext cx="9966960" cy="457200"/>
           </a:xfrm>
           <a:prstGeom prst="rect">
@@ -3702,123 +8153,15 @@
           <a:lstStyle/>
           <a:p>
             <a:pPr algn="l">
-              <a:defRPr sz="1800" b="1" i="0">
-                <a:solidFill>
-                  <a:srgbClr val="FFFFFF"/>
-                </a:solidFill>
-                <a:latin typeface="Calibri"/>
-              </a:defRPr>
-            </a:pPr>
-            <a:r>
-              <a:t>Hello everyone ! I’d like to share a cool thing our DevOps team has set up for a...</a:t>
-            </a:r>
-          </a:p>
-        </p:txBody>
-      </p:sp>
-      <p:sp>
-        <p:nvSpPr>
-          <p:cNvPr id="6" name="TextBox 5"/>
-          <p:cNvSpPr txBox="1"/>
-          <p:nvPr/>
-        </p:nvSpPr>
-        <p:spPr>
-          <a:xfrm>
-            <a:off x="1371600" y="2743200"/>
-            <a:ext cx="9692640" cy="1828800"/>
-          </a:xfrm>
-          <a:prstGeom prst="rect">
-            <a:avLst/>
-          </a:prstGeom>
-          <a:noFill/>
-        </p:spPr>
-        <p:txBody>
-          <a:bodyPr wrap="square">
-            <a:spAutoFit/>
-          </a:bodyPr>
-          <a:lstStyle/>
-          <a:p>
-            <a:pPr algn="l">
-              <a:defRPr sz="1500" b="0" i="1">
-                <a:solidFill>
-                  <a:srgbClr val="E2E2EA"/>
-                </a:solidFill>
-                <a:latin typeface="Calibri"/>
-              </a:defRPr>
-            </a:pPr>
-            <a:r>
-              <a:t>"Hello everyone ! I’d like to share a cool thing our DevOps team has set up for all of us. Introducing Coolify - a service that allows you to deploy your applications in just a few clicks. I’ve written a short guide on how to use it here. &gt; Unfortunately, AI doesn’t always generate secure application"</a:t>
-            </a:r>
-          </a:p>
-        </p:txBody>
-      </p:sp>
-      <p:sp>
-        <p:nvSpPr>
-          <p:cNvPr id="7" name="TextBox 6"/>
-          <p:cNvSpPr txBox="1"/>
-          <p:nvPr/>
-        </p:nvSpPr>
-        <p:spPr>
-          <a:xfrm>
-            <a:off x="1097280" y="4754880"/>
-            <a:ext cx="9966960" cy="365760"/>
-          </a:xfrm>
-          <a:prstGeom prst="rect">
-            <a:avLst/>
-          </a:prstGeom>
-          <a:noFill/>
-        </p:spPr>
-        <p:txBody>
-          <a:bodyPr wrap="square">
-            <a:spAutoFit/>
-          </a:bodyPr>
-          <a:lstStyle/>
-          <a:p>
-            <a:pPr algn="l">
-              <a:defRPr sz="1400" b="0" i="0">
-                <a:solidFill>
-                  <a:srgbClr val="8F95A3"/>
-                </a:solidFill>
-                <a:latin typeface="Calibri"/>
-              </a:defRPr>
-            </a:pPr>
-            <a:r>
-              <a:t>— Gleb Krahotkin</a:t>
-            </a:r>
-          </a:p>
-        </p:txBody>
-      </p:sp>
-      <p:sp>
-        <p:nvSpPr>
-          <p:cNvPr id="8" name="TextBox 7"/>
-          <p:cNvSpPr txBox="1"/>
-          <p:nvPr/>
-        </p:nvSpPr>
-        <p:spPr>
-          <a:xfrm>
-            <a:off x="1097280" y="5760720"/>
-            <a:ext cx="9966960" cy="274320"/>
-          </a:xfrm>
-          <a:prstGeom prst="rect">
-            <a:avLst/>
-          </a:prstGeom>
-          <a:noFill/>
-        </p:spPr>
-        <p:txBody>
-          <a:bodyPr wrap="square">
-            <a:spAutoFit/>
-          </a:bodyPr>
-          <a:lstStyle/>
-          <a:p>
-            <a:pPr algn="l">
-              <a:defRPr sz="1100" b="0" i="0">
-                <a:solidFill>
-                  <a:srgbClr val="5C6270"/>
-                </a:solidFill>
-                <a:latin typeface="Calibri"/>
-              </a:defRPr>
-            </a:pPr>
-            <a:r>
-              <a:t>#general</a:t>
+              <a:defRPr sz="1400" b="0" i="1">
+                <a:solidFill>
+                  <a:srgbClr val="FFB72B"/>
+                </a:solidFill>
+                <a:latin typeface="Calibri"/>
+              </a:defRPr>
+            </a:pPr>
+            <a:r>
+              <a:t>With love, Your Appodeal Team 💜</a:t>
             </a:r>
           </a:p>
         </p:txBody>
@@ -3864,7 +8207,7 @@
             <a:avLst/>
           </a:prstGeom>
           <a:solidFill>
-            <a:srgbClr val="00FFD1"/>
+            <a:srgbClr val="FFB72B"/>
           </a:solidFill>
           <a:ln>
             <a:noFill/>
@@ -3917,13 +8260,13 @@
             <a:pPr algn="l">
               <a:defRPr sz="1000" b="1">
                 <a:solidFill>
-                  <a:srgbClr val="00FFD1"/>
-                </a:solidFill>
-                <a:latin typeface="Calibri"/>
-              </a:defRPr>
-            </a:pPr>
-            <a:r>
-              <a:t>📢  OFFICE LIFE</a:t>
+                  <a:srgbClr val="FFB72B"/>
+                </a:solidFill>
+                <a:latin typeface="Calibri"/>
+              </a:defRPr>
+            </a:pPr>
+            <a:r>
+              <a:t>🎂  CELEBRATION</a:t>
             </a:r>
           </a:p>
         </p:txBody>
@@ -3953,13 +8296,13 @@
             <a:pPr algn="l">
               <a:defRPr sz="3200" b="1" i="0">
                 <a:solidFill>
-                  <a:srgbClr val="00FFD1"/>
-                </a:solidFill>
-                <a:latin typeface="Calibri"/>
-              </a:defRPr>
-            </a:pPr>
-            <a:r>
-              <a:t>From #general</a:t>
+                  <a:srgbClr val="FFB72B"/>
+                </a:solidFill>
+                <a:latin typeface="Calibri"/>
+              </a:defRPr>
+            </a:pPr>
+            <a:r>
+              <a:t>Happy Birthday!</a:t>
             </a:r>
           </a:p>
         </p:txBody>
@@ -3973,6 +8316,114 @@
         <p:spPr>
           <a:xfrm>
             <a:off x="1097280" y="2103120"/>
+            <a:ext cx="9966960" cy="640080"/>
+          </a:xfrm>
+          <a:prstGeom prst="rect">
+            <a:avLst/>
+          </a:prstGeom>
+          <a:noFill/>
+        </p:spPr>
+        <p:txBody>
+          <a:bodyPr wrap="square">
+            <a:spAutoFit/>
+          </a:bodyPr>
+          <a:lstStyle/>
+          <a:p>
+            <a:pPr algn="l">
+              <a:defRPr sz="2800" b="1" i="0">
+                <a:solidFill>
+                  <a:srgbClr val="FFFFFF"/>
+                </a:solidFill>
+                <a:latin typeface="Calibri"/>
+              </a:defRPr>
+            </a:pPr>
+            <a:r>
+              <a:t>Roman de las Heras</a:t>
+            </a:r>
+          </a:p>
+        </p:txBody>
+      </p:sp>
+      <p:sp>
+        <p:nvSpPr>
+          <p:cNvPr id="6" name="TextBox 5"/>
+          <p:cNvSpPr txBox="1"/>
+          <p:nvPr/>
+        </p:nvSpPr>
+        <p:spPr>
+          <a:xfrm>
+            <a:off x="1097280" y="2743200"/>
+            <a:ext cx="9966960" cy="365760"/>
+          </a:xfrm>
+          <a:prstGeom prst="rect">
+            <a:avLst/>
+          </a:prstGeom>
+          <a:noFill/>
+        </p:spPr>
+        <p:txBody>
+          <a:bodyPr wrap="square">
+            <a:spAutoFit/>
+          </a:bodyPr>
+          <a:lstStyle/>
+          <a:p>
+            <a:pPr algn="l">
+              <a:defRPr sz="1400" b="0" i="0">
+                <a:solidFill>
+                  <a:srgbClr val="8F95A3"/>
+                </a:solidFill>
+                <a:latin typeface="Calibri"/>
+              </a:defRPr>
+            </a:pPr>
+            <a:r>
+              <a:t>March 13</a:t>
+            </a:r>
+          </a:p>
+        </p:txBody>
+      </p:sp>
+      <p:sp>
+        <p:nvSpPr>
+          <p:cNvPr id="7" name="TextBox 6"/>
+          <p:cNvSpPr txBox="1"/>
+          <p:nvPr/>
+        </p:nvSpPr>
+        <p:spPr>
+          <a:xfrm>
+            <a:off x="1097280" y="3291840"/>
+            <a:ext cx="9966960" cy="914400"/>
+          </a:xfrm>
+          <a:prstGeom prst="rect">
+            <a:avLst/>
+          </a:prstGeom>
+          <a:noFill/>
+        </p:spPr>
+        <p:txBody>
+          <a:bodyPr wrap="square">
+            <a:spAutoFit/>
+          </a:bodyPr>
+          <a:lstStyle/>
+          <a:p>
+            <a:pPr algn="l">
+              <a:defRPr sz="1600" b="0" i="0">
+                <a:solidFill>
+                  <a:srgbClr val="E2E2EA"/>
+                </a:solidFill>
+                <a:latin typeface="Calibri"/>
+              </a:defRPr>
+            </a:pPr>
+            <a:r>
+              <a:t>Wishing you an amazing day filled with joy and celebration!</a:t>
+            </a:r>
+          </a:p>
+        </p:txBody>
+      </p:sp>
+      <p:sp>
+        <p:nvSpPr>
+          <p:cNvPr id="8" name="TextBox 7"/>
+          <p:cNvSpPr txBox="1"/>
+          <p:nvPr/>
+        </p:nvSpPr>
+        <p:spPr>
+          <a:xfrm>
+            <a:off x="1097280" y="4572000"/>
             <a:ext cx="9966960" cy="457200"/>
           </a:xfrm>
           <a:prstGeom prst="rect">
@@ -3987,123 +8438,15 @@
           <a:lstStyle/>
           <a:p>
             <a:pPr algn="l">
-              <a:defRPr sz="1800" b="1" i="0">
-                <a:solidFill>
-                  <a:srgbClr val="FFFFFF"/>
-                </a:solidFill>
-                <a:latin typeface="Calibri"/>
-              </a:defRPr>
-            </a:pPr>
-            <a:r>
-              <a:t>Hi everyone I recorded a short video showing how I built a fully automated AI-po...</a:t>
-            </a:r>
-          </a:p>
-        </p:txBody>
-      </p:sp>
-      <p:sp>
-        <p:nvSpPr>
-          <p:cNvPr id="6" name="TextBox 5"/>
-          <p:cNvSpPr txBox="1"/>
-          <p:nvPr/>
-        </p:nvSpPr>
-        <p:spPr>
-          <a:xfrm>
-            <a:off x="1371600" y="2743200"/>
-            <a:ext cx="9692640" cy="1828800"/>
-          </a:xfrm>
-          <a:prstGeom prst="rect">
-            <a:avLst/>
-          </a:prstGeom>
-          <a:noFill/>
-        </p:spPr>
-        <p:txBody>
-          <a:bodyPr wrap="square">
-            <a:spAutoFit/>
-          </a:bodyPr>
-          <a:lstStyle/>
-          <a:p>
-            <a:pPr algn="l">
-              <a:defRPr sz="1500" b="0" i="1">
-                <a:solidFill>
-                  <a:srgbClr val="E2E2EA"/>
-                </a:solidFill>
-                <a:latin typeface="Calibri"/>
-              </a:defRPr>
-            </a:pPr>
-            <a:r>
-              <a:t>"Hi everyone I recorded a short video showing how I built a fully automated AI-powered system — from idea to production — using only AI tools and zero coding experience. Slack data → AI curation → auto-deploying a live dashboard on office TVs. All running on autopilot. If I can do it, you can too P.S"</a:t>
-            </a:r>
-          </a:p>
-        </p:txBody>
-      </p:sp>
-      <p:sp>
-        <p:nvSpPr>
-          <p:cNvPr id="7" name="TextBox 6"/>
-          <p:cNvSpPr txBox="1"/>
-          <p:nvPr/>
-        </p:nvSpPr>
-        <p:spPr>
-          <a:xfrm>
-            <a:off x="1097280" y="4754880"/>
-            <a:ext cx="9966960" cy="365760"/>
-          </a:xfrm>
-          <a:prstGeom prst="rect">
-            <a:avLst/>
-          </a:prstGeom>
-          <a:noFill/>
-        </p:spPr>
-        <p:txBody>
-          <a:bodyPr wrap="square">
-            <a:spAutoFit/>
-          </a:bodyPr>
-          <a:lstStyle/>
-          <a:p>
-            <a:pPr algn="l">
-              <a:defRPr sz="1400" b="0" i="0">
-                <a:solidFill>
-                  <a:srgbClr val="8F95A3"/>
-                </a:solidFill>
-                <a:latin typeface="Calibri"/>
-              </a:defRPr>
-            </a:pPr>
-            <a:r>
-              <a:t>— Liliya Garifullina</a:t>
-            </a:r>
-          </a:p>
-        </p:txBody>
-      </p:sp>
-      <p:sp>
-        <p:nvSpPr>
-          <p:cNvPr id="8" name="TextBox 7"/>
-          <p:cNvSpPr txBox="1"/>
-          <p:nvPr/>
-        </p:nvSpPr>
-        <p:spPr>
-          <a:xfrm>
-            <a:off x="1097280" y="5760720"/>
-            <a:ext cx="9966960" cy="274320"/>
-          </a:xfrm>
-          <a:prstGeom prst="rect">
-            <a:avLst/>
-          </a:prstGeom>
-          <a:noFill/>
-        </p:spPr>
-        <p:txBody>
-          <a:bodyPr wrap="square">
-            <a:spAutoFit/>
-          </a:bodyPr>
-          <a:lstStyle/>
-          <a:p>
-            <a:pPr algn="l">
-              <a:defRPr sz="1100" b="0" i="0">
-                <a:solidFill>
-                  <a:srgbClr val="5C6270"/>
-                </a:solidFill>
-                <a:latin typeface="Calibri"/>
-              </a:defRPr>
-            </a:pPr>
-            <a:r>
-              <a:t>#general</a:t>
+              <a:defRPr sz="1400" b="0" i="1">
+                <a:solidFill>
+                  <a:srgbClr val="FFB72B"/>
+                </a:solidFill>
+                <a:latin typeface="Calibri"/>
+              </a:defRPr>
+            </a:pPr>
+            <a:r>
+              <a:t>With love, Your Appodeal Team 💜</a:t>
             </a:r>
           </a:p>
         </p:txBody>
@@ -4149,7 +8492,7 @@
             <a:avLst/>
           </a:prstGeom>
           <a:solidFill>
-            <a:srgbClr val="00FFD1"/>
+            <a:srgbClr val="FFB72B"/>
           </a:solidFill>
           <a:ln>
             <a:noFill/>
@@ -4202,13 +8545,13 @@
             <a:pPr algn="l">
               <a:defRPr sz="1000" b="1">
                 <a:solidFill>
-                  <a:srgbClr val="00FFD1"/>
-                </a:solidFill>
-                <a:latin typeface="Calibri"/>
-              </a:defRPr>
-            </a:pPr>
-            <a:r>
-              <a:t>📢  OFFICE LIFE</a:t>
+                  <a:srgbClr val="FFB72B"/>
+                </a:solidFill>
+                <a:latin typeface="Calibri"/>
+              </a:defRPr>
+            </a:pPr>
+            <a:r>
+              <a:t>🎂  CELEBRATION</a:t>
             </a:r>
           </a:p>
         </p:txBody>
@@ -4238,13 +8581,13 @@
             <a:pPr algn="l">
               <a:defRPr sz="3200" b="1" i="0">
                 <a:solidFill>
-                  <a:srgbClr val="00FFD1"/>
-                </a:solidFill>
-                <a:latin typeface="Calibri"/>
-              </a:defRPr>
-            </a:pPr>
-            <a:r>
-              <a:t>From #general</a:t>
+                  <a:srgbClr val="FFB72B"/>
+                </a:solidFill>
+                <a:latin typeface="Calibri"/>
+              </a:defRPr>
+            </a:pPr>
+            <a:r>
+              <a:t>Happy Birthday!</a:t>
             </a:r>
           </a:p>
         </p:txBody>
@@ -4258,6 +8601,114 @@
         <p:spPr>
           <a:xfrm>
             <a:off x="1097280" y="2103120"/>
+            <a:ext cx="9966960" cy="640080"/>
+          </a:xfrm>
+          <a:prstGeom prst="rect">
+            <a:avLst/>
+          </a:prstGeom>
+          <a:noFill/>
+        </p:spPr>
+        <p:txBody>
+          <a:bodyPr wrap="square">
+            <a:spAutoFit/>
+          </a:bodyPr>
+          <a:lstStyle/>
+          <a:p>
+            <a:pPr algn="l">
+              <a:defRPr sz="2800" b="1" i="0">
+                <a:solidFill>
+                  <a:srgbClr val="FFFFFF"/>
+                </a:solidFill>
+                <a:latin typeface="Calibri"/>
+              </a:defRPr>
+            </a:pPr>
+            <a:r>
+              <a:t>Olga Petriakova</a:t>
+            </a:r>
+          </a:p>
+        </p:txBody>
+      </p:sp>
+      <p:sp>
+        <p:nvSpPr>
+          <p:cNvPr id="6" name="TextBox 5"/>
+          <p:cNvSpPr txBox="1"/>
+          <p:nvPr/>
+        </p:nvSpPr>
+        <p:spPr>
+          <a:xfrm>
+            <a:off x="1097280" y="2743200"/>
+            <a:ext cx="9966960" cy="365760"/>
+          </a:xfrm>
+          <a:prstGeom prst="rect">
+            <a:avLst/>
+          </a:prstGeom>
+          <a:noFill/>
+        </p:spPr>
+        <p:txBody>
+          <a:bodyPr wrap="square">
+            <a:spAutoFit/>
+          </a:bodyPr>
+          <a:lstStyle/>
+          <a:p>
+            <a:pPr algn="l">
+              <a:defRPr sz="1400" b="0" i="0">
+                <a:solidFill>
+                  <a:srgbClr val="8F95A3"/>
+                </a:solidFill>
+                <a:latin typeface="Calibri"/>
+              </a:defRPr>
+            </a:pPr>
+            <a:r>
+              <a:t>March 13</a:t>
+            </a:r>
+          </a:p>
+        </p:txBody>
+      </p:sp>
+      <p:sp>
+        <p:nvSpPr>
+          <p:cNvPr id="7" name="TextBox 6"/>
+          <p:cNvSpPr txBox="1"/>
+          <p:nvPr/>
+        </p:nvSpPr>
+        <p:spPr>
+          <a:xfrm>
+            <a:off x="1097280" y="3291840"/>
+            <a:ext cx="9966960" cy="914400"/>
+          </a:xfrm>
+          <a:prstGeom prst="rect">
+            <a:avLst/>
+          </a:prstGeom>
+          <a:noFill/>
+        </p:spPr>
+        <p:txBody>
+          <a:bodyPr wrap="square">
+            <a:spAutoFit/>
+          </a:bodyPr>
+          <a:lstStyle/>
+          <a:p>
+            <a:pPr algn="l">
+              <a:defRPr sz="1600" b="0" i="0">
+                <a:solidFill>
+                  <a:srgbClr val="E2E2EA"/>
+                </a:solidFill>
+                <a:latin typeface="Calibri"/>
+              </a:defRPr>
+            </a:pPr>
+            <a:r>
+              <a:t>Wishing you an amazing day filled with joy and celebration!</a:t>
+            </a:r>
+          </a:p>
+        </p:txBody>
+      </p:sp>
+      <p:sp>
+        <p:nvSpPr>
+          <p:cNvPr id="8" name="TextBox 7"/>
+          <p:cNvSpPr txBox="1"/>
+          <p:nvPr/>
+        </p:nvSpPr>
+        <p:spPr>
+          <a:xfrm>
+            <a:off x="1097280" y="4572000"/>
             <a:ext cx="9966960" cy="457200"/>
           </a:xfrm>
           <a:prstGeom prst="rect">
@@ -4272,123 +8723,15 @@
           <a:lstStyle/>
           <a:p>
             <a:pPr algn="l">
-              <a:defRPr sz="1800" b="1" i="0">
-                <a:solidFill>
-                  <a:srgbClr val="FFFFFF"/>
-                </a:solidFill>
-                <a:latin typeface="Calibri"/>
-              </a:defRPr>
-            </a:pPr>
-            <a:r>
-              <a:t>Team, We’re making great progress in building products, and it’s especially exci...</a:t>
-            </a:r>
-          </a:p>
-        </p:txBody>
-      </p:sp>
-      <p:sp>
-        <p:nvSpPr>
-          <p:cNvPr id="6" name="TextBox 5"/>
-          <p:cNvSpPr txBox="1"/>
-          <p:nvPr/>
-        </p:nvSpPr>
-        <p:spPr>
-          <a:xfrm>
-            <a:off x="1371600" y="2743200"/>
-            <a:ext cx="9692640" cy="1828800"/>
-          </a:xfrm>
-          <a:prstGeom prst="rect">
-            <a:avLst/>
-          </a:prstGeom>
-          <a:noFill/>
-        </p:spPr>
-        <p:txBody>
-          <a:bodyPr wrap="square">
-            <a:spAutoFit/>
-          </a:bodyPr>
-          <a:lstStyle/>
-          <a:p>
-            <a:pPr algn="l">
-              <a:defRPr sz="1500" b="0" i="1">
-                <a:solidFill>
-                  <a:srgbClr val="E2E2EA"/>
-                </a:solidFill>
-                <a:latin typeface="Calibri"/>
-              </a:defRPr>
-            </a:pPr>
-            <a:r>
-              <a:t>"Team, We’re making great progress in building products, and it’s especially exciting to see how quickly non-engineering teams have created so many useful tools. This is a strong sign that we’re learning fast and moving in the right direction. At the same time, it’s important that we follow proper en"</a:t>
-            </a:r>
-          </a:p>
-        </p:txBody>
-      </p:sp>
-      <p:sp>
-        <p:nvSpPr>
-          <p:cNvPr id="7" name="TextBox 6"/>
-          <p:cNvSpPr txBox="1"/>
-          <p:nvPr/>
-        </p:nvSpPr>
-        <p:spPr>
-          <a:xfrm>
-            <a:off x="1097280" y="4754880"/>
-            <a:ext cx="9966960" cy="365760"/>
-          </a:xfrm>
-          <a:prstGeom prst="rect">
-            <a:avLst/>
-          </a:prstGeom>
-          <a:noFill/>
-        </p:spPr>
-        <p:txBody>
-          <a:bodyPr wrap="square">
-            <a:spAutoFit/>
-          </a:bodyPr>
-          <a:lstStyle/>
-          <a:p>
-            <a:pPr algn="l">
-              <a:defRPr sz="1400" b="0" i="0">
-                <a:solidFill>
-                  <a:srgbClr val="8F95A3"/>
-                </a:solidFill>
-                <a:latin typeface="Calibri"/>
-              </a:defRPr>
-            </a:pPr>
-            <a:r>
-              <a:t>— Alexandr Zhitlukhin</a:t>
-            </a:r>
-          </a:p>
-        </p:txBody>
-      </p:sp>
-      <p:sp>
-        <p:nvSpPr>
-          <p:cNvPr id="8" name="TextBox 7"/>
-          <p:cNvSpPr txBox="1"/>
-          <p:nvPr/>
-        </p:nvSpPr>
-        <p:spPr>
-          <a:xfrm>
-            <a:off x="1097280" y="5760720"/>
-            <a:ext cx="9966960" cy="274320"/>
-          </a:xfrm>
-          <a:prstGeom prst="rect">
-            <a:avLst/>
-          </a:prstGeom>
-          <a:noFill/>
-        </p:spPr>
-        <p:txBody>
-          <a:bodyPr wrap="square">
-            <a:spAutoFit/>
-          </a:bodyPr>
-          <a:lstStyle/>
-          <a:p>
-            <a:pPr algn="l">
-              <a:defRPr sz="1100" b="0" i="0">
-                <a:solidFill>
-                  <a:srgbClr val="5C6270"/>
-                </a:solidFill>
-                <a:latin typeface="Calibri"/>
-              </a:defRPr>
-            </a:pPr>
-            <a:r>
-              <a:t>#general</a:t>
+              <a:defRPr sz="1400" b="0" i="1">
+                <a:solidFill>
+                  <a:srgbClr val="FFB72B"/>
+                </a:solidFill>
+                <a:latin typeface="Calibri"/>
+              </a:defRPr>
+            </a:pPr>
+            <a:r>
+              <a:t>With love, Your Appodeal Team 💜</a:t>
             </a:r>
           </a:p>
         </p:txBody>
@@ -4434,7 +8777,7 @@
             <a:avLst/>
           </a:prstGeom>
           <a:solidFill>
-            <a:srgbClr val="5D2CAC"/>
+            <a:srgbClr val="FFB72B"/>
           </a:solidFill>
           <a:ln>
             <a:noFill/>
@@ -4487,13 +8830,13 @@
             <a:pPr algn="l">
               <a:defRPr sz="1000" b="1">
                 <a:solidFill>
-                  <a:srgbClr val="5D2CAC"/>
-                </a:solidFill>
-                <a:latin typeface="Calibri"/>
-              </a:defRPr>
-            </a:pPr>
-            <a:r>
-              <a:t>👏  OFFICE LIFE</a:t>
+                  <a:srgbClr val="FFB72B"/>
+                </a:solidFill>
+                <a:latin typeface="Calibri"/>
+              </a:defRPr>
+            </a:pPr>
+            <a:r>
+              <a:t>🎂  CELEBRATION</a:t>
             </a:r>
           </a:p>
         </p:txBody>
@@ -4523,13 +8866,13 @@
             <a:pPr algn="l">
               <a:defRPr sz="3200" b="1" i="0">
                 <a:solidFill>
-                  <a:srgbClr val="5D2CAC"/>
-                </a:solidFill>
-                <a:latin typeface="Calibri"/>
-              </a:defRPr>
-            </a:pPr>
-            <a:r>
-              <a:t>From #claps</a:t>
+                  <a:srgbClr val="FFB72B"/>
+                </a:solidFill>
+                <a:latin typeface="Calibri"/>
+              </a:defRPr>
+            </a:pPr>
+            <a:r>
+              <a:t>Happy Birthday!</a:t>
             </a:r>
           </a:p>
         </p:txBody>
@@ -4543,6 +8886,114 @@
         <p:spPr>
           <a:xfrm>
             <a:off x="1097280" y="2103120"/>
+            <a:ext cx="9966960" cy="640080"/>
+          </a:xfrm>
+          <a:prstGeom prst="rect">
+            <a:avLst/>
+          </a:prstGeom>
+          <a:noFill/>
+        </p:spPr>
+        <p:txBody>
+          <a:bodyPr wrap="square">
+            <a:spAutoFit/>
+          </a:bodyPr>
+          <a:lstStyle/>
+          <a:p>
+            <a:pPr algn="l">
+              <a:defRPr sz="2800" b="1" i="0">
+                <a:solidFill>
+                  <a:srgbClr val="FFFFFF"/>
+                </a:solidFill>
+                <a:latin typeface="Calibri"/>
+              </a:defRPr>
+            </a:pPr>
+            <a:r>
+              <a:t>Olga Petriakova</a:t>
+            </a:r>
+          </a:p>
+        </p:txBody>
+      </p:sp>
+      <p:sp>
+        <p:nvSpPr>
+          <p:cNvPr id="6" name="TextBox 5"/>
+          <p:cNvSpPr txBox="1"/>
+          <p:nvPr/>
+        </p:nvSpPr>
+        <p:spPr>
+          <a:xfrm>
+            <a:off x="1097280" y="2743200"/>
+            <a:ext cx="9966960" cy="365760"/>
+          </a:xfrm>
+          <a:prstGeom prst="rect">
+            <a:avLst/>
+          </a:prstGeom>
+          <a:noFill/>
+        </p:spPr>
+        <p:txBody>
+          <a:bodyPr wrap="square">
+            <a:spAutoFit/>
+          </a:bodyPr>
+          <a:lstStyle/>
+          <a:p>
+            <a:pPr algn="l">
+              <a:defRPr sz="1400" b="0" i="0">
+                <a:solidFill>
+                  <a:srgbClr val="8F95A3"/>
+                </a:solidFill>
+                <a:latin typeface="Calibri"/>
+              </a:defRPr>
+            </a:pPr>
+            <a:r>
+              <a:t>March 13</a:t>
+            </a:r>
+          </a:p>
+        </p:txBody>
+      </p:sp>
+      <p:sp>
+        <p:nvSpPr>
+          <p:cNvPr id="7" name="TextBox 6"/>
+          <p:cNvSpPr txBox="1"/>
+          <p:nvPr/>
+        </p:nvSpPr>
+        <p:spPr>
+          <a:xfrm>
+            <a:off x="1097280" y="3291840"/>
+            <a:ext cx="9966960" cy="914400"/>
+          </a:xfrm>
+          <a:prstGeom prst="rect">
+            <a:avLst/>
+          </a:prstGeom>
+          <a:noFill/>
+        </p:spPr>
+        <p:txBody>
+          <a:bodyPr wrap="square">
+            <a:spAutoFit/>
+          </a:bodyPr>
+          <a:lstStyle/>
+          <a:p>
+            <a:pPr algn="l">
+              <a:defRPr sz="1600" b="0" i="0">
+                <a:solidFill>
+                  <a:srgbClr val="E2E2EA"/>
+                </a:solidFill>
+                <a:latin typeface="Calibri"/>
+              </a:defRPr>
+            </a:pPr>
+            <a:r>
+              <a:t>Wishing you an amazing day filled with joy and celebration!</a:t>
+            </a:r>
+          </a:p>
+        </p:txBody>
+      </p:sp>
+      <p:sp>
+        <p:nvSpPr>
+          <p:cNvPr id="8" name="TextBox 7"/>
+          <p:cNvSpPr txBox="1"/>
+          <p:nvPr/>
+        </p:nvSpPr>
+        <p:spPr>
+          <a:xfrm>
+            <a:off x="1097280" y="4572000"/>
             <a:ext cx="9966960" cy="457200"/>
           </a:xfrm>
           <a:prstGeom prst="rect">
@@ -4557,123 +9008,15 @@
           <a:lstStyle/>
           <a:p>
             <a:pPr algn="l">
-              <a:defRPr sz="1800" b="1" i="0">
-                <a:solidFill>
-                  <a:srgbClr val="FFFFFF"/>
-                </a:solidFill>
-                <a:latin typeface="Calibri"/>
-              </a:defRPr>
-            </a:pPr>
-            <a:r>
-              <a:t>Antonio Clavelli Sergio-Yersi Villegas Wojo aleksandr.chigaleichik received 5× f...</a:t>
-            </a:r>
-          </a:p>
-        </p:txBody>
-      </p:sp>
-      <p:sp>
-        <p:nvSpPr>
-          <p:cNvPr id="6" name="TextBox 5"/>
-          <p:cNvSpPr txBox="1"/>
-          <p:nvPr/>
-        </p:nvSpPr>
-        <p:spPr>
-          <a:xfrm>
-            <a:off x="1371600" y="2743200"/>
-            <a:ext cx="9692640" cy="1828800"/>
-          </a:xfrm>
-          <a:prstGeom prst="rect">
-            <a:avLst/>
-          </a:prstGeom>
-          <a:noFill/>
-        </p:spPr>
-        <p:txBody>
-          <a:bodyPr wrap="square">
-            <a:spAutoFit/>
-          </a:bodyPr>
-          <a:lstStyle/>
-          <a:p>
-            <a:pPr algn="l">
-              <a:defRPr sz="1500" b="0" i="1">
-                <a:solidFill>
-                  <a:srgbClr val="E2E2EA"/>
-                </a:solidFill>
-                <a:latin typeface="Calibri"/>
-              </a:defRPr>
-            </a:pPr>
-            <a:r>
-              <a:t>"Antonio Clavelli Sergio-Yersi Villegas Wojo aleksandr.chigaleichik received 5× from ArtKip"</a:t>
-            </a:r>
-          </a:p>
-        </p:txBody>
-      </p:sp>
-      <p:sp>
-        <p:nvSpPr>
-          <p:cNvPr id="7" name="TextBox 6"/>
-          <p:cNvSpPr txBox="1"/>
-          <p:nvPr/>
-        </p:nvSpPr>
-        <p:spPr>
-          <a:xfrm>
-            <a:off x="1097280" y="4754880"/>
-            <a:ext cx="9966960" cy="365760"/>
-          </a:xfrm>
-          <a:prstGeom prst="rect">
-            <a:avLst/>
-          </a:prstGeom>
-          <a:noFill/>
-        </p:spPr>
-        <p:txBody>
-          <a:bodyPr wrap="square">
-            <a:spAutoFit/>
-          </a:bodyPr>
-          <a:lstStyle/>
-          <a:p>
-            <a:pPr algn="l">
-              <a:defRPr sz="1400" b="0" i="0">
-                <a:solidFill>
-                  <a:srgbClr val="8F95A3"/>
-                </a:solidFill>
-                <a:latin typeface="Calibri"/>
-              </a:defRPr>
-            </a:pPr>
-            <a:r>
-              <a:t>— Clappy</a:t>
-            </a:r>
-          </a:p>
-        </p:txBody>
-      </p:sp>
-      <p:sp>
-        <p:nvSpPr>
-          <p:cNvPr id="8" name="TextBox 7"/>
-          <p:cNvSpPr txBox="1"/>
-          <p:nvPr/>
-        </p:nvSpPr>
-        <p:spPr>
-          <a:xfrm>
-            <a:off x="1097280" y="5760720"/>
-            <a:ext cx="9966960" cy="274320"/>
-          </a:xfrm>
-          <a:prstGeom prst="rect">
-            <a:avLst/>
-          </a:prstGeom>
-          <a:noFill/>
-        </p:spPr>
-        <p:txBody>
-          <a:bodyPr wrap="square">
-            <a:spAutoFit/>
-          </a:bodyPr>
-          <a:lstStyle/>
-          <a:p>
-            <a:pPr algn="l">
-              <a:defRPr sz="1100" b="0" i="0">
-                <a:solidFill>
-                  <a:srgbClr val="5C6270"/>
-                </a:solidFill>
-                <a:latin typeface="Calibri"/>
-              </a:defRPr>
-            </a:pPr>
-            <a:r>
-              <a:t>#claps</a:t>
+              <a:defRPr sz="1400" b="0" i="1">
+                <a:solidFill>
+                  <a:srgbClr val="FFB72B"/>
+                </a:solidFill>
+                <a:latin typeface="Calibri"/>
+              </a:defRPr>
+            </a:pPr>
+            <a:r>
+              <a:t>With love, Your Appodeal Team 💜</a:t>
             </a:r>
           </a:p>
         </p:txBody>
@@ -4719,7 +9062,7 @@
             <a:avLst/>
           </a:prstGeom>
           <a:solidFill>
-            <a:srgbClr val="5D2CAC"/>
+            <a:srgbClr val="FFB72B"/>
           </a:solidFill>
           <a:ln>
             <a:noFill/>
@@ -4772,13 +9115,13 @@
             <a:pPr algn="l">
               <a:defRPr sz="1000" b="1">
                 <a:solidFill>
-                  <a:srgbClr val="5D2CAC"/>
-                </a:solidFill>
-                <a:latin typeface="Calibri"/>
-              </a:defRPr>
-            </a:pPr>
-            <a:r>
-              <a:t>👏  OFFICE LIFE</a:t>
+                  <a:srgbClr val="FFB72B"/>
+                </a:solidFill>
+                <a:latin typeface="Calibri"/>
+              </a:defRPr>
+            </a:pPr>
+            <a:r>
+              <a:t>🎂  CELEBRATION</a:t>
             </a:r>
           </a:p>
         </p:txBody>
@@ -4808,13 +9151,13 @@
             <a:pPr algn="l">
               <a:defRPr sz="3200" b="1" i="0">
                 <a:solidFill>
-                  <a:srgbClr val="5D2CAC"/>
-                </a:solidFill>
-                <a:latin typeface="Calibri"/>
-              </a:defRPr>
-            </a:pPr>
-            <a:r>
-              <a:t>From #claps</a:t>
+                  <a:srgbClr val="FFB72B"/>
+                </a:solidFill>
+                <a:latin typeface="Calibri"/>
+              </a:defRPr>
+            </a:pPr>
+            <a:r>
+              <a:t>Happy Birthday!</a:t>
             </a:r>
           </a:p>
         </p:txBody>
@@ -4828,6 +9171,114 @@
         <p:spPr>
           <a:xfrm>
             <a:off x="1097280" y="2103120"/>
+            <a:ext cx="9966960" cy="640080"/>
+          </a:xfrm>
+          <a:prstGeom prst="rect">
+            <a:avLst/>
+          </a:prstGeom>
+          <a:noFill/>
+        </p:spPr>
+        <p:txBody>
+          <a:bodyPr wrap="square">
+            <a:spAutoFit/>
+          </a:bodyPr>
+          <a:lstStyle/>
+          <a:p>
+            <a:pPr algn="l">
+              <a:defRPr sz="2800" b="1" i="0">
+                <a:solidFill>
+                  <a:srgbClr val="FFFFFF"/>
+                </a:solidFill>
+                <a:latin typeface="Calibri"/>
+              </a:defRPr>
+            </a:pPr>
+            <a:r>
+              <a:t>Alexandra Molchan</a:t>
+            </a:r>
+          </a:p>
+        </p:txBody>
+      </p:sp>
+      <p:sp>
+        <p:nvSpPr>
+          <p:cNvPr id="6" name="TextBox 5"/>
+          <p:cNvSpPr txBox="1"/>
+          <p:nvPr/>
+        </p:nvSpPr>
+        <p:spPr>
+          <a:xfrm>
+            <a:off x="1097280" y="2743200"/>
+            <a:ext cx="9966960" cy="365760"/>
+          </a:xfrm>
+          <a:prstGeom prst="rect">
+            <a:avLst/>
+          </a:prstGeom>
+          <a:noFill/>
+        </p:spPr>
+        <p:txBody>
+          <a:bodyPr wrap="square">
+            <a:spAutoFit/>
+          </a:bodyPr>
+          <a:lstStyle/>
+          <a:p>
+            <a:pPr algn="l">
+              <a:defRPr sz="1400" b="0" i="0">
+                <a:solidFill>
+                  <a:srgbClr val="8F95A3"/>
+                </a:solidFill>
+                <a:latin typeface="Calibri"/>
+              </a:defRPr>
+            </a:pPr>
+            <a:r>
+              <a:t>March 13</a:t>
+            </a:r>
+          </a:p>
+        </p:txBody>
+      </p:sp>
+      <p:sp>
+        <p:nvSpPr>
+          <p:cNvPr id="7" name="TextBox 6"/>
+          <p:cNvSpPr txBox="1"/>
+          <p:nvPr/>
+        </p:nvSpPr>
+        <p:spPr>
+          <a:xfrm>
+            <a:off x="1097280" y="3291840"/>
+            <a:ext cx="9966960" cy="914400"/>
+          </a:xfrm>
+          <a:prstGeom prst="rect">
+            <a:avLst/>
+          </a:prstGeom>
+          <a:noFill/>
+        </p:spPr>
+        <p:txBody>
+          <a:bodyPr wrap="square">
+            <a:spAutoFit/>
+          </a:bodyPr>
+          <a:lstStyle/>
+          <a:p>
+            <a:pPr algn="l">
+              <a:defRPr sz="1600" b="0" i="0">
+                <a:solidFill>
+                  <a:srgbClr val="E2E2EA"/>
+                </a:solidFill>
+                <a:latin typeface="Calibri"/>
+              </a:defRPr>
+            </a:pPr>
+            <a:r>
+              <a:t>Wishing you an amazing day filled with joy and celebration!</a:t>
+            </a:r>
+          </a:p>
+        </p:txBody>
+      </p:sp>
+      <p:sp>
+        <p:nvSpPr>
+          <p:cNvPr id="8" name="TextBox 7"/>
+          <p:cNvSpPr txBox="1"/>
+          <p:nvPr/>
+        </p:nvSpPr>
+        <p:spPr>
+          <a:xfrm>
+            <a:off x="1097280" y="4572000"/>
             <a:ext cx="9966960" cy="457200"/>
           </a:xfrm>
           <a:prstGeom prst="rect">
@@ -4842,7 +9293,184 @@
           <a:lstStyle/>
           <a:p>
             <a:pPr algn="l">
-              <a:defRPr sz="1800" b="1" i="0">
+              <a:defRPr sz="1400" b="0" i="1">
+                <a:solidFill>
+                  <a:srgbClr val="FFB72B"/>
+                </a:solidFill>
+                <a:latin typeface="Calibri"/>
+              </a:defRPr>
+            </a:pPr>
+            <a:r>
+              <a:t>With love, Your Appodeal Team 💜</a:t>
+            </a:r>
+          </a:p>
+        </p:txBody>
+      </p:sp>
+    </p:spTree>
+  </p:cSld>
+  <p:clrMapOvr>
+    <a:masterClrMapping/>
+  </p:clrMapOvr>
+</p:sld>
+</file>
+
+<file path=ppt/slides/slide8.xml><?xml version="1.0" encoding="utf-8"?>
+<p:sld xmlns:a="http://schemas.openxmlformats.org/drawingml/2006/main" xmlns:p="http://schemas.openxmlformats.org/presentationml/2006/main" xmlns:r="http://schemas.openxmlformats.org/officeDocument/2006/relationships">
+  <p:cSld>
+    <p:bg>
+      <p:bgPr>
+        <a:solidFill>
+          <a:srgbClr val="08080C"/>
+        </a:solidFill>
+        <a:effectLst/>
+      </p:bgPr>
+    </p:bg>
+    <p:spTree>
+      <p:nvGrpSpPr>
+        <p:cNvPr id="1" name=""/>
+        <p:cNvGrpSpPr/>
+        <p:nvPr/>
+      </p:nvGrpSpPr>
+      <p:grpSpPr/>
+      <p:sp>
+        <p:nvSpPr>
+          <p:cNvPr id="2" name="Rectangle 1"/>
+          <p:cNvSpPr/>
+          <p:nvPr/>
+        </p:nvSpPr>
+        <p:spPr>
+          <a:xfrm>
+            <a:off x="0" y="365760"/>
+            <a:ext cx="12191695" cy="54864"/>
+          </a:xfrm>
+          <a:prstGeom prst="rect">
+            <a:avLst/>
+          </a:prstGeom>
+          <a:solidFill>
+            <a:srgbClr val="FFB72B"/>
+          </a:solidFill>
+          <a:ln>
+            <a:noFill/>
+          </a:ln>
+        </p:spPr>
+        <p:style>
+          <a:lnRef idx="1">
+            <a:schemeClr val="accent1"/>
+          </a:lnRef>
+          <a:fillRef idx="3">
+            <a:schemeClr val="accent1"/>
+          </a:fillRef>
+          <a:effectRef idx="2">
+            <a:schemeClr val="accent1"/>
+          </a:effectRef>
+          <a:fontRef idx="minor">
+            <a:schemeClr val="lt1"/>
+          </a:fontRef>
+        </p:style>
+        <p:txBody>
+          <a:bodyPr rtlCol="0" anchor="ctr"/>
+          <a:lstStyle/>
+          <a:p>
+            <a:pPr algn="ctr"/>
+          </a:p>
+        </p:txBody>
+      </p:sp>
+      <p:sp>
+        <p:nvSpPr>
+          <p:cNvPr id="3" name="TextBox 2"/>
+          <p:cNvSpPr txBox="1"/>
+          <p:nvPr/>
+        </p:nvSpPr>
+        <p:spPr>
+          <a:xfrm>
+            <a:off x="1097280" y="731520"/>
+            <a:ext cx="3657600" cy="365760"/>
+          </a:xfrm>
+          <a:prstGeom prst="rect">
+            <a:avLst/>
+          </a:prstGeom>
+          <a:noFill/>
+        </p:spPr>
+        <p:txBody>
+          <a:bodyPr wrap="none">
+            <a:spAutoFit/>
+          </a:bodyPr>
+          <a:lstStyle/>
+          <a:p>
+            <a:pPr algn="l">
+              <a:defRPr sz="1000" b="1">
+                <a:solidFill>
+                  <a:srgbClr val="FFB72B"/>
+                </a:solidFill>
+                <a:latin typeface="Calibri"/>
+              </a:defRPr>
+            </a:pPr>
+            <a:r>
+              <a:t>🎂  CELEBRATION</a:t>
+            </a:r>
+          </a:p>
+        </p:txBody>
+      </p:sp>
+      <p:sp>
+        <p:nvSpPr>
+          <p:cNvPr id="4" name="TextBox 3"/>
+          <p:cNvSpPr txBox="1"/>
+          <p:nvPr/>
+        </p:nvSpPr>
+        <p:spPr>
+          <a:xfrm>
+            <a:off x="1097280" y="1188720"/>
+            <a:ext cx="9966960" cy="731520"/>
+          </a:xfrm>
+          <a:prstGeom prst="rect">
+            <a:avLst/>
+          </a:prstGeom>
+          <a:noFill/>
+        </p:spPr>
+        <p:txBody>
+          <a:bodyPr wrap="square">
+            <a:spAutoFit/>
+          </a:bodyPr>
+          <a:lstStyle/>
+          <a:p>
+            <a:pPr algn="l">
+              <a:defRPr sz="3200" b="1" i="0">
+                <a:solidFill>
+                  <a:srgbClr val="FFB72B"/>
+                </a:solidFill>
+                <a:latin typeface="Calibri"/>
+              </a:defRPr>
+            </a:pPr>
+            <a:r>
+              <a:t>Happy Birthday!</a:t>
+            </a:r>
+          </a:p>
+        </p:txBody>
+      </p:sp>
+      <p:sp>
+        <p:nvSpPr>
+          <p:cNvPr id="5" name="TextBox 4"/>
+          <p:cNvSpPr txBox="1"/>
+          <p:nvPr/>
+        </p:nvSpPr>
+        <p:spPr>
+          <a:xfrm>
+            <a:off x="1097280" y="2103120"/>
+            <a:ext cx="9966960" cy="640080"/>
+          </a:xfrm>
+          <a:prstGeom prst="rect">
+            <a:avLst/>
+          </a:prstGeom>
+          <a:noFill/>
+        </p:spPr>
+        <p:txBody>
+          <a:bodyPr wrap="square">
+            <a:spAutoFit/>
+          </a:bodyPr>
+          <a:lstStyle/>
+          <a:p>
+            <a:pPr algn="l">
+              <a:defRPr sz="2800" b="1" i="0">
                 <a:solidFill>
                   <a:srgbClr val="FFFFFF"/>
                 </a:solidFill>
@@ -4850,7 +9478,7 @@
               </a:defRPr>
             </a:pPr>
             <a:r>
-              <a:t>Gleb Krahotkin received 50× from Mykhailo Kukharskyi</a:t>
+              <a:t>Sergei Bashkirtsev</a:t>
             </a:r>
           </a:p>
         </p:txBody>
@@ -4863,22 +9491,58 @@
         </p:nvSpPr>
         <p:spPr>
           <a:xfrm>
-            <a:off x="1371600" y="2743200"/>
-            <a:ext cx="9692640" cy="1828800"/>
-          </a:xfrm>
-          <a:prstGeom prst="rect">
-            <a:avLst/>
-          </a:prstGeom>
-          <a:noFill/>
-        </p:spPr>
-        <p:txBody>
-          <a:bodyPr wrap="square">
-            <a:spAutoFit/>
-          </a:bodyPr>
-          <a:lstStyle/>
-          <a:p>
-            <a:pPr algn="l">
-              <a:defRPr sz="1500" b="0" i="1">
+            <a:off x="1097280" y="2743200"/>
+            <a:ext cx="9966960" cy="365760"/>
+          </a:xfrm>
+          <a:prstGeom prst="rect">
+            <a:avLst/>
+          </a:prstGeom>
+          <a:noFill/>
+        </p:spPr>
+        <p:txBody>
+          <a:bodyPr wrap="square">
+            <a:spAutoFit/>
+          </a:bodyPr>
+          <a:lstStyle/>
+          <a:p>
+            <a:pPr algn="l">
+              <a:defRPr sz="1400" b="0" i="0">
+                <a:solidFill>
+                  <a:srgbClr val="8F95A3"/>
+                </a:solidFill>
+                <a:latin typeface="Calibri"/>
+              </a:defRPr>
+            </a:pPr>
+            <a:r>
+              <a:t>March 13</a:t>
+            </a:r>
+          </a:p>
+        </p:txBody>
+      </p:sp>
+      <p:sp>
+        <p:nvSpPr>
+          <p:cNvPr id="7" name="TextBox 6"/>
+          <p:cNvSpPr txBox="1"/>
+          <p:nvPr/>
+        </p:nvSpPr>
+        <p:spPr>
+          <a:xfrm>
+            <a:off x="1097280" y="3291840"/>
+            <a:ext cx="9966960" cy="914400"/>
+          </a:xfrm>
+          <a:prstGeom prst="rect">
+            <a:avLst/>
+          </a:prstGeom>
+          <a:noFill/>
+        </p:spPr>
+        <p:txBody>
+          <a:bodyPr wrap="square">
+            <a:spAutoFit/>
+          </a:bodyPr>
+          <a:lstStyle/>
+          <a:p>
+            <a:pPr algn="l">
+              <a:defRPr sz="1600" b="0" i="0">
                 <a:solidFill>
                   <a:srgbClr val="E2E2EA"/>
                 </a:solidFill>
@@ -4886,7 +9550,256 @@
               </a:defRPr>
             </a:pPr>
             <a:r>
-              <a:t>"Gleb Krahotkin received 50× from Mykhailo Kukharskyi"</a:t>
+              <a:t>Wishing you an amazing day filled with joy and celebration!</a:t>
+            </a:r>
+          </a:p>
+        </p:txBody>
+      </p:sp>
+      <p:sp>
+        <p:nvSpPr>
+          <p:cNvPr id="8" name="TextBox 7"/>
+          <p:cNvSpPr txBox="1"/>
+          <p:nvPr/>
+        </p:nvSpPr>
+        <p:spPr>
+          <a:xfrm>
+            <a:off x="1097280" y="4572000"/>
+            <a:ext cx="9966960" cy="457200"/>
+          </a:xfrm>
+          <a:prstGeom prst="rect">
+            <a:avLst/>
+          </a:prstGeom>
+          <a:noFill/>
+        </p:spPr>
+        <p:txBody>
+          <a:bodyPr wrap="square">
+            <a:spAutoFit/>
+          </a:bodyPr>
+          <a:lstStyle/>
+          <a:p>
+            <a:pPr algn="l">
+              <a:defRPr sz="1400" b="0" i="1">
+                <a:solidFill>
+                  <a:srgbClr val="FFB72B"/>
+                </a:solidFill>
+                <a:latin typeface="Calibri"/>
+              </a:defRPr>
+            </a:pPr>
+            <a:r>
+              <a:t>With love, Your Appodeal Team 💜</a:t>
+            </a:r>
+          </a:p>
+        </p:txBody>
+      </p:sp>
+    </p:spTree>
+  </p:cSld>
+  <p:clrMapOvr>
+    <a:masterClrMapping/>
+  </p:clrMapOvr>
+</p:sld>
+</file>
+
+<file path=ppt/slides/slide9.xml><?xml version="1.0" encoding="utf-8"?>
+<p:sld xmlns:a="http://schemas.openxmlformats.org/drawingml/2006/main" xmlns:p="http://schemas.openxmlformats.org/presentationml/2006/main" xmlns:r="http://schemas.openxmlformats.org/officeDocument/2006/relationships">
+  <p:cSld>
+    <p:bg>
+      <p:bgPr>
+        <a:solidFill>
+          <a:srgbClr val="08080C"/>
+        </a:solidFill>
+        <a:effectLst/>
+      </p:bgPr>
+    </p:bg>
+    <p:spTree>
+      <p:nvGrpSpPr>
+        <p:cNvPr id="1" name=""/>
+        <p:cNvGrpSpPr/>
+        <p:nvPr/>
+      </p:nvGrpSpPr>
+      <p:grpSpPr/>
+      <p:sp>
+        <p:nvSpPr>
+          <p:cNvPr id="2" name="Rectangle 1"/>
+          <p:cNvSpPr/>
+          <p:nvPr/>
+        </p:nvSpPr>
+        <p:spPr>
+          <a:xfrm>
+            <a:off x="0" y="365760"/>
+            <a:ext cx="12191695" cy="54864"/>
+          </a:xfrm>
+          <a:prstGeom prst="rect">
+            <a:avLst/>
+          </a:prstGeom>
+          <a:solidFill>
+            <a:srgbClr val="FFB72B"/>
+          </a:solidFill>
+          <a:ln>
+            <a:noFill/>
+          </a:ln>
+        </p:spPr>
+        <p:style>
+          <a:lnRef idx="1">
+            <a:schemeClr val="accent1"/>
+          </a:lnRef>
+          <a:fillRef idx="3">
+            <a:schemeClr val="accent1"/>
+          </a:fillRef>
+          <a:effectRef idx="2">
+            <a:schemeClr val="accent1"/>
+          </a:effectRef>
+          <a:fontRef idx="minor">
+            <a:schemeClr val="lt1"/>
+          </a:fontRef>
+        </p:style>
+        <p:txBody>
+          <a:bodyPr rtlCol="0" anchor="ctr"/>
+          <a:lstStyle/>
+          <a:p>
+            <a:pPr algn="ctr"/>
+          </a:p>
+        </p:txBody>
+      </p:sp>
+      <p:sp>
+        <p:nvSpPr>
+          <p:cNvPr id="3" name="TextBox 2"/>
+          <p:cNvSpPr txBox="1"/>
+          <p:nvPr/>
+        </p:nvSpPr>
+        <p:spPr>
+          <a:xfrm>
+            <a:off x="1097280" y="731520"/>
+            <a:ext cx="3657600" cy="365760"/>
+          </a:xfrm>
+          <a:prstGeom prst="rect">
+            <a:avLst/>
+          </a:prstGeom>
+          <a:noFill/>
+        </p:spPr>
+        <p:txBody>
+          <a:bodyPr wrap="none">
+            <a:spAutoFit/>
+          </a:bodyPr>
+          <a:lstStyle/>
+          <a:p>
+            <a:pPr algn="l">
+              <a:defRPr sz="1000" b="1">
+                <a:solidFill>
+                  <a:srgbClr val="FFB72B"/>
+                </a:solidFill>
+                <a:latin typeface="Calibri"/>
+              </a:defRPr>
+            </a:pPr>
+            <a:r>
+              <a:t>🎂  CELEBRATION</a:t>
+            </a:r>
+          </a:p>
+        </p:txBody>
+      </p:sp>
+      <p:sp>
+        <p:nvSpPr>
+          <p:cNvPr id="4" name="TextBox 3"/>
+          <p:cNvSpPr txBox="1"/>
+          <p:nvPr/>
+        </p:nvSpPr>
+        <p:spPr>
+          <a:xfrm>
+            <a:off x="1097280" y="1188720"/>
+            <a:ext cx="9966960" cy="731520"/>
+          </a:xfrm>
+          <a:prstGeom prst="rect">
+            <a:avLst/>
+          </a:prstGeom>
+          <a:noFill/>
+        </p:spPr>
+        <p:txBody>
+          <a:bodyPr wrap="square">
+            <a:spAutoFit/>
+          </a:bodyPr>
+          <a:lstStyle/>
+          <a:p>
+            <a:pPr algn="l">
+              <a:defRPr sz="3200" b="1" i="0">
+                <a:solidFill>
+                  <a:srgbClr val="FFB72B"/>
+                </a:solidFill>
+                <a:latin typeface="Calibri"/>
+              </a:defRPr>
+            </a:pPr>
+            <a:r>
+              <a:t>Happy Birthday!</a:t>
+            </a:r>
+          </a:p>
+        </p:txBody>
+      </p:sp>
+      <p:sp>
+        <p:nvSpPr>
+          <p:cNvPr id="5" name="TextBox 4"/>
+          <p:cNvSpPr txBox="1"/>
+          <p:nvPr/>
+        </p:nvSpPr>
+        <p:spPr>
+          <a:xfrm>
+            <a:off x="1097280" y="2103120"/>
+            <a:ext cx="9966960" cy="640080"/>
+          </a:xfrm>
+          <a:prstGeom prst="rect">
+            <a:avLst/>
+          </a:prstGeom>
+          <a:noFill/>
+        </p:spPr>
+        <p:txBody>
+          <a:bodyPr wrap="square">
+            <a:spAutoFit/>
+          </a:bodyPr>
+          <a:lstStyle/>
+          <a:p>
+            <a:pPr algn="l">
+              <a:defRPr sz="2800" b="1" i="0">
+                <a:solidFill>
+                  <a:srgbClr val="FFFFFF"/>
+                </a:solidFill>
+                <a:latin typeface="Calibri"/>
+              </a:defRPr>
+            </a:pPr>
+            <a:r>
+              <a:t>Roman Shakhanov</a:t>
+            </a:r>
+          </a:p>
+        </p:txBody>
+      </p:sp>
+      <p:sp>
+        <p:nvSpPr>
+          <p:cNvPr id="6" name="TextBox 5"/>
+          <p:cNvSpPr txBox="1"/>
+          <p:nvPr/>
+        </p:nvSpPr>
+        <p:spPr>
+          <a:xfrm>
+            <a:off x="1097280" y="2743200"/>
+            <a:ext cx="9966960" cy="365760"/>
+          </a:xfrm>
+          <a:prstGeom prst="rect">
+            <a:avLst/>
+          </a:prstGeom>
+          <a:noFill/>
+        </p:spPr>
+        <p:txBody>
+          <a:bodyPr wrap="square">
+            <a:spAutoFit/>
+          </a:bodyPr>
+          <a:lstStyle/>
+          <a:p>
+            <a:pPr algn="l">
+              <a:defRPr sz="1400" b="0" i="0">
+                <a:solidFill>
+                  <a:srgbClr val="8F95A3"/>
+                </a:solidFill>
+                <a:latin typeface="Calibri"/>
+              </a:defRPr>
+            </a:pPr>
+            <a:r>
+              <a:t>March 13</a:t>
             </a:r>
           </a:p>
         </p:txBody>
@@ -4899,30 +9812,30 @@
         </p:nvSpPr>
         <p:spPr>
           <a:xfrm>
-            <a:off x="1097280" y="4754880"/>
-            <a:ext cx="9966960" cy="365760"/>
-          </a:xfrm>
-          <a:prstGeom prst="rect">
-            <a:avLst/>
-          </a:prstGeom>
-          <a:noFill/>
-        </p:spPr>
-        <p:txBody>
-          <a:bodyPr wrap="square">
-            <a:spAutoFit/>
-          </a:bodyPr>
-          <a:lstStyle/>
-          <a:p>
-            <a:pPr algn="l">
-              <a:defRPr sz="1400" b="0" i="0">
-                <a:solidFill>
-                  <a:srgbClr val="8F95A3"/>
-                </a:solidFill>
-                <a:latin typeface="Calibri"/>
-              </a:defRPr>
-            </a:pPr>
-            <a:r>
-              <a:t>— Clappy</a:t>
+            <a:off x="1097280" y="3291840"/>
+            <a:ext cx="9966960" cy="914400"/>
+          </a:xfrm>
+          <a:prstGeom prst="rect">
+            <a:avLst/>
+          </a:prstGeom>
+          <a:noFill/>
+        </p:spPr>
+        <p:txBody>
+          <a:bodyPr wrap="square">
+            <a:spAutoFit/>
+          </a:bodyPr>
+          <a:lstStyle/>
+          <a:p>
+            <a:pPr algn="l">
+              <a:defRPr sz="1600" b="0" i="0">
+                <a:solidFill>
+                  <a:srgbClr val="E2E2EA"/>
+                </a:solidFill>
+                <a:latin typeface="Calibri"/>
+              </a:defRPr>
+            </a:pPr>
+            <a:r>
+              <a:t>Wishing you an amazing day filled with joy and celebration!</a:t>
             </a:r>
           </a:p>
         </p:txBody>
@@ -4935,30 +9848,30 @@
         </p:nvSpPr>
         <p:spPr>
           <a:xfrm>
-            <a:off x="1097280" y="5760720"/>
-            <a:ext cx="9966960" cy="274320"/>
-          </a:xfrm>
-          <a:prstGeom prst="rect">
-            <a:avLst/>
-          </a:prstGeom>
-          <a:noFill/>
-        </p:spPr>
-        <p:txBody>
-          <a:bodyPr wrap="square">
-            <a:spAutoFit/>
-          </a:bodyPr>
-          <a:lstStyle/>
-          <a:p>
-            <a:pPr algn="l">
-              <a:defRPr sz="1100" b="0" i="0">
-                <a:solidFill>
-                  <a:srgbClr val="5C6270"/>
-                </a:solidFill>
-                <a:latin typeface="Calibri"/>
-              </a:defRPr>
-            </a:pPr>
-            <a:r>
-              <a:t>#claps</a:t>
+            <a:off x="1097280" y="4572000"/>
+            <a:ext cx="9966960" cy="457200"/>
+          </a:xfrm>
+          <a:prstGeom prst="rect">
+            <a:avLst/>
+          </a:prstGeom>
+          <a:noFill/>
+        </p:spPr>
+        <p:txBody>
+          <a:bodyPr wrap="square">
+            <a:spAutoFit/>
+          </a:bodyPr>
+          <a:lstStyle/>
+          <a:p>
+            <a:pPr algn="l">
+              <a:defRPr sz="1400" b="0" i="1">
+                <a:solidFill>
+                  <a:srgbClr val="FFB72B"/>
+                </a:solidFill>
+                <a:latin typeface="Calibri"/>
+              </a:defRPr>
+            </a:pPr>
+            <a:r>
+              <a:t>With love, Your Appodeal Team 💜</a:t>
             </a:r>
           </a:p>
         </p:txBody>
